--- a/Unit decks/Unit 05 - Aligning Heart & Mind.pptx
+++ b/Unit decks/Unit 05 - Aligning Heart & Mind.pptx
@@ -725,6 +725,34 @@
             </a:r>
             <a:endParaRPr lang="en-US" dirty="0"/>
           </a:p>
+          <a:p/>
+          <a:p>
+            <a:r>
+              <a:t>Professional insights:</a:t>
+            </a:r>
+          </a:p>
+          <a:p/>
+          <a:p>
+            <a:r>
+              <a:t>Published and understood: Organisations often assume that completing a restructure, implementing a system or publishing a strategy means transformation has occurred. Sustainable results require people to understand what the change means, why it matters and what they must now do differently.</a:t>
+            </a:r>
+          </a:p>
+          <a:p>
+            <a:r>
+              <a:t>Source: Journal, 9 August 2026 — Professional Insights: Strategy</a:t>
+            </a:r>
+          </a:p>
+          <a:p/>
+          <a:p>
+            <a:r>
+              <a:t>Knowing and committing: Strategic paralysis often comes from the gap between knowing what needs to happen and committing to do it. If the strategy has been articulated and nothing has moved in a quarter, the bottleneck is the commitment.</a:t>
+            </a:r>
+          </a:p>
+          <a:p>
+            <a:r>
+              <a:t>Source: Journal, 13 May 2026 — Professional Insights: Strategy</a:t>
+            </a:r>
+          </a:p>
         </p:txBody>
       </p:sp>
       <p:sp>
@@ -826,6 +854,34 @@
 - ✎ Reflection How much of your current leadership time is spent enforcing compliance? What is the opportunity cost of this?</a:t>
             </a:r>
             <a:endParaRPr lang="en-US" dirty="0"/>
+          </a:p>
+          <a:p/>
+          <a:p>
+            <a:r>
+              <a:t>Professional insights:</a:t>
+            </a:r>
+          </a:p>
+          <a:p/>
+          <a:p>
+            <a:r>
+              <a:t>Resilient when leaders are absent: A leader can manage someone’s conduct without ever securing their conviction. The question to ask about the people being developed: do they understand why well enough to sustain it without me? Dependence on the leader’s presence is managed behaviour.</a:t>
+            </a:r>
+          </a:p>
+          <a:p>
+            <a:r>
+              <a:t>Source: Journal, 24 June 2026 — Professional Insights: Leadership</a:t>
+            </a:r>
+          </a:p>
+          <a:p/>
+          <a:p>
+            <a:r>
+              <a:t>Engagement without adoption: A draining pattern in mature teams is engagement without adoption: the team attends, questions and challenges, and the decision is never received. Name the pattern directly, then either revise the decision or close the debate and call for adoption.</a:t>
+            </a:r>
+          </a:p>
+          <a:p>
+            <a:r>
+              <a:t>Source: Journal, 19 April 2026 — Professional Insights: Culture</a:t>
+            </a:r>
           </a:p>
         </p:txBody>
       </p:sp>
@@ -1180,6 +1236,34 @@
 ⚠ The same zone that was manageable as a leverage point becomes a crisis requiring systemic rebuilding.</a:t>
             </a:r>
             <a:endParaRPr lang="en-US" dirty="0"/>
+          </a:p>
+          <a:p/>
+          <a:p>
+            <a:r>
+              <a:t>Professional insights:</a:t>
+            </a:r>
+          </a:p>
+          <a:p/>
+          <a:p>
+            <a:r>
+              <a:t>Listening to strain: A strategy that cannot absorb honest feedback becomes disconnected from reality. When operational strain, excessive demands or declining trust are raised, assess how people are experiencing the system. Early listening is the intervention that stabilises a High Flammable Zone.</a:t>
+            </a:r>
+          </a:p>
+          <a:p>
+            <a:r>
+              <a:t>Source: Journal, 17 July 2026 — Professional Insights: Strategy</a:t>
+            </a:r>
+          </a:p>
+          <a:p/>
+          <a:p>
+            <a:r>
+              <a:t>Diagnose the soil: The same input lands differently depending on the ground it falls on. When a change initiative fails to take, the reflex is to blame the message. First diagnose the conditions stopping good input from rooting.</a:t>
+            </a:r>
+          </a:p>
+          <a:p>
+            <a:r>
+              <a:t>Source: Journal, 21 May 2026 — Professional Insights: Culture</a:t>
+            </a:r>
           </a:p>
         </p:txBody>
       </p:sp>
@@ -1546,6 +1630,23 @@
             </a:r>
             <a:endParaRPr lang="en-US" dirty="0"/>
           </a:p>
+          <a:p/>
+          <a:p>
+            <a:r>
+              <a:t>Professional insights:</a:t>
+            </a:r>
+          </a:p>
+          <a:p/>
+          <a:p>
+            <a:r>
+              <a:t>Distinct contribution, shared whole: Healthy cultures value distinct contribution and collaboration together. They discourage empire-building and needless overlap, and help people strengthen the whole through clear roles and mutual support.</a:t>
+            </a:r>
+          </a:p>
+          <a:p>
+            <a:r>
+              <a:t>Source: Journal, 28 August 2026 — Professional Insights: Culture</a:t>
+            </a:r>
+          </a:p>
         </p:txBody>
       </p:sp>
       <p:sp>
@@ -1874,6 +1975,34 @@
             </a:r>
             <a:endParaRPr lang="en-US" dirty="0"/>
           </a:p>
+          <a:p/>
+          <a:p>
+            <a:r>
+              <a:t>Professional insights:</a:t>
+            </a:r>
+          </a:p>
+          <a:p/>
+          <a:p>
+            <a:r>
+              <a:t>Listening first: Teams that move straight from “here is what changed” to “here is what we need you to do next” produce resistance they cannot explain. The resistance signals that people do not yet feel understood. Use this for Step 2 · Exchange &amp; Dialogue.</a:t>
+            </a:r>
+          </a:p>
+          <a:p>
+            <a:r>
+              <a:t>Source: Journal, 25 June 2026 — Professional Insights: Culture</a:t>
+            </a:r>
+          </a:p>
+          <a:p/>
+          <a:p>
+            <a:r>
+              <a:t>One open question: Pressure and assumption turn silence into disengagement and intensity into instability. Before correcting, ask one open question (“What’s going on for you today?”) and wait for the answer.</a:t>
+            </a:r>
+          </a:p>
+          <a:p>
+            <a:r>
+              <a:t>Source: Journal, 4 May 2026 — Professional Insights: Leadership</a:t>
+            </a:r>
+          </a:p>
         </p:txBody>
       </p:sp>
       <p:sp>
@@ -2299,6 +2428,34 @@
 - ✎ Reflection In your current role, which filter (Mind or Heart) tends to shape your first response to a new strategic priority? What are the implications?</a:t>
             </a:r>
             <a:endParaRPr lang="en-US" dirty="0"/>
+          </a:p>
+          <a:p/>
+          <a:p>
+            <a:r>
+              <a:t>Professional insights:</a:t>
+            </a:r>
+          </a:p>
+          <a:p/>
+          <a:p>
+            <a:r>
+              <a:t>Cognition — Mind: Many leaders are one bad interior sentence away from a quarter of poor decisions: the silent conclusion that the situation is unwinnable or that the board has already decided. Ask participants to write down the sentence running in their head about the future and test it against the evidence.</a:t>
+            </a:r>
+          </a:p>
+          <a:p>
+            <a:r>
+              <a:t>Source: Journal, 18 May 2026 — Professional Insights: Strategy</a:t>
+            </a:r>
+          </a:p>
+          <a:p/>
+          <a:p>
+            <a:r>
+              <a:t>Emotion — Heart: Organisations that reduce everything to deliverables and KPIs, with no sense of what it is all for, produce people who show up physically and are absent in every other way. People need to feel the significance of what they are part of.</a:t>
+            </a:r>
+          </a:p>
+          <a:p>
+            <a:r>
+              <a:t>Source: Journal, 12 January 2026 — Professional Insights: Culture</a:t>
+            </a:r>
           </a:p>
         </p:txBody>
       </p:sp>
@@ -2428,6 +2585,23 @@
             </a:r>
             <a:endParaRPr lang="en-US" dirty="0"/>
           </a:p>
+          <a:p/>
+          <a:p>
+            <a:r>
+              <a:t>Professional insights:</a:t>
+            </a:r>
+          </a:p>
+          <a:p/>
+          <a:p>
+            <a:r>
+              <a:t>Principle 1 · Strategy moves through people: Leaders who consistently explain the why behind hard decisions, structural changes and accountability moments build a culture of understanding. Every significant leadership act should leave people knowing something true about the organisation’s direction and character.</a:t>
+            </a:r>
+          </a:p>
+          <a:p>
+            <a:r>
+              <a:t>Source: Journal, 2 March 2026 — Professional Insights</a:t>
+            </a:r>
+          </a:p>
         </p:txBody>
       </p:sp>
       <p:sp>
@@ -2527,6 +2701,45 @@
 Guidance: Principle 2 (Misalignment Fragments Effort) generates the most immediate recognition — use it as a pivot.</a:t>
             </a:r>
             <a:endParaRPr lang="en-US" dirty="0"/>
+          </a:p>
+          <a:p/>
+          <a:p>
+            <a:r>
+              <a:t>Professional insights:</a:t>
+            </a:r>
+          </a:p>
+          <a:p/>
+          <a:p>
+            <a:r>
+              <a:t>Chinese Whispers: Organisations that communicate direction only in crisis moments find that the alignment achieved has dissipated by the next one. Consistent, continuous direction communication produces lasting alignment.</a:t>
+            </a:r>
+          </a:p>
+          <a:p>
+            <a:r>
+              <a:t>Source: Journal, 17 February 2026 — Professional Insights: Strategy</a:t>
+            </a:r>
+          </a:p>
+          <a:p/>
+          <a:p>
+            <a:r>
+              <a:t>Clarification Debt: Leadership communication must be designed for the receiver. Expertise becomes ineffective when it cannot be translated into clear understanding.</a:t>
+            </a:r>
+          </a:p>
+          <a:p>
+            <a:r>
+              <a:t>Source: Journal, 11 September 2026 — Professional Insights: Leadership</a:t>
+            </a:r>
+          </a:p>
+          <a:p/>
+          <a:p>
+            <a:r>
+              <a:t>Leaders own the knowledge gap: Where people do not know the governing principles, the strategic direction or the cultural standards, drift follows. The leaders responsible for communicating them are accountable for the gap between what people know and what they need to know.</a:t>
+            </a:r>
+          </a:p>
+          <a:p>
+            <a:r>
+              <a:t>Source: Journal, 26 March 2026 — Professional Insights</a:t>
+            </a:r>
           </a:p>
         </p:txBody>
       </p:sp>
@@ -2665,6 +2878,45 @@
             </a:r>
             <a:endParaRPr lang="en-US" dirty="0"/>
           </a:p>
+          <a:p/>
+          <a:p>
+            <a:r>
+              <a:t>Professional insights:</a:t>
+            </a:r>
+          </a:p>
+          <a:p/>
+          <a:p>
+            <a:r>
+              <a:t>Certainty: In unfamiliar territory, address the fear in the team directly, promise presence and support, and describe what success looks like and how the team will know it has been achieved.</a:t>
+            </a:r>
+          </a:p>
+          <a:p>
+            <a:r>
+              <a:t>Source: Journal, 29 January 2026 — Professional Insights: Strategy</a:t>
+            </a:r>
+          </a:p>
+          <a:p/>
+          <a:p>
+            <a:r>
+              <a:t>Resistance and legitimacy: Leaders who answer resistance with escalating force are solving for control when the problem is legitimacy. Ask why the resistance exists before deciding how to respond.</a:t>
+            </a:r>
+          </a:p>
+          <a:p>
+            <a:r>
+              <a:t>Source: Journal, 3 February 2026 — Professional Insights: Strategy</a:t>
+            </a:r>
+          </a:p>
+          <a:p/>
+          <a:p>
+            <a:r>
+              <a:t>Resistance as information: Repeated resistance can be the signal of a genuine obstacle. Leaders who suppress it without investigating its source risk striking the messenger and missing the obstacle.</a:t>
+            </a:r>
+          </a:p>
+          <a:p>
+            <a:r>
+              <a:t>Source: Journal, 11 March 2026 — Professional Insights</a:t>
+            </a:r>
+          </a:p>
         </p:txBody>
       </p:sp>
       <p:sp>
@@ -2793,6 +3045,23 @@
 - ✎ Reflection If you audited your last leadership review against the ACE-IT behaviours — where would you find the biggest gap between the ideal and the observable? What one behavioural change would create the most impact?</a:t>
             </a:r>
             <a:endParaRPr lang="en-US" dirty="0"/>
+          </a:p>
+          <a:p/>
+          <a:p>
+            <a:r>
+              <a:t>Professional insights:</a:t>
+            </a:r>
+          </a:p>
+          <a:p/>
+          <a:p>
+            <a:r>
+              <a:t>Integrity: The team reads the practice and discounts the statement, and the gap between the two is where credibility erodes fastest. Ask leaders to name where their stated position and lived practice run in opposite directions, and to close the gap before someone else names it.</a:t>
+            </a:r>
+          </a:p>
+          <a:p>
+            <a:r>
+              <a:t>Source: Journal, 21 April 2026 — Professional Insights: Leadership</a:t>
+            </a:r>
           </a:p>
         </p:txBody>
       </p:sp>

--- a/Unit decks/Unit 05 - Aligning Heart & Mind.pptx
+++ b/Unit decks/Unit 05 - Aligning Heart & Mind.pptx
@@ -545,6 +545,23 @@
             </a:r>
             <a:endParaRPr lang="en-US" dirty="0"/>
           </a:p>
+          <a:p/>
+          <a:p>
+            <a:r>
+              <a:t>Source detail (S2R® manuscript):</a:t>
+            </a:r>
+          </a:p>
+          <a:p/>
+          <a:p>
+            <a:r>
+              <a:t>Module context: The Influence module equips participants to understand how each CXO role transforms strategic intent into execution reality. In this phase, leaders move from being architects of strategy to engineers of execution flow: unclogging resistance and establishing the accountability architecture required to sustain momentum under pressure.</a:t>
+            </a:r>
+          </a:p>
+          <a:p>
+            <a:r>
+              <a:t>Throughout this module, participants explore how different functional perspectives interpret direction, and identify the specific steps where these interpretations create either cross-functional tension or powerful reinforcement.</a:t>
+            </a:r>
+          </a:p>
         </p:txBody>
       </p:sp>
       <p:sp>
@@ -639,6 +656,28 @@
             </a:r>
             <a:endParaRPr lang="en-US" dirty="0"/>
           </a:p>
+          <a:p/>
+          <a:p>
+            <a:r>
+              <a:t>Source detail (S2R® manuscript):</a:t>
+            </a:r>
+          </a:p>
+          <a:p/>
+          <a:p>
+            <a:r>
+              <a:t>Why reactions are predictable: Whenever new goals, priorities, structures, or expectations are introduced, individuals instinctively evaluate the impact on their personal security and identity.</a:t>
+            </a:r>
+          </a:p>
+          <a:p>
+            <a:r>
+              <a:t>The SCARF Model, developed by David Rock, explains why people often resist strategic change, and why resistance shows up whenever something new is introduced. Any new goal, task, system, leader, metric, structure, or way of working is first evaluated emotionally, before it is evaluated rationally. This happens automatically.</a:t>
+            </a:r>
+          </a:p>
+          <a:p>
+            <a:r>
+              <a:t>The model identifies five ways emotions are triggered during times of change, and how they show up in day-to-day execution: Status, Certainty, Autonomy, Relatedness and Fairness. The full trigger detail is in the notes of the SCARF slide (1.5).</a:t>
+            </a:r>
+          </a:p>
         </p:txBody>
       </p:sp>
       <p:sp>
@@ -732,6 +771,23 @@
 ➤ Facilitation insight: Ask leaders: “If someone external observed your team for one week, which ACE-IT behaviour would they see most clearly? Which would be absent?” The honest answer is a diagnostic.</a:t>
             </a:r>
             <a:endParaRPr lang="en-US" dirty="0"/>
+          </a:p>
+          <a:p/>
+          <a:p>
+            <a:r>
+              <a:t>Source detail (S2R® manuscript):</a:t>
+            </a:r>
+          </a:p>
+          <a:p/>
+          <a:p>
+            <a:r>
+              <a:t>The standard: Strategic alignment ultimately becomes visible through behaviour. There are five universally desired behaviours that support strategy design and implementation: Accountability, Commitment, Engagement, Integrity and Transparency.</a:t>
+            </a:r>
+          </a:p>
+          <a:p>
+            <a:r>
+              <a:t>ACE-IT provides the behavioural signals that confirm whether alignment is genuinely present. With behavioural standards, alignment becomes visible, measurable, and sustainable. These behaviours are independent of an organisation’s values. The full Leadership Behaviour Guideline is in the notes of the ACE-IT slide (1.7).</a:t>
+            </a:r>
           </a:p>
         </p:txBody>
       </p:sp>
@@ -1267,6 +1323,49 @@
           <a:p/>
           <a:p>
             <a:r>
+              <a:t>Source detail (S2R® manuscript):</a:t>
+            </a:r>
+          </a:p>
+          <a:p/>
+          <a:p>
+            <a:r>
+              <a:t>The five triggers in full:</a:t>
+            </a:r>
+          </a:p>
+          <a:p>
+            <a:r>
+              <a:t>Status: “Will this change reduce my importance, credibility, or influence?” Triggered by: new leaders or reporting lines; new KPIs or performance standards; new systems that expose performance; new ways of working that shift expertise. How it shows up: defensive behaviour; undermining or second-guessing decisions; withholding information or cooperation. Execution impact: political friction; slowed decisions; misalignment masked as professionalism.</a:t>
+            </a:r>
+          </a:p>
+          <a:p>
+            <a:r>
+              <a:t>Certainty: “Do I know what success looks like now?” Triggered by: new goals or priorities; ambiguous task ownership; changing metrics or review processes; shifting timelines or expectations. How it shows up: repeated clarification requests; delay disguised as “waiting for alignment”; reversion to old habits. Execution impact: loss of momentum; paralysis under pressure; risk avoidance.</a:t>
+            </a:r>
+          </a:p>
+          <a:p>
+            <a:r>
+              <a:t>Autonomy: “Am I losing control over how I do my work or make decisions?” Triggered by: new systems or tools; standardised processes; centralised decision rights; increased oversight or reporting. How it shows up: passive compliance; minimal effort delivery; resistance through bureaucracy. Execution impact: low engagement energy; mechanical execution; fragile performance.</a:t>
+            </a:r>
+          </a:p>
+          <a:p>
+            <a:r>
+              <a:t>Relatedness: “Do I still belong, or am I being displaced?” Triggered by: team restructuring; new leaders or external hires; cross-functional initiatives; remote or hybrid work shifts. How it shows up: silo behaviour; reduced collaboration; guarded communication. Execution impact: trust erosion; coordination breakdown; rework and duplication.</a:t>
+            </a:r>
+          </a:p>
+          <a:p>
+            <a:r>
+              <a:t>Fairness: “Is this change being applied equitably and transparently?” Triggered by: uneven workload distribution; selective enforcement of rules; inconsistent rewards or consequences; unclear rationale behind decisions. How it shows up: cynicism; gossip replacing dialogue; emotional withdrawal. Execution impact: values misalignment; morale drain; cultural decay.</a:t>
+            </a:r>
+          </a:p>
+          <a:p/>
+          <a:p>
+            <a:r>
+              <a:t>The SCARF tool: Leaders can use it whenever they need to observe behavioural signals during strategy discussions or change initiatives. It helps identify the underlying social concerns influencing reactions, so that leaders can adjust their approach and strengthen the alignment of hearts and minds.</a:t>
+            </a:r>
+          </a:p>
+          <a:p/>
+          <a:p>
+            <a:r>
               <a:t>Professional insights:</a:t>
             </a:r>
           </a:p>
@@ -1587,6 +1686,43 @@
           <a:p/>
           <a:p>
             <a:r>
+              <a:t>Source detail (S2R® manuscript):</a:t>
+            </a:r>
+          </a:p>
+          <a:p/>
+          <a:p>
+            <a:r>
+              <a:t>Leadership Behaviour Guideline for ACE-IT (full table):</a:t>
+            </a:r>
+          </a:p>
+          <a:p>
+            <a:r>
+              <a:t>Accountability. Definition: taking full ownership for results. Desired leadership behaviour: defines clear ownership for goals and follow-through; acknowledges missteps and drives corrective action; holds self and others to measurable standards. Observable signs: commitments documented and tracked; reviews end with agreed owners and deadlines; “We missed it, here’s how we’ll fix it” language is common.</a:t>
+            </a:r>
+          </a:p>
+          <a:p>
+            <a:r>
+              <a:t>Commitment. Definition: staying anchored to agreed strategic intent, even when pressure rises. Desired leadership behaviour: aligns daily choices to long-term direction; protects priorities from noise or distraction; follows through on promises despite discomfort. Observable signs: strategic priorities stay consistent; leaders close loops they open; non-strategic work is declined or deferred.</a:t>
+            </a:r>
+          </a:p>
+          <a:p>
+            <a:r>
+              <a:t>Engagement. Definition: actively involving self and others in sense-making, dialogue, and execution. Desired leadership behaviour: invites participation and dissent; listens to understand; connects people’s roles to customer or purpose value. Observable signs: team meetings are two-way; feedback loops are visible in tools or reviews; people quote the shared “why”.</a:t>
+            </a:r>
+          </a:p>
+          <a:p>
+            <a:r>
+              <a:t>Integrity. Definition: acting consistently with values, facts, and truth, even when inconvenient. Desired leadership behaviour: says what is true, even when it is hard; declares conflicts of interest or bias early; uses data to support choices. Observable signs: evidence cited before decisions; values referenced in trade-offs; teams trust that the leader’s word matches deed.</a:t>
+            </a:r>
+          </a:p>
+          <a:p>
+            <a:r>
+              <a:t>Transparency. Definition: making reasoning, progress, and constraints visible to all stakeholders. Desired leadership behaviour: communicates decisions with rationale and data; shares progress openly, including challenges; documents choices and lessons for others. Observable signs: dashboards updated regularly; decisions logged and accessible; a “no surprises” culture is evident.</a:t>
+            </a:r>
+          </a:p>
+          <a:p/>
+          <a:p>
+            <a:r>
               <a:t>Professional insights:</a:t>
             </a:r>
           </a:p>
@@ -1697,6 +1833,28 @@
             </a:r>
             <a:endParaRPr lang="en-US" dirty="0"/>
           </a:p>
+          <a:p/>
+          <a:p>
+            <a:r>
+              <a:t>Source detail (S2R® manuscript):</a:t>
+            </a:r>
+          </a:p>
+          <a:p/>
+          <a:p>
+            <a:r>
+              <a:t>Where this section sits: The Aligning Hearts and Minds unit establishes the human conditions required for strategy execution. The Awareness stage introduced the idea that strategy moves through people before it moves through plans. The next step is to understand why this matters operationally. This section is the Intelligence stage of the unit: it moves from describing the concept of alignment to understanding its strategic necessity.</a:t>
+            </a:r>
+          </a:p>
+          <a:p>
+            <a:r>
+              <a:t>Within the Strategy2Results® process, Aligning Hearts and Minds functions as the ignition point of execution. It is the moment where strategy transitions from a document describing intent into a system capable of producing movement. Without this ignition point, strategy remains inert: well articulated and operationally inactive.</a:t>
+            </a:r>
+          </a:p>
+          <a:p>
+            <a:r>
+              <a:t>Three foundational logics explain why this unit determines execution outcomes.</a:t>
+            </a:r>
+          </a:p>
         </p:txBody>
       </p:sp>
       <p:sp>
@@ -1797,6 +1955,18 @@
           <a:p/>
           <a:p>
             <a:r>
+              <a:t>Source detail (S2R® manuscript):</a:t>
+            </a:r>
+          </a:p>
+          <a:p/>
+          <a:p>
+            <a:r>
+              <a:t>The energy logic in two lines: No system executes itself, and no plan moves on its own. Until individuals across the organisation decide “This matters to me” and “I am willing to invest energy in making this succeed”, strategy remains theoretical.</a:t>
+            </a:r>
+          </a:p>
+          <a:p/>
+          <a:p>
+            <a:r>
               <a:t>Professional insights:</a:t>
             </a:r>
           </a:p>
@@ -2020,6 +2190,38 @@
           <a:p/>
           <a:p>
             <a:r>
+              <a:t>Source detail (S2R® manuscript):</a:t>
+            </a:r>
+          </a:p>
+          <a:p/>
+          <a:p>
+            <a:r>
+              <a:t>Two mechanisms: Organisations can drive execution through two fundamentally different mechanisms.</a:t>
+            </a:r>
+          </a:p>
+          <a:p>
+            <a:r>
+              <a:t>Compliance in full: Compliance occurs when people act primarily because authority requires it, rules enforce it, or systems monitor it. It can produce visible output in the short term: work gets completed, processes are followed, and order appears maintained. Compliance relies on external pressure, with no internal commitment behind it. As a result, it requires continuous supervision, escalation, and correction. When leadership attention shifts, execution weakens.</a:t>
+            </a:r>
+          </a:p>
+          <a:p>
+            <a:r>
+              <a:t>Hidden costs over time: leadership time is consumed by follow-ups and monitoring; teams depend on instruction and stop taking initiative; decision-making slows as control increases. Execution becomes mechanical and loses resilience.</a:t>
+            </a:r>
+          </a:p>
+          <a:p>
+            <a:r>
+              <a:t>Commitment in full: Commitment emerges when people understand the strategic intent, believe the direction is meaningful, and feel personal ownership for outcomes. Execution continues even when leaders are not present because individuals are internally motivated to advance the strategy.</a:t>
+            </a:r>
+          </a:p>
+          <a:p>
+            <a:r>
+              <a:t>The payoff: Aligning Hearts and Minds shifts the execution system from supervised effort to self-driven momentum.</a:t>
+            </a:r>
+          </a:p>
+          <a:p/>
+          <a:p>
+            <a:r>
               <a:t>Professional insights:</a:t>
             </a:r>
           </a:p>
@@ -2256,6 +2458,23 @@
 Diagnostic exercise: Before revealing the COMPASS narratives, ask participants to independently rate their organisation on each domain (1 = strong alignment, 5 = severe misalignment). Then compare ratings across the leadership team. Divergent ratings are themselves diagnostic. Suggested section time: 50–60 minutes.</a:t>
             </a:r>
             <a:endParaRPr lang="en-US" dirty="0"/>
+          </a:p>
+          <a:p/>
+          <a:p>
+            <a:r>
+              <a:t>Source detail (S2R® manuscript):</a:t>
+            </a:r>
+          </a:p>
+          <a:p/>
+          <a:p>
+            <a:r>
+              <a:t>The leadership question: This stage asks where in the organisation alignment matters most right now. Extrapolating is the discipline of locating the organisational hot zones where alignment between hearts and minds is required, where it is beginning to fail, and where the symptoms of misalignment are most visible.</a:t>
+            </a:r>
+          </a:p>
+          <a:p>
+            <a:r>
+              <a:t>These zones typically appear in areas where human interpretation, emotional climate, and behaviour directly influence strategic outcomes. Leaders learn to identify two types of zones: High Flammables and Burning Platforms.</a:t>
+            </a:r>
           </a:p>
         </p:txBody>
       </p:sp>
@@ -2415,6 +2634,59 @@
             </a:r>
             <a:endParaRPr lang="en-US" dirty="0"/>
           </a:p>
+          <a:p/>
+          <a:p>
+            <a:r>
+              <a:t>Source detail (S2R® manuscript):</a:t>
+            </a:r>
+          </a:p>
+          <a:p/>
+          <a:p>
+            <a:r>
+              <a:t>The leverage zones: High Flammables are organisational leverage points: places where human interpretation, emotional state, and behaviour have a disproportionate impact on performance outcomes. Alignment carries its highest risk and its highest reward here.</a:t>
+            </a:r>
+          </a:p>
+          <a:p/>
+          <a:p>
+            <a:r>
+              <a:t>Opening line and further detail for each signal narrative:</a:t>
+            </a:r>
+          </a:p>
+          <a:p>
+            <a:r>
+              <a:t>Clarity of Strategic Direction. “When this signal is lit, the organisation is burning fuel without a map.” The most dangerous fire in any organisation is the one nobody can see. Frontline teams work hard in directions that diverge from boardroom intent because no one has made the destination unambiguous enough to follow. The organisation is moving in several directions at once, at significant cost.</a:t>
+            </a:r>
+          </a:p>
+          <a:p>
+            <a:r>
+              <a:t>Organisational Alignment. “Alignment is coordinated behaviour outside the room.” Of all the flammables in this framework, this is the one most frequently misdiagnosed. True alignment is visible in whether cross-functional teams move in the same direction without constant senior arbitration, whether decisions made at the top survive intact through each layer of the organisation, and whether the informal system reinforces or quietly undermines the formal one. The cost is operational and strategic: initiatives that require genuine cross-functional collaboration consistently stall, and the organisation learns over time that the safest bet is to stay in your lane.</a:t>
+            </a:r>
+          </a:p>
+          <a:p>
+            <a:r>
+              <a:t>Management Discipline. “Execution without discipline is intention without consequence.” Governance forums produce reports and no decisions. Leaders tolerate persistent underperformance because the conversation required to address it is uncomfortable. The organisation becomes extraordinarily busy doing things that do not move it forward.</a:t>
+            </a:r>
+          </a:p>
+          <a:p>
+            <a:r>
+              <a:t>People &amp; Capability. “The most expensive capability gap is the one you discover mid-execution.” By the time the gap becomes undeniable (key talent exits, burnout becomes visible, institutional knowledge walks out of the door), the cost of recovery is substantially higher than the cost of early intervention would have been.</a:t>
+            </a:r>
+          </a:p>
+          <a:p>
+            <a:r>
+              <a:t>Allocation of Resources. “Follow the money. It tells you what the organisation actually believes.” The misalignment is rarely deliberate. More often it reflects the compounding weight of past commitments, an absence of formal deprioritisation mechanisms, and a cultural reluctance to make the trade-offs that real strategic choice demands. The signal is flammable because it is self-reinforcing.</a:t>
+            </a:r>
+          </a:p>
+          <a:p>
+            <a:r>
+              <a:t>Sensing &amp; Adaptation. “An organisation that cannot read the signals around it will eventually be overtaken by them.” Markets shift. Customer needs evolve. Competitive dynamics change faster than planning cycles. Leaders defend forecasts when the evidence calls for an update, and the organisation finds itself reacting to crises that were, in hindsight, entirely visible.</a:t>
+            </a:r>
+          </a:p>
+          <a:p>
+            <a:r>
+              <a:t>Systems &amp; Execution. “A new strategy running through an old machine will always produce the same result.” The question is whether the governance structures, technology platforms, role accountabilities, and process designs are fit for the direction being pursued, or inherited from a previous strategy that no longer applies. Structural ambiguities (unclear accountabilities, overlapping ownership, single points of failure in critical roles) create friction that compounds with every execution cycle. Leaders reach for tactical interventions (more communication, more governance layers, more urgency) when what is required is a willingness to redesign the machine.</a:t>
+            </a:r>
+          </a:p>
         </p:txBody>
       </p:sp>
       <p:sp>
@@ -2514,6 +2786,23 @@
 ⚠ The same zone that was manageable as a leverage point becomes a crisis requiring systemic rebuilding.</a:t>
             </a:r>
             <a:endParaRPr lang="en-US" dirty="0"/>
+          </a:p>
+          <a:p/>
+          <a:p>
+            <a:r>
+              <a:t>Source detail (S2R® manuscript):</a:t>
+            </a:r>
+          </a:p>
+          <a:p/>
+          <a:p>
+            <a:r>
+              <a:t>Exposure points: These zones represent exposure points in the organisation. High Flammables are the most valuable places to intervene early and the most dangerous places to ignore. If alignment is addressed early, the zone stabilises and becomes a performance amplifier. If misalignment persists, the same zone eventually crosses a threshold and ignites into a Burning Platform.</a:t>
+            </a:r>
+          </a:p>
+          <a:p>
+            <a:r>
+              <a:t>Enterprise COMPASS Screening Tool: available on demand for leaders who need a baseline of common flammable zones and how to deal with them. Leaders can focus their attention on the specific zones where misalignment is most likely to disrupt strategic momentum, with no need to address alignment everywhere at once. The tool supports disciplined intervention: stabilising leverage points before they evolve into costly execution failures.</a:t>
+            </a:r>
           </a:p>
           <a:p/>
           <a:p>
@@ -2767,6 +3056,18 @@
             </a:r>
             <a:endParaRPr lang="en-US" dirty="0"/>
           </a:p>
+          <a:p/>
+          <a:p>
+            <a:r>
+              <a:t>Source detail (S2R® manuscript):</a:t>
+            </a:r>
+          </a:p>
+          <a:p/>
+          <a:p>
+            <a:r>
+              <a:t>The Converging Zone transforms functional expertise into coordinated leadership judgement. Without convergence, the organisation receives multiple interpretations of strategy, causing instability across the seven High Flammable domains.</a:t>
+            </a:r>
+          </a:p>
         </p:txBody>
       </p:sp>
       <p:sp>
@@ -2871,6 +3172,23 @@
 - ✎ Reflection Which state is your organisation currently closer to? What is the single most important convergence you need to achieve before your next major strategy initiative?</a:t>
             </a:r>
             <a:endParaRPr lang="en-US" dirty="0"/>
+          </a:p>
+          <a:p/>
+          <a:p>
+            <a:r>
+              <a:t>Source detail (S2R® manuscript):</a:t>
+            </a:r>
+          </a:p>
+          <a:p/>
+          <a:p>
+            <a:r>
+              <a:t>One leadership system: With Collective Intelligence, the executive team operates as a single leadership system, ensuring that direction remains clear, resources reinforce priorities, systems enable execution, and people move with coordinated effort. Collective Intelligence stabilises the seven High Flammable domains so that they act as leverage points for performance.</a:t>
+            </a:r>
+          </a:p>
+          <a:p>
+            <a:r>
+              <a:t>When Collective Intelligence occurs, the leadership system sends one coherent signal across the organisation. When it is absent, each domain begins to drift because different leaders unintentionally transmit different interpretations of the strategy.</a:t>
+            </a:r>
           </a:p>
         </p:txBody>
       </p:sp>
@@ -3661,6 +3979,28 @@
           <a:p/>
           <a:p>
             <a:r>
+              <a:t>Source detail (S2R® manuscript):</a:t>
+            </a:r>
+          </a:p>
+          <a:p/>
+          <a:p>
+            <a:r>
+              <a:t>How the exchange runs: Each leader completes the Collective Intelligence table for their own role and the two most closely related leadership roles, then shares it with the colleagues whose roles they selected. Each leader explains why they chose those colleagues and why they believe the colleague’s role most strongly activates collective intelligence.</a:t>
+            </a:r>
+          </a:p>
+          <a:p>
+            <a:r>
+              <a:t>The colleague then reacts: “Do you agree with the interpretation of the connectivity of your role?” “How else do you think you create collective intelligence?”</a:t>
+            </a:r>
+          </a:p>
+          <a:p>
+            <a:r>
+              <a:t>Why it works: The exchange helps participants see how different leaders interpret the same role responsibilities. Collective Intelligence emerges when executive leaders move from individual interpretations of responsibility to a shared understanding of how their roles jointly stabilise the seven alignment domains. When this convergence occurs, the organisation receives one coherent leadership signal.</a:t>
+            </a:r>
+          </a:p>
+          <a:p/>
+          <a:p>
+            <a:r>
               <a:t>Professional insights:</a:t>
             </a:r>
           </a:p>
@@ -3817,6 +4157,43 @@
             </a:r>
             <a:endParaRPr lang="en-US" dirty="0"/>
           </a:p>
+          <a:p/>
+          <a:p>
+            <a:r>
+              <a:t>Source detail (S2R® manuscript):</a:t>
+            </a:r>
+          </a:p>
+          <a:p/>
+          <a:p>
+            <a:r>
+              <a:t>The unit in four stages: The Aligning Hearts &amp; Minds unit establishes the human conditions required for strategy execution. It recognises a simple but decisive reality: strategy moves through people before it moves through systems. Execution therefore depends on whether the organisation achieves alignment of cognition (mind) and alignment of emotional engagement (heart) among the people responsible for delivering the strategy.</a:t>
+            </a:r>
+          </a:p>
+          <a:p>
+            <a:r>
+              <a:t>Awareness (What): Leaders recognise that strategy execution is first a human interpretation problem. Every executive interprets strategy through functional expertise, personality tendencies, and emotional context. Cognitive biases and emotional states shape how strategy is understood, prioritised, and acted upon. Aligning hearts and minds establishes the behavioural conditions that allow diverse perspectives to converge into coordinated action.</a:t>
+            </a:r>
+          </a:p>
+          <a:p>
+            <a:r>
+              <a:t>Intelligence (Why): Leaders understand why alignment determines execution outcomes. A strategy document represents strategic potential: direction, intent, and ambition. Execution begins only when individuals choose to invest energy in advancing that direction. Organisations can drive execution through compliance or through commitment. Alignment of hearts and minds shifts the organisation from supervised effort to self-driven momentum, enabling resilience, discretionary effort, and coordinated progress.</a:t>
+            </a:r>
+          </a:p>
+          <a:p>
+            <a:r>
+              <a:t>Extrapolating (Where): Leaders identify the organisational hot zones where alignment matters most. These High Flammable zones appear across the seven COMPASS domains. When alignment is strong, these domains amplify performance. When alignment weakens, they gradually escalate into Burning Platforms, where execution breakdown becomes visible and costly.</a:t>
+            </a:r>
+          </a:p>
+          <a:p>
+            <a:r>
+              <a:t>Converging Zone (Collective Intelligence): The executive team enters the Converging Zone, where individual functional perspectives integrate into a shared leadership interpretation. The leadership team begins operating as a single leadership system, stabilising the seven High Flammable domains and sending one coherent signal across the organisation.</a:t>
+            </a:r>
+          </a:p>
+          <a:p>
+            <a:r>
+              <a:t>Outcome: The organisation leaves the unit with aligned leadership interpretation, emotional commitment to the strategy, and clear visibility of the organisational conditions that will enable or constrain execution.</a:t>
+            </a:r>
+          </a:p>
         </p:txBody>
       </p:sp>
       <p:sp>
@@ -3914,6 +4291,23 @@
             </a:r>
             <a:endParaRPr lang="en-US" dirty="0"/>
           </a:p>
+          <a:p/>
+          <a:p>
+            <a:r>
+              <a:t>Source detail (S2R® manuscript):</a:t>
+            </a:r>
+          </a:p>
+          <a:p/>
+          <a:p>
+            <a:r>
+              <a:t>Guide (full wording): Before any strategy can be executed, it must travel through people. It reaches people before it reaches systems or dashboards. People are not blank slates waiting to receive direction. They arrive at every strategy meeting already carrying a personality profile, a set of emotional defaults, and a very specific set of personal motives that determine how much energy they will invest in the organisation’s goals.</a:t>
+            </a:r>
+          </a:p>
+          <a:p>
+            <a:r>
+              <a:t>Before you can lead strategy, you must understand the human terrain you are leading it through.</a:t>
+            </a:r>
+          </a:p>
         </p:txBody>
       </p:sp>
       <p:sp>
@@ -4019,6 +4413,29 @@
           <a:p/>
           <a:p>
             <a:r>
+              <a:t>Source detail (S2R® manuscript):</a:t>
+            </a:r>
+          </a:p>
+          <a:p/>
+          <a:p>
+            <a:r>
+              <a:t>The Functional Bias Problem: Every executive arrives at the leadership table carrying a professional perspective shaped by years of specialised expertise. Finance leaders naturally view the enterprise through capital efficiency and financial discipline. Operations leaders see execution flow, process reliability, and delivery capability. Human capital leaders focus on capability, culture, and organisational sustainability.</a:t>
+            </a:r>
+          </a:p>
+          <a:p>
+            <a:r>
+              <a:t>Each perspective is valid. Each captures an important dimension of the enterprise. Yet when these perspectives operate without deliberate integration, strategy begins to fragment. Leaders interpret the same signals differently, emphasise different risks, and prioritise different outcomes. The organisation still moves, with distributed interpretation where coordinated intent should be.</a:t>
+            </a:r>
+          </a:p>
+          <a:p/>
+          <a:p>
+            <a:r>
+              <a:t>The human entry point: Before strategy becomes operational activity, it must first be interpreted, experienced, and accepted by the people responsible for carrying it forward. Execution therefore begins inside the human system before it appears in plans, processes, or dashboards.</a:t>
+            </a:r>
+          </a:p>
+          <a:p/>
+          <a:p>
+            <a:r>
               <a:t>Professional insights:</a:t>
             </a:r>
           </a:p>
@@ -4138,6 +4555,54 @@
             </a:r>
             <a:endParaRPr lang="en-US" dirty="0"/>
           </a:p>
+          <a:p/>
+          <a:p>
+            <a:r>
+              <a:t>Source detail (S2R® manuscript):</a:t>
+            </a:r>
+          </a:p>
+          <a:p/>
+          <a:p>
+            <a:r>
+              <a:t>What the unit does: The Aligning Hearts and Minds unit addresses the Functional Bias Problem directly. It establishes the behavioural conditions that allow diverse executive perspectives to converge into shared understanding and coordinated action.</a:t>
+            </a:r>
+          </a:p>
+          <a:p>
+            <a:r>
+              <a:t>The five principles explain how this alignment is created and sustained across the organisation. Together they describe the human operating system that enables strategy to move from intention to execution.</a:t>
+            </a:r>
+          </a:p>
+          <a:p/>
+          <a:p>
+            <a:r>
+              <a:t>How the principles flow:</a:t>
+            </a:r>
+          </a:p>
+          <a:p>
+            <a:r>
+              <a:t>1. Strategy Moves Through People: establishes the human entry point of execution.</a:t>
+            </a:r>
+          </a:p>
+          <a:p>
+            <a:r>
+              <a:t>2. Misalignment Fragments Effort: explains the cost of ignoring the human system.</a:t>
+            </a:r>
+          </a:p>
+          <a:p>
+            <a:r>
+              <a:t>3. Alignment Must Be Designed: introduces the tools that create alignment.</a:t>
+            </a:r>
+          </a:p>
+          <a:p>
+            <a:r>
+              <a:t>4. Human Reactions Are Predictable: introduces the behavioural dynamics that influence execution.</a:t>
+            </a:r>
+          </a:p>
+          <a:p>
+            <a:r>
+              <a:t>5. Execution Must Be Visible in Behaviour: defines the observable standard for alignment.</a:t>
+            </a:r>
+          </a:p>
         </p:txBody>
       </p:sp>
       <p:sp>
@@ -4236,6 +4701,71 @@
           <a:p/>
           <a:p>
             <a:r>
+              <a:t>Source detail (S2R® manuscript):</a:t>
+            </a:r>
+          </a:p>
+          <a:p/>
+          <a:p>
+            <a:r>
+              <a:t>Two behavioural mechanics: The human operating conditions required for execution are governed by Cognitive Alignment (“Mind”) and Emotional Alignment (“Heart”). The mind shapes interpretation of what is at hand, while the heart shapes the lived experience of what is at hand. Alignment is the first execution system, and it is neither optional nor “soft”.</a:t>
+            </a:r>
+          </a:p>
+          <a:p/>
+          <a:p>
+            <a:r>
+              <a:t>Cognitive alignment (identifying biases): In behavioural strategy, people do not process strategy neutrally. Decisions and actions are filtered through assumptions, mental shortcuts, past experiences and risk perceptions. Cognitive alignment makes these filters visible so they can be managed deliberately, at executive and at team level. When biases are unexamined, alignment appears present while execution fragments later.</a:t>
+            </a:r>
+          </a:p>
+          <a:p/>
+          <a:p>
+            <a:r>
+              <a:t>Emotional alignment (identifying the state of being): Emotional alignment is achieved by explicitly naming the current emotional state through which strategy is being experienced. Strategy always lands into an emotional climate before it lands into action. Leaders and teams operate from a dominant state of being, commonly expressed across Ekman’s Six Basic Emotions: Joy, Sadness, Anger, Fear, Disgust, Surprise.</a:t>
+            </a:r>
+          </a:p>
+          <a:p>
+            <a:r>
+              <a:t>Each state influences:</a:t>
+            </a:r>
+          </a:p>
+          <a:p>
+            <a:r>
+              <a:t>- Engagement Energy: the level of discretionary effort, momentum, and willingness to contribute beyond minimum requirements.</a:t>
+            </a:r>
+          </a:p>
+          <a:p>
+            <a:r>
+              <a:t>- Morale Drain: the degree to which emotional fatigue, disappointment, or disengagement reduces capacity and persistence.</a:t>
+            </a:r>
+          </a:p>
+          <a:p>
+            <a:r>
+              <a:t>- Friction Load: the amount of hidden resistance, tension, or drag experienced in decisions, collaboration, and follow-through.</a:t>
+            </a:r>
+          </a:p>
+          <a:p>
+            <a:r>
+              <a:t>- Psychological Safety: the extent to which individuals feel safe to speak, challenge, admit uncertainty, and take appropriate risk.</a:t>
+            </a:r>
+          </a:p>
+          <a:p>
+            <a:r>
+              <a:t>- Values Alignment: the consistency between stated values, observed leadership behaviour, and everyday decisions under pressure.</a:t>
+            </a:r>
+          </a:p>
+          <a:p>
+            <a:r>
+              <a:t>In practice: identify the prevailing emotional state at leadership and team level; understand how that state is shaping behaviour and attention; agree behavioural guardrails to stabilise execution under that emotional load. Unacknowledged emotional states silently override rational plans.</a:t>
+            </a:r>
+          </a:p>
+          <a:p/>
+          <a:p>
+            <a:r>
+              <a:t>The awareness insight: Strategy enters the organisation through people before it becomes execution. Every strategic message is filtered through the mind (cognition) and the heart (emotion). The mind shapes how strategy is interpreted, while the heart shapes how it is experienced.</a:t>
+            </a:r>
+          </a:p>
+          <a:p/>
+          <a:p>
+            <a:r>
               <a:t>Professional insights:</a:t>
             </a:r>
           </a:p>
@@ -4353,6 +4883,74 @@
           <a:p/>
           <a:p>
             <a:r>
+              <a:t>Source detail (S2R® manuscript):</a:t>
+            </a:r>
+          </a:p>
+          <a:p/>
+          <a:p>
+            <a:r>
+              <a:t>How fragmentation begins: When interpretation and emotional experience are not aligned, the organisation keeps working and effort begins to fragment. Different functions interpret the strategy through their own priorities, assumptions, and pressures. Teams optimise locally, at the expense of the collective result.</a:t>
+            </a:r>
+          </a:p>
+          <a:p>
+            <a:r>
+              <a:t>The symptoms appear gradually: departments pursue competing priorities; cross-functional friction increases; duplicated work emerges; decisions slow down.</a:t>
+            </a:r>
+          </a:p>
+          <a:p>
+            <a:r>
+              <a:t>Execution loses coherence because capable people are moving in different directions at the same time. When either Cognitive Alignment (“Mind”) or Emotional Alignment (“Heart”) is misaligned, execution degrades. When both are ignored, strategy enters a state of Execution Coherence Breakdown.</a:t>
+            </a:r>
+          </a:p>
+          <a:p>
+            <a:r>
+              <a:t>When Aligning Hearts &amp; Minds is skipped or treated as “soft”, the organisation keeps working and starts drifting. The drift is dangerous because it is gradual, it is rationalised, and it is expensive.</a:t>
+            </a:r>
+          </a:p>
+          <a:p/>
+          <a:p>
+            <a:r>
+              <a:t>Observed results of fragmented effort (all six):</a:t>
+            </a:r>
+          </a:p>
+          <a:p>
+            <a:r>
+              <a:t>1. The “Chinese Whispers” Effect (Interpretation Collapse). Without deliberate cognitive alignment, each leadership layer re-interprets strategy through its own assumptions, intent mutates as it travels downward, and frontline execution bears little resemblance to boardroom intent. What leaders experience: “That’s not what we meant.” “Why are they doing it this way?”</a:t>
+            </a:r>
+          </a:p>
+          <a:p>
+            <a:r>
+              <a:t>2. The “Split Effort” Trap (Priority Fragmentation). When meaning is unclear, departments optimise locally, teams pursue conflicting priorities, and energy disperses and stops compounding. Everyone works hard, in separate directions. Execution symptoms: cross-functional tension, duplicated effort, rework disguised as “alignment meetings”.</a:t>
+            </a:r>
+          </a:p>
+          <a:p>
+            <a:r>
+              <a:t>3. Clarification Debt (Leadership Time Drain). When alignment is not established upfront, leaders pay later. 60–80% of leadership time is spent re-explaining, correcting, and realigning work that should have been clear from the start. This creates decision fatigue, micromanagement creep, and leadership bottlenecks. Leaders stop steering and start patching.</a:t>
+            </a:r>
+          </a:p>
+          <a:p>
+            <a:r>
+              <a:t>4. Silent Disengagement (Energy Withdrawal). When emotional alignment is ignored, people comply outwardly but withdraw inwardly, discretionary effort disappears, and morale drains without open resistance. This is the most dangerous form of disengagement because it looks like cooperation and feels like exhaustion.</a:t>
+            </a:r>
+          </a:p>
+          <a:p>
+            <a:r>
+              <a:t>5. Friction Becomes the Operating Norm (Emotional Drag). Unacknowledged emotional states convert into resistance framed as “process”, tension framed as “rigour”, and delay framed as “due diligence”. Execution becomes heavy. Everything costs more energy than it should.</a:t>
+            </a:r>
+          </a:p>
+          <a:p>
+            <a:r>
+              <a:t>6. Psychological Safety Erodes (Risk Avoidance). When people do not feel emotionally safe, they stop challenging weak decisions, they stop surfacing early warnings, and they default to self-protection. The organisation loses learning velocity, adaptability, and early-risk detection.</a:t>
+            </a:r>
+          </a:p>
+          <a:p>
+            <a:r>
+              <a:t>The slide shows three of the six (1, 3 and 4). The other three are here for the facilitator to draw on.</a:t>
+            </a:r>
+          </a:p>
+          <a:p/>
+          <a:p>
+            <a:r>
               <a:t>Professional insights:</a:t>
             </a:r>
           </a:p>
@@ -4485,6 +5083,33 @@
 ➤ Facilitation insight: These assessments are diagnostic tools. Their power lies in the conversation they generate. Frame them as leadership mirrors.</a:t>
             </a:r>
             <a:endParaRPr lang="en-US" dirty="0"/>
+          </a:p>
+          <a:p/>
+          <a:p>
+            <a:r>
+              <a:t>Source detail (S2R® manuscript):</a:t>
+            </a:r>
+          </a:p>
+          <a:p/>
+          <a:p>
+            <a:r>
+              <a:t>Why design is needed: Alignment must be intentionally designed through structured interventions that make interpretation and emotional climate visible.</a:t>
+            </a:r>
+          </a:p>
+          <a:p>
+            <a:r>
+              <a:t>OCEAVL Assessment: The framework surfaces the psychological tendencies influencing executive decision-making: Openness, Conscientiousness, Extraversion, Agreeableness, Emotional Stability, Values Alignment and Learning Orientation. It helps leadership teams understand how personality tendencies shape strategic interpretation and decision behaviour.</a:t>
+            </a:r>
+          </a:p>
+          <a:p>
+            <a:r>
+              <a:t>Emotional Climate Assessment: Strategy always enters an existing emotional environment. The assessment identifies the prevailing state of being across six core emotional categories: Joy, Sadness, Anger, Fear, Disgust, Surprise. Understanding the emotional climate allows leaders to stabilise engagement, morale, and collaboration before demanding execution.</a:t>
+            </a:r>
+          </a:p>
+          <a:p>
+            <a:r>
+              <a:t>Availability: Assessments are available to participants on demand, in line with the level of programme being undertaken. They are deployed as Excel or HTML versions with facilitated report generation.</a:t>
+            </a:r>
           </a:p>
         </p:txBody>
       </p:sp>

--- a/Unit decks/Unit 05 - Aligning Heart & Mind.pptx
+++ b/Unit decks/Unit 05 - Aligning Heart & Mind.pptx
@@ -4026,13 +4026,13 @@
           <a:p>
             <a:r>
               <a:rPr lang="en-GB" dirty="0"/>
-              <a:t>1. Explain why shared understanding and commitment convert strategy into execution.</a:t>
-            </a:r>
-          </a:p>
-          <a:p>
-            <a:r>
-              <a:rPr lang="en-GB" dirty="0"/>
-              <a:t>2. Distinguish commitment from compliance and explain why change delivers value only when it is adopted.</a:t>
+              <a:t>1. Build the shared understanding and commitment that convert strategy into execution.</a:t>
+            </a:r>
+          </a:p>
+          <a:p>
+            <a:r>
+              <a:rPr lang="en-GB" dirty="0"/>
+              <a:t>2. Distinguish commitment from compliance, and secure the adoption through which change delivers value.</a:t>
             </a:r>
           </a:p>
           <a:p>
@@ -6738,7 +6738,7 @@
           <a:p>
             <a:r>
               <a:rPr lang="en-GB" dirty="0"/>
-              <a:t>1. Explain how individual alignment responsibilities combine into a coherent enterprise interpretation.</a:t>
+              <a:t>1. Combine individual alignment responsibilities into a coherent enterprise interpretation of the strategy.</a:t>
             </a:r>
           </a:p>
           <a:p>
@@ -18103,7 +18103,7 @@
                 <a:ea typeface="Calibri" pitchFamily="34" charset="-122"/>
                 <a:cs typeface="Calibri" pitchFamily="34" charset="-120"/>
               </a:rPr>
-              <a:t>Explain why shared understanding and commitment convert strategy into execution.</a:t>
+              <a:t>Build the shared understanding and commitment that convert strategy into execution.</a:t>
             </a:r>
             <a:endParaRPr lang="en-US" sz="2400" dirty="0"/>
           </a:p>
@@ -18198,7 +18198,7 @@
                 <a:ea typeface="Calibri" pitchFamily="34" charset="-122"/>
                 <a:cs typeface="Calibri" pitchFamily="34" charset="-120"/>
               </a:rPr>
-              <a:t>Distinguish commitment from compliance and explain why change delivers value only when it is adopted.</a:t>
+              <a:t>Distinguish commitment from compliance, and secure the adoption through which change delivers value.</a:t>
             </a:r>
             <a:endParaRPr lang="en-US" sz="2400" dirty="0"/>
           </a:p>
@@ -21652,7 +21652,7 @@
                 <a:ea typeface="Calibri" pitchFamily="34" charset="-122"/>
                 <a:cs typeface="Calibri" pitchFamily="34" charset="-120"/>
               </a:rPr>
-              <a:t>Explain how individual alignment responsibilities combine into a coherent enterprise interpretation.</a:t>
+              <a:t>Combine individual alignment responsibilities into a coherent enterprise interpretation of the strategy.</a:t>
             </a:r>
             <a:endParaRPr lang="en-US" sz="2400" dirty="0"/>
           </a:p>
@@ -23402,7 +23402,7 @@
           <p:nvPr/>
         </p:nvPicPr>
         <p:blipFill>
-          <a:blip r:embed="rId4"/>
+          <a:blip r:embed="rId3"/>
           <a:stretch>
             <a:fillRect/>
           </a:stretch>
@@ -23481,7 +23481,7 @@
           <p:nvPr/>
         </p:nvPicPr>
         <p:blipFill>
-          <a:blip r:embed="rId5"/>
+          <a:blip r:embed="rId4"/>
           <a:stretch>
             <a:fillRect/>
           </a:stretch>

--- a/Unit decks/Unit 05 - Aligning Heart & Mind.pptx
+++ b/Unit decks/Unit 05 - Aligning Heart & Mind.pptx
@@ -5625,7 +5625,7 @@
           <a:p>
             <a:r>
               <a:rPr lang="en-ZA" dirty="0"/>
-              <a:t>OCEAVL is adapted from the Big Five personality model. We use it here as a strategy execution tool, not as a personality label.</a:t>
+              <a:t>OCEAVL is adapted from the Big Five personality model. We use it here as a strategy execution tool.</a:t>
             </a:r>
           </a:p>
           <a:p>
@@ -5728,7 +5728,7 @@
           <a:p>
             <a:r>
               <a:rPr lang="en-ZA" dirty="0"/>
-              <a:t>“When you read your profile, read it as a map, not as a judgement.</a:t>
+              <a:t>“When you read your profile, read it as a map of how the team tends to respond.</a:t>
             </a:r>
           </a:p>
           <a:p>
@@ -6144,7 +6144,7 @@
           <a:p>
             <a:r>
               <a:rPr lang="en-ZA" dirty="0"/>
-              <a:t>If leaders become reactive, the team starts managing emotions instead of managing the strategy.”</a:t>
+              <a:t>If leaders become reactive, the team spends its energy managing emotions, and the strategy waits.”</a:t>
             </a:r>
           </a:p>
           <a:p>
@@ -6178,7 +6178,7 @@
           <a:p>
             <a:r>
               <a:rPr lang="en-ZA" dirty="0"/>
-              <a:t>When values and decisions match, trust grows. When they do not match, people may comply but commitment weakens.”</a:t>
+              <a:t>When values and decisions match, trust grows. When they do not match, people comply and commitment weakens.”</a:t>
             </a:r>
           </a:p>
           <a:p>
@@ -6430,7 +6430,7 @@
           <a:p>
             <a:r>
               <a:rPr lang="en-ZA" dirty="0"/>
-              <a:t>“OCEAVL helps us see the human pattern behind strategy execution. Once we can see the pattern, we can design the right guardrails. That is how alignment becomes designed, not assumed.”</a:t>
+              <a:t>“OCEAVL helps us see the human pattern behind strategy execution. Once we can see the pattern, we can design the right guardrails. That is how alignment is designed.”</a:t>
             </a:r>
           </a:p>
           <a:p>
@@ -8075,7 +8075,7 @@
           <a:p>
             <a:r>
               <a:rPr lang="en-GB" dirty="0"/>
-              <a:t>"What is the most important alignment conversation you need to have with a closely adjacent role in the next 30 days? What would that conversation need to address?"</a:t>
+              <a:t>"What is the most important alignment conversation you need to have next with a closely adjacent role? What would that conversation need to address?"</a:t>
             </a:r>
           </a:p>
         </p:txBody>
@@ -8195,7 +8195,7 @@
           <a:p>
             <a:r>
               <a:rPr lang="en-GB" dirty="0"/>
-              <a:t>4.2 Reflection: "What is the most important alignment conversation you need to have with a closely adjacent role in the next 30 days? What would that conversation need to address?"</a:t>
+              <a:t>4.2 Reflection: "What is the most important alignment conversation you need to have next with a closely adjacent role? What would that conversation need to address?"</a:t>
             </a:r>
           </a:p>
           <a:p>
@@ -23395,14 +23395,14 @@
       </p:sp>
       <p:pic>
         <p:nvPicPr>
-          <p:cNvPr id="5" name="Reflection 4.2" descr="4.2 Reflection: What is the most important alignment conversation you need to have with a closely adjacent role in the next 30 days? What would that conversation need to address?"/>
+          <p:cNvPr id="9" name="Reflection 4.2" descr="image.png"/>
           <p:cNvPicPr>
             <a:picLocks noChangeAspect="1"/>
           </p:cNvPicPr>
           <p:nvPr/>
         </p:nvPicPr>
         <p:blipFill>
-          <a:blip r:embed="rId3"/>
+          <a:blip r:embed="rId5"/>
           <a:stretch>
             <a:fillRect/>
           </a:stretch>
@@ -23410,7 +23410,7 @@
         <p:spPr>
           <a:xfrm>
             <a:off x="1691640" y="2888770"/>
-            <a:ext cx="9921240" cy="1023394"/>
+            <a:ext cx="9921240" cy="1066035"/>
           </a:xfrm>
           <a:prstGeom prst="rect">
             <a:avLst/>
@@ -23425,7 +23425,7 @@
         </p:nvSpPr>
         <p:spPr>
           <a:xfrm>
-            <a:off x="548640" y="2966127"/>
+            <a:off x="548640" y="2987447"/>
             <a:ext cx="868680" cy="868680"/>
           </a:xfrm>
           <a:prstGeom prst="ellipse">
@@ -23989,7 +23989,7 @@
               <a:tabLst/>
               <a:defRPr/>
             </a:pPr>
-            <a:endParaRPr kumimoji="0" lang="en-ZA" sz="1800" b="0" i="0" u="none" strike="noStrike" kern="1200" cap="none" spc="0" normalizeH="0" baseline="0" noProof="0">
+            <a:endParaRPr kumimoji="0" lang="en-ZA" sz="2400" b="0" i="0" u="none" strike="noStrike" kern="1200" cap="none" spc="0" normalizeH="0" baseline="0" noProof="0">
               <a:ln>
                 <a:noFill/>
               </a:ln>
@@ -24147,7 +24147,7 @@
               <a:tabLst/>
               <a:defRPr/>
             </a:pPr>
-            <a:endParaRPr kumimoji="0" lang="en-ZA" sz="1800" b="0" i="0" u="none" strike="noStrike" kern="1200" cap="none" spc="0" normalizeH="0" baseline="0" noProof="0">
+            <a:endParaRPr kumimoji="0" lang="en-ZA" sz="2400" b="0" i="0" u="none" strike="noStrike" kern="1200" cap="none" spc="0" normalizeH="0" baseline="0" noProof="0">
               <a:ln>
                 <a:noFill/>
               </a:ln>
@@ -24412,7 +24412,7 @@
               <a:tabLst/>
               <a:defRPr/>
             </a:pPr>
-            <a:endParaRPr kumimoji="0" lang="en-ZA" sz="1800" b="0" i="0" u="none" strike="noStrike" kern="1200" cap="none" spc="0" normalizeH="0" baseline="0" noProof="0">
+            <a:endParaRPr kumimoji="0" lang="en-ZA" sz="2400" b="0" i="0" u="none" strike="noStrike" kern="1200" cap="none" spc="0" normalizeH="0" baseline="0" noProof="0">
               <a:ln>
                 <a:noFill/>
               </a:ln>
@@ -24474,7 +24474,7 @@
               <a:tabLst/>
               <a:defRPr/>
             </a:pPr>
-            <a:endParaRPr kumimoji="0" lang="en-ZA" sz="1800" b="0" i="0" u="none" strike="noStrike" kern="1200" cap="none" spc="0" normalizeH="0" baseline="0" noProof="0">
+            <a:endParaRPr kumimoji="0" lang="en-ZA" sz="2400" b="0" i="0" u="none" strike="noStrike" kern="1200" cap="none" spc="0" normalizeH="0" baseline="0" noProof="0">
               <a:ln>
                 <a:noFill/>
               </a:ln>
@@ -24706,7 +24706,7 @@
               <a:tabLst/>
               <a:defRPr/>
             </a:pPr>
-            <a:endParaRPr kumimoji="0" lang="en-ZA" sz="1800" b="0" i="0" u="none" strike="noStrike" kern="1200" cap="none" spc="0" normalizeH="0" baseline="0" noProof="0">
+            <a:endParaRPr kumimoji="0" lang="en-ZA" sz="2400" b="0" i="0" u="none" strike="noStrike" kern="1200" cap="none" spc="0" normalizeH="0" baseline="0" noProof="0">
               <a:ln>
                 <a:noFill/>
               </a:ln>
@@ -24768,7 +24768,7 @@
               <a:tabLst/>
               <a:defRPr/>
             </a:pPr>
-            <a:endParaRPr kumimoji="0" lang="en-ZA" sz="1800" b="0" i="0" u="none" strike="noStrike" kern="1200" cap="none" spc="0" normalizeH="0" baseline="0" noProof="0">
+            <a:endParaRPr kumimoji="0" lang="en-ZA" sz="2400" b="0" i="0" u="none" strike="noStrike" kern="1200" cap="none" spc="0" normalizeH="0" baseline="0" noProof="0">
               <a:ln>
                 <a:noFill/>
               </a:ln>
@@ -25000,7 +25000,7 @@
               <a:tabLst/>
               <a:defRPr/>
             </a:pPr>
-            <a:endParaRPr kumimoji="0" lang="en-ZA" sz="1800" b="0" i="0" u="none" strike="noStrike" kern="1200" cap="none" spc="0" normalizeH="0" baseline="0" noProof="0">
+            <a:endParaRPr kumimoji="0" lang="en-ZA" sz="2400" b="0" i="0" u="none" strike="noStrike" kern="1200" cap="none" spc="0" normalizeH="0" baseline="0" noProof="0">
               <a:ln>
                 <a:noFill/>
               </a:ln>
@@ -25062,7 +25062,7 @@
               <a:tabLst/>
               <a:defRPr/>
             </a:pPr>
-            <a:endParaRPr kumimoji="0" lang="en-ZA" sz="1800" b="0" i="0" u="none" strike="noStrike" kern="1200" cap="none" spc="0" normalizeH="0" baseline="0" noProof="0">
+            <a:endParaRPr kumimoji="0" lang="en-ZA" sz="2400" b="0" i="0" u="none" strike="noStrike" kern="1200" cap="none" spc="0" normalizeH="0" baseline="0" noProof="0">
               <a:ln>
                 <a:noFill/>
               </a:ln>
@@ -25294,7 +25294,7 @@
               <a:tabLst/>
               <a:defRPr/>
             </a:pPr>
-            <a:endParaRPr kumimoji="0" lang="en-ZA" sz="1800" b="0" i="0" u="none" strike="noStrike" kern="1200" cap="none" spc="0" normalizeH="0" baseline="0" noProof="0">
+            <a:endParaRPr kumimoji="0" lang="en-ZA" sz="2400" b="0" i="0" u="none" strike="noStrike" kern="1200" cap="none" spc="0" normalizeH="0" baseline="0" noProof="0">
               <a:ln>
                 <a:noFill/>
               </a:ln>
@@ -25533,7 +25533,7 @@
               <a:tabLst/>
               <a:defRPr/>
             </a:pPr>
-            <a:endParaRPr kumimoji="0" lang="en-ZA" sz="1800" b="0" i="0" u="none" strike="noStrike" kern="1200" cap="none" spc="0" normalizeH="0" baseline="0" noProof="0">
+            <a:endParaRPr kumimoji="0" lang="en-ZA" sz="2400" b="0" i="0" u="none" strike="noStrike" kern="1200" cap="none" spc="0" normalizeH="0" baseline="0" noProof="0">
               <a:ln>
                 <a:noFill/>
               </a:ln>
@@ -25708,7 +25708,7 @@
               <a:tabLst/>
               <a:defRPr/>
             </a:pPr>
-            <a:endParaRPr kumimoji="0" lang="en-ZA" sz="1800" b="0" i="0" u="none" strike="noStrike" kern="1200" cap="none" spc="0" normalizeH="0" baseline="0" noProof="0">
+            <a:endParaRPr kumimoji="0" lang="en-ZA" sz="2400" b="0" i="0" u="none" strike="noStrike" kern="1200" cap="none" spc="0" normalizeH="0" baseline="0" noProof="0">
               <a:ln>
                 <a:noFill/>
               </a:ln>
@@ -25883,7 +25883,7 @@
               <a:tabLst/>
               <a:defRPr/>
             </a:pPr>
-            <a:endParaRPr kumimoji="0" lang="en-ZA" sz="1800" b="0" i="0" u="none" strike="noStrike" kern="1200" cap="none" spc="0" normalizeH="0" baseline="0" noProof="0">
+            <a:endParaRPr kumimoji="0" lang="en-ZA" sz="2400" b="0" i="0" u="none" strike="noStrike" kern="1200" cap="none" spc="0" normalizeH="0" baseline="0" noProof="0">
               <a:ln>
                 <a:noFill/>
               </a:ln>
@@ -26058,7 +26058,7 @@
               <a:tabLst/>
               <a:defRPr/>
             </a:pPr>
-            <a:endParaRPr kumimoji="0" lang="en-ZA" sz="1800" b="0" i="0" u="none" strike="noStrike" kern="1200" cap="none" spc="0" normalizeH="0" baseline="0" noProof="0">
+            <a:endParaRPr kumimoji="0" lang="en-ZA" sz="2400" b="0" i="0" u="none" strike="noStrike" kern="1200" cap="none" spc="0" normalizeH="0" baseline="0" noProof="0">
               <a:ln>
                 <a:noFill/>
               </a:ln>
@@ -26233,7 +26233,7 @@
               <a:tabLst/>
               <a:defRPr/>
             </a:pPr>
-            <a:endParaRPr kumimoji="0" lang="en-ZA" sz="1800" b="0" i="0" u="none" strike="noStrike" kern="1200" cap="none" spc="0" normalizeH="0" baseline="0" noProof="0">
+            <a:endParaRPr kumimoji="0" lang="en-ZA" sz="2400" b="0" i="0" u="none" strike="noStrike" kern="1200" cap="none" spc="0" normalizeH="0" baseline="0" noProof="0">
               <a:ln>
                 <a:noFill/>
               </a:ln>
@@ -26410,7 +26410,7 @@
               <a:tabLst/>
               <a:defRPr/>
             </a:pPr>
-            <a:endParaRPr kumimoji="0" lang="en-ZA" sz="1800" b="0" i="0" u="none" strike="noStrike" kern="1200" cap="none" spc="0" normalizeH="0" baseline="0" noProof="0">
+            <a:endParaRPr kumimoji="0" lang="en-ZA" sz="2400" b="0" i="0" u="none" strike="noStrike" kern="1200" cap="none" spc="0" normalizeH="0" baseline="0" noProof="0">
               <a:ln>
                 <a:noFill/>
               </a:ln>

--- a/Unit decks/Unit 05 - Aligning Heart & Mind.pptx
+++ b/Unit decks/Unit 05 - Aligning Heart & Mind.pptx
@@ -4026,13 +4026,13 @@
           <a:p>
             <a:r>
               <a:rPr lang="en-GB" dirty="0"/>
-              <a:t>1. Build the shared understanding and commitment that convert strategy into execution.</a:t>
-            </a:r>
-          </a:p>
-          <a:p>
-            <a:r>
-              <a:rPr lang="en-GB" dirty="0"/>
-              <a:t>2. Distinguish commitment from compliance, and secure the adoption through which change delivers value.</a:t>
+              <a:t>1. Build shared understanding and commitment that translate strategy into coordinated action.</a:t>
+            </a:r>
+          </a:p>
+          <a:p>
+            <a:r>
+              <a:rPr lang="en-GB" dirty="0"/>
+              <a:t>2. Differentiate compliance from genuine adoption and strengthen commitment to change.</a:t>
             </a:r>
           </a:p>
           <a:p>
@@ -5423,13 +5423,13 @@
           <a:p>
             <a:r>
               <a:rPr lang="en-GB" dirty="0"/>
-              <a:t>1. Recognise where interpretation, emotional climate and behaviour strengthen or weaken alignment, and the signals that misalignment is escalating into crisis.</a:t>
-            </a:r>
-          </a:p>
-          <a:p>
-            <a:r>
-              <a:rPr lang="en-GB" dirty="0"/>
-              <a:t>2. Assess the readiness of the people most affected by the changes the strategy requires.</a:t>
+              <a:t>1. Detect emerging misalignment across interpretation, emotional climate and behaviour and respond early.</a:t>
+            </a:r>
+          </a:p>
+          <a:p>
+            <a:r>
+              <a:rPr lang="en-GB" dirty="0"/>
+              <a:t>2. Assess change readiness and tailor leadership responses to adoption barriers.</a:t>
             </a:r>
           </a:p>
           <a:p>
@@ -6738,13 +6738,13 @@
           <a:p>
             <a:r>
               <a:rPr lang="en-GB" dirty="0"/>
-              <a:t>1. Combine individual alignment responsibilities into a coherent enterprise interpretation of the strategy.</a:t>
-            </a:r>
-          </a:p>
-          <a:p>
-            <a:r>
-              <a:rPr lang="en-GB" dirty="0"/>
-              <a:t>2. Recognise where gaps in role alignment and competing change demands create enterprise vulnerability.</a:t>
+              <a:t>1. Integrate leadership interpretations into one coherent enterprise message.</a:t>
+            </a:r>
+          </a:p>
+          <a:p>
+            <a:r>
+              <a:rPr lang="en-GB" dirty="0"/>
+              <a:t>2. Diagnose role-alignment gaps and competing change demands that threaten enterprise coherence.</a:t>
             </a:r>
           </a:p>
           <a:p>
@@ -8523,13 +8523,13 @@
           <a:p>
             <a:r>
               <a:rPr lang="en-GB" dirty="0"/>
-              <a:t>1. Determine how the organisation will land the strategy agenda.</a:t>
-            </a:r>
-          </a:p>
-          <a:p>
-            <a:r>
-              <a:rPr lang="en-GB" dirty="0"/>
-              <a:t>2. Demonstrate commitment through a behavioural change that strengthens collective alignment.</a:t>
+              <a:t>1. Develop an approach to landing the strategy that builds understanding, readiness and adoption.</a:t>
+            </a:r>
+          </a:p>
+          <a:p>
+            <a:r>
+              <a:rPr lang="en-GB" dirty="0"/>
+              <a:t>2. Model and reinforce leadership behaviours that strengthen collective strategic alignment.</a:t>
             </a:r>
           </a:p>
           <a:p>
@@ -9939,13 +9939,13 @@
           <a:p>
             <a:r>
               <a:rPr lang="en-GB" dirty="0"/>
-              <a:t>1. Examine how functional expertise, cognitive bias and emotion shape the interpretation of strategy.</a:t>
-            </a:r>
-          </a:p>
-          <a:p>
-            <a:r>
-              <a:rPr lang="en-GB" dirty="0"/>
-              <a:t>2. Recognise what people need in order to adopt a strategic change, and the behaviours that sustain it.</a:t>
+              <a:t>1. Interpret how expertise, cognitive bias and emotion affect strategic understanding and intervene to reduce distortion.</a:t>
+            </a:r>
+          </a:p>
+          <a:p>
+            <a:r>
+              <a:rPr lang="en-GB" dirty="0"/>
+              <a:t>2. Determine the behavioural and support conditions needed for people to adopt strategic change.</a:t>
             </a:r>
           </a:p>
           <a:p>
@@ -17495,7 +17495,7 @@
                 <a:ea typeface="Calibri" pitchFamily="34" charset="-122"/>
                 <a:cs typeface="Calibri" pitchFamily="34" charset="-120"/>
               </a:rPr>
-              <a:t>Critically examine how functional expertise, personality, cognitive bias and emotional conditions influence the interpretation of strategy.</a:t>
+              <a:t>Diagnose and mitigate distortions in strategic interpretation caused by expertise, personality, bias and emotion.</a:t>
             </a:r>
             <a:endParaRPr lang="en-US" sz="2400" dirty="0"/>
           </a:p>
@@ -17590,7 +17590,7 @@
                 <a:ea typeface="Calibri" pitchFamily="34" charset="-122"/>
                 <a:cs typeface="Calibri" pitchFamily="34" charset="-120"/>
               </a:rPr>
-              <a:t>Demonstrate shared strategic understanding and commitment across the leadership system.</a:t>
+              <a:t>Build shared strategic understanding and commitment across the leadership system.</a:t>
             </a:r>
             <a:endParaRPr lang="en-US" sz="2400" dirty="0"/>
           </a:p>
@@ -17685,7 +17685,7 @@
                 <a:ea typeface="Calibri" pitchFamily="34" charset="-122"/>
                 <a:cs typeface="Calibri" pitchFamily="34" charset="-120"/>
               </a:rPr>
-              <a:t>Recognise the organisational conditions that strengthen or weaken strategic alignment.</a:t>
+              <a:t>Assess and strengthen the human conditions required for sustained strategic alignment.</a:t>
             </a:r>
             <a:endParaRPr lang="en-US" sz="2400" dirty="0"/>
           </a:p>
@@ -17780,7 +17780,7 @@
                 <a:ea typeface="Calibri" pitchFamily="34" charset="-122"/>
                 <a:cs typeface="Calibri" pitchFamily="34" charset="-120"/>
               </a:rPr>
-              <a:t>Lead people through the changes the strategy requires, with deliberate attention to readiness, resistance and adoption.</a:t>
+              <a:t>Lead strategic change by addressing readiness, resistance and behavioural adoption.</a:t>
             </a:r>
             <a:endParaRPr lang="en-US" sz="2400" dirty="0"/>
           </a:p>
@@ -18103,7 +18103,7 @@
                 <a:ea typeface="Calibri" pitchFamily="34" charset="-122"/>
                 <a:cs typeface="Calibri" pitchFamily="34" charset="-120"/>
               </a:rPr>
-              <a:t>Build the shared understanding and commitment that convert strategy into execution.</a:t>
+              <a:t>Build shared understanding and commitment that translate strategy into coordinated action.</a:t>
             </a:r>
             <a:endParaRPr lang="en-US" sz="2400" dirty="0"/>
           </a:p>
@@ -18198,7 +18198,7 @@
                 <a:ea typeface="Calibri" pitchFamily="34" charset="-122"/>
                 <a:cs typeface="Calibri" pitchFamily="34" charset="-120"/>
               </a:rPr>
-              <a:t>Distinguish commitment from compliance, and secure the adoption through which change delivers value.</a:t>
+              <a:t>Differentiate compliance from genuine adoption and strengthen commitment to change.</a:t>
             </a:r>
             <a:endParaRPr lang="en-US" sz="2400" dirty="0"/>
           </a:p>
@@ -20258,7 +20258,7 @@
                 <a:ea typeface="Calibri" pitchFamily="34" charset="-122"/>
                 <a:cs typeface="Calibri" pitchFamily="34" charset="-120"/>
               </a:rPr>
-              <a:t>Recognise where interpretation, emotional climate and behaviour strengthen or weaken alignment, and the signals that misalignment is escalating into crisis.</a:t>
+              <a:t>Detect emerging misalignment across interpretation, emotional climate and behaviour and respond early.</a:t>
             </a:r>
             <a:endParaRPr lang="en-US" sz="2400" dirty="0"/>
           </a:p>
@@ -20353,7 +20353,7 @@
                 <a:ea typeface="Calibri" pitchFamily="34" charset="-122"/>
                 <a:cs typeface="Calibri" pitchFamily="34" charset="-120"/>
               </a:rPr>
-              <a:t>Assess the readiness of the people most affected by the changes the strategy requires.</a:t>
+              <a:t>Assess change readiness and tailor leadership responses to adoption barriers.</a:t>
             </a:r>
             <a:endParaRPr lang="en-US" sz="2400" dirty="0"/>
           </a:p>
@@ -21652,7 +21652,7 @@
                 <a:ea typeface="Calibri" pitchFamily="34" charset="-122"/>
                 <a:cs typeface="Calibri" pitchFamily="34" charset="-120"/>
               </a:rPr>
-              <a:t>Combine individual alignment responsibilities into a coherent enterprise interpretation of the strategy.</a:t>
+              <a:t>Integrate leadership interpretations into one coherent enterprise message.</a:t>
             </a:r>
             <a:endParaRPr lang="en-US" sz="2400" dirty="0"/>
           </a:p>
@@ -21747,7 +21747,7 @@
                 <a:ea typeface="Calibri" pitchFamily="34" charset="-122"/>
                 <a:cs typeface="Calibri" pitchFamily="34" charset="-120"/>
               </a:rPr>
-              <a:t>Recognise where gaps in role alignment and competing change demands create enterprise vulnerability.</a:t>
+              <a:t>Diagnose role-alignment gaps and competing change demands that threaten enterprise coherence.</a:t>
             </a:r>
             <a:endParaRPr lang="en-US" sz="2400" dirty="0"/>
           </a:p>
@@ -24083,7 +24083,7 @@
                 <a:ea typeface="Calibri" pitchFamily="34" charset="-122"/>
                 <a:cs typeface="Calibri" pitchFamily="34" charset="-120"/>
               </a:rPr>
-              <a:t>Determine how the organisation will land the strategy agenda.</a:t>
+              <a:t>Develop an approach to landing the strategy that builds understanding, readiness and adoption.</a:t>
             </a:r>
             <a:endParaRPr kumimoji="0" lang="en-US" sz="2400" b="0" i="0" u="none" strike="noStrike" kern="1200" cap="none" spc="0" normalizeH="0" baseline="0" noProof="0" dirty="0">
               <a:ln>
@@ -24241,7 +24241,7 @@
                 <a:ea typeface="Calibri" pitchFamily="34" charset="-122"/>
                 <a:cs typeface="Calibri" pitchFamily="34" charset="-120"/>
               </a:rPr>
-              <a:t>Demonstrate commitment through a behavioural change that strengthens collective alignment.</a:t>
+              <a:t>Model and reinforce leadership behaviours that strengthen collective strategic alignment.</a:t>
             </a:r>
             <a:endParaRPr kumimoji="0" lang="en-US" sz="2400" b="0" i="0" u="none" strike="noStrike" kern="1200" cap="none" spc="0" normalizeH="0" baseline="0" noProof="0" dirty="0">
               <a:ln>
@@ -26983,7 +26983,7 @@
                 <a:ea typeface="Calibri" pitchFamily="34" charset="-122"/>
                 <a:cs typeface="Calibri" pitchFamily="34" charset="-120"/>
               </a:rPr>
-              <a:t>Examine how functional expertise, cognitive bias and emotion shape the interpretation of strategy.</a:t>
+              <a:t>Interpret how expertise, cognitive bias and emotion affect strategic understanding and intervene to reduce distortion.</a:t>
             </a:r>
             <a:endParaRPr lang="en-US" sz="2400" dirty="0"/>
           </a:p>
@@ -27078,7 +27078,7 @@
                 <a:ea typeface="Calibri" pitchFamily="34" charset="-122"/>
                 <a:cs typeface="Calibri" pitchFamily="34" charset="-120"/>
               </a:rPr>
-              <a:t>Recognise what people need in order to adopt a strategic change, and the behaviours that sustain it.</a:t>
+              <a:t>Determine the behavioural and support conditions needed for people to adopt strategic change.</a:t>
             </a:r>
             <a:endParaRPr lang="en-US" sz="2400" dirty="0"/>
           </a:p>

--- a/Unit decks/Unit 05 - Aligning Heart & Mind.pptx
+++ b/Unit decks/Unit 05 - Aligning Heart & Mind.pptx
@@ -416,13 +416,13 @@
           <a:p>
             <a:r>
               <a:rPr lang="en-GB" dirty="0"/>
-              <a:t>3. Both steps of Section 5 are group work for the Capstone. The group agrees each entry and one member acts as scribe.</a:t>
-            </a:r>
-          </a:p>
-          <a:p>
-            <a:r>
-              <a:rPr lang="en-GB" dirty="0"/>
-              <a:t>Every member then types the agreed entries into their own page.</a:t>
+              <a:t>3. Both steps of Section 5 are group work for the Capstone. The group chooses its scribe for this work.</a:t>
+            </a:r>
+          </a:p>
+          <a:p>
+            <a:r>
+              <a:rPr lang="en-GB" dirty="0"/>
+              <a:t>The scribe types what the group agrees, the entries appear on every member’s page, and each member then selects Agree.</a:t>
             </a:r>
           </a:p>
           <a:p>
@@ -8508,7 +8508,7 @@
                 <a:ea typeface="+mn-ea"/>
                 <a:cs typeface="+mn-cs"/>
               </a:rPr>
-              <a:t>You then select Confirm. This is Capstone work, and your confirmed record feeds your team’s Capstone Blueprint.</a:t>
+              <a:t>You then select Agree. This is Capstone work, and when every member has agreed, your record feeds your team’s Capstone Blueprint.</a:t>
             </a:r>
           </a:p>
           <a:p>
@@ -8592,13 +8592,13 @@
           <a:p>
             <a:r>
               <a:rPr lang="en-GB" dirty="0"/>
-              <a:t>One member acts as scribe.</a:t>
-            </a:r>
-          </a:p>
-          <a:p>
-            <a:r>
-              <a:rPr lang="en-GB" dirty="0"/>
-              <a:t>Every member then types the agreed entries into their own page, in the session or after it."</a:t>
+              <a:t>Your group chooses its scribe for this work.</a:t>
+            </a:r>
+          </a:p>
+          <a:p>
+            <a:r>
+              <a:rPr lang="en-GB" dirty="0"/>
+              <a:t>The entries appear on every member’s page, and each member then selects Agree."</a:t>
             </a:r>
           </a:p>
           <a:p>
@@ -9465,7 +9465,7 @@
           <a:p>
             <a:r>
               <a:rPr lang="en-GB" dirty="0"/>
-              <a:t>4. Each participant reads the record and selects Confirm. Print gives a copy of the record.</a:t>
+              <a:t>4. Each participant reads the record and selects Agree. Print gives a copy of the record.</a:t>
             </a:r>
           </a:p>
           <a:p>

--- a/Unit decks/Unit 05 - Aligning Heart & Mind.pptx
+++ b/Unit decks/Unit 05 - Aligning Heart & Mind.pptx
@@ -8346,279 +8346,148 @@
           <a:lstStyle/>
           <a:p>
             <a:r>
-              <a:rPr lang="en-GB" b="1" dirty="0"/>
+              <a:rPr lang="en-GB"/>
               <a:t>SECTION 5 · APPLICATION — IN PRACTICE</a:t>
             </a:r>
           </a:p>
           <a:p>
-            <a:endParaRPr lang="en-GB" dirty="0"/>
-          </a:p>
-          <a:p>
-            <a:r>
-              <a:rPr lang="en-GB" b="1" dirty="0"/>
+            <a:endParaRPr lang="en-GB"/>
+          </a:p>
+          <a:p>
+            <a:r>
+              <a:rPr lang="en-GB"/>
               <a:t>HOW THIS SECTION RUNS:</a:t>
             </a:r>
           </a:p>
           <a:p>
-            <a:pPr lvl="0"/>
-            <a:r>
-              <a:rPr lang="en-ZA" sz="1200" b="1" i="0" kern="1200" dirty="0">
-                <a:solidFill>
-                  <a:schemeClr val="tx1"/>
-                </a:solidFill>
-                <a:effectLst/>
-                <a:latin typeface="+mn-lt"/>
-                <a:ea typeface="+mn-ea"/>
-                <a:cs typeface="+mn-cs"/>
-              </a:rPr>
-              <a:t>Step 1 · The 3S Check.</a:t>
-            </a:r>
-            <a:r>
-              <a:rPr lang="en-ZA" sz="1200" b="0" i="0" kern="1200" dirty="0">
-                <a:solidFill>
-                  <a:schemeClr val="tx1"/>
-                </a:solidFill>
-                <a:effectLst/>
-                <a:latin typeface="+mn-lt"/>
-                <a:ea typeface="+mn-ea"/>
-                <a:cs typeface="+mn-cs"/>
-              </a:rPr>
-              <a:t> Your group states three things for the strategy in your Capstone Blueprint: the </a:t>
-            </a:r>
-            <a:r>
-              <a:rPr lang="en-ZA" sz="1200" b="1" i="0" kern="1200" dirty="0">
-                <a:solidFill>
-                  <a:schemeClr val="tx1"/>
-                </a:solidFill>
-                <a:effectLst/>
-                <a:latin typeface="+mn-lt"/>
-                <a:ea typeface="+mn-ea"/>
-                <a:cs typeface="+mn-cs"/>
-              </a:rPr>
-              <a:t>Shift</a:t>
-            </a:r>
-            <a:r>
-              <a:rPr lang="en-ZA" sz="1200" b="0" i="0" kern="1200" dirty="0">
-                <a:solidFill>
-                  <a:schemeClr val="tx1"/>
-                </a:solidFill>
-                <a:effectLst/>
-                <a:latin typeface="+mn-lt"/>
-                <a:ea typeface="+mn-ea"/>
-                <a:cs typeface="+mn-cs"/>
-              </a:rPr>
-              <a:t> (what is changing), the </a:t>
-            </a:r>
-            <a:r>
-              <a:rPr lang="en-ZA" sz="1200" b="1" i="0" kern="1200" dirty="0">
-                <a:solidFill>
-                  <a:schemeClr val="tx1"/>
-                </a:solidFill>
-                <a:effectLst/>
-                <a:latin typeface="+mn-lt"/>
-                <a:ea typeface="+mn-ea"/>
-                <a:cs typeface="+mn-cs"/>
-              </a:rPr>
-              <a:t>Stake</a:t>
-            </a:r>
-            <a:r>
-              <a:rPr lang="en-ZA" sz="1200" b="0" i="0" kern="1200" dirty="0">
-                <a:solidFill>
-                  <a:schemeClr val="tx1"/>
-                </a:solidFill>
-                <a:effectLst/>
-                <a:latin typeface="+mn-lt"/>
-                <a:ea typeface="+mn-ea"/>
-                <a:cs typeface="+mn-cs"/>
-              </a:rPr>
-              <a:t> (what the organisation gains if it changes, and what it loses if it stays as it is) and the </a:t>
-            </a:r>
-            <a:r>
-              <a:rPr lang="en-ZA" sz="1200" b="1" i="0" kern="1200" dirty="0">
-                <a:solidFill>
-                  <a:schemeClr val="tx1"/>
-                </a:solidFill>
-                <a:effectLst/>
-                <a:latin typeface="+mn-lt"/>
-                <a:ea typeface="+mn-ea"/>
-                <a:cs typeface="+mn-cs"/>
-              </a:rPr>
-              <a:t>Step</a:t>
-            </a:r>
-            <a:r>
-              <a:rPr lang="en-ZA" sz="1200" b="0" i="0" kern="1200" dirty="0">
-                <a:solidFill>
-                  <a:schemeClr val="tx1"/>
-                </a:solidFill>
-                <a:effectLst/>
-                <a:latin typeface="+mn-lt"/>
-                <a:ea typeface="+mn-ea"/>
-                <a:cs typeface="+mn-cs"/>
-              </a:rPr>
-              <a:t> (what must be done differently). The guide from part 1.3.1 sits beside each box.</a:t>
-            </a:r>
-          </a:p>
-          <a:p>
-            <a:pPr lvl="0"/>
-            <a:endParaRPr lang="en-ZA" sz="1200" b="1" i="0" kern="1200" dirty="0">
-              <a:solidFill>
-                <a:schemeClr val="tx1"/>
-              </a:solidFill>
-              <a:effectLst/>
-              <a:latin typeface="+mn-lt"/>
-              <a:ea typeface="+mn-ea"/>
-              <a:cs typeface="+mn-cs"/>
-            </a:endParaRPr>
-          </a:p>
-          <a:p>
-            <a:pPr lvl="0"/>
-            <a:r>
-              <a:rPr lang="en-ZA" sz="1200" b="1" i="0" kern="1200" dirty="0">
-                <a:solidFill>
-                  <a:schemeClr val="tx1"/>
-                </a:solidFill>
-                <a:effectLst/>
-                <a:latin typeface="+mn-lt"/>
-                <a:ea typeface="+mn-ea"/>
-                <a:cs typeface="+mn-cs"/>
-              </a:rPr>
-              <a:t>Step 2 · ACE-IT.</a:t>
-            </a:r>
-            <a:r>
-              <a:rPr lang="en-ZA" sz="1200" b="0" i="0" kern="1200" dirty="0">
-                <a:solidFill>
-                  <a:schemeClr val="tx1"/>
-                </a:solidFill>
-                <a:effectLst/>
-                <a:latin typeface="+mn-lt"/>
-                <a:ea typeface="+mn-ea"/>
-                <a:cs typeface="+mn-cs"/>
-              </a:rPr>
-              <a:t> Your group reads its team OCEAVL profile. It then states the behaviour it expects from the leadership team under each of the five ACE-IT behaviours: Accountability, Commitment, Engagement, Integrity and Transparency. The guide from part 1.3.4 sits beside each box.</a:t>
-            </a:r>
-          </a:p>
-          <a:p>
-            <a:r>
-              <a:rPr lang="en-ZA" sz="1200" b="0" i="0" kern="1200" dirty="0">
-                <a:solidFill>
-                  <a:schemeClr val="tx1"/>
-                </a:solidFill>
-                <a:effectLst/>
-                <a:latin typeface="+mn-lt"/>
-                <a:ea typeface="+mn-ea"/>
-                <a:cs typeface="+mn-cs"/>
-              </a:rPr>
+            <a:r>
+              <a:rPr lang="en-GB"/>
+              <a:t>Step 1 · The 3S Check. Your group states three things for the strategy in your Capstone Blueprint: the Shift (what is changing), the Stake (what the organisation gains if it changes, and what it loses if it stays as it is) and the Step (what must be done differently). The guide from part 1.3.1 sits beside each box.</a:t>
+            </a:r>
+          </a:p>
+          <a:p>
+            <a:endParaRPr lang="en-GB"/>
+          </a:p>
+          <a:p>
+            <a:r>
+              <a:rPr lang="en-GB"/>
+              <a:t>Step 2 · ACE-IT. Your group reads its team OCEAVL profile and names the two dimensions on which the team carries the highest risk for the strategy, with the response to each. It then states the behaviour it expects from the leadership team under each of the five ACE-IT behaviours: Accountability, Commitment, Engagement, Integrity and Transparency. The guide from part 1.3.4 sits beside each box.</a:t>
+            </a:r>
+          </a:p>
+          <a:p>
+            <a:r>
+              <a:rPr lang="en-GB"/>
               <a:t>You then select Agree. This is Capstone work, and when every member has agreed, your record feeds your team’s Capstone Blueprint.</a:t>
             </a:r>
           </a:p>
           <a:p>
-            <a:endParaRPr lang="en-GB" dirty="0"/>
-          </a:p>
-          <a:p>
-            <a:r>
-              <a:rPr lang="en-GB" b="1" dirty="0"/>
+            <a:endParaRPr lang="en-GB"/>
+          </a:p>
+          <a:p>
+            <a:r>
+              <a:rPr lang="en-GB"/>
               <a:t>SECTION LEARNING OUTCOMES:</a:t>
             </a:r>
           </a:p>
           <a:p>
             <a:r>
-              <a:rPr lang="en-GB" dirty="0"/>
+              <a:rPr lang="en-GB"/>
               <a:t>1. Develop an approach to landing the strategy that builds understanding, readiness and adoption.</a:t>
             </a:r>
           </a:p>
           <a:p>
             <a:r>
-              <a:rPr lang="en-GB" dirty="0"/>
+              <a:rPr lang="en-GB"/>
               <a:t>2. Model and reinforce leadership behaviours that strengthen collective strategic alignment.</a:t>
             </a:r>
           </a:p>
           <a:p>
-            <a:endParaRPr lang="en-GB" dirty="0"/>
-          </a:p>
-          <a:p>
-            <a:r>
-              <a:rPr lang="en-GB" b="1" dirty="0"/>
+            <a:endParaRPr lang="en-GB"/>
+          </a:p>
+          <a:p>
+            <a:r>
+              <a:rPr lang="en-GB"/>
               <a:t>HOW TO OPEN THE SECTION:</a:t>
             </a:r>
           </a:p>
           <a:p>
-            <a:endParaRPr lang="en-GB" dirty="0"/>
-          </a:p>
-          <a:p>
-            <a:r>
-              <a:rPr lang="en-GB" b="1" dirty="0"/>
+            <a:endParaRPr lang="en-GB"/>
+          </a:p>
+          <a:p>
+            <a:r>
+              <a:rPr lang="en-GB"/>
               <a:t>1. Say what the section does.</a:t>
             </a:r>
           </a:p>
           <a:p>
             <a:r>
-              <a:rPr lang="en-GB" dirty="0"/>
+              <a:rPr lang="en-GB"/>
               <a:t>Say: "In this section your group builds the case for the change your strategy asks of people.</a:t>
             </a:r>
           </a:p>
           <a:p>
             <a:r>
-              <a:rPr lang="en-GB" dirty="0"/>
+              <a:rPr lang="en-GB"/>
               <a:t>With the 3S Check you state the change.</a:t>
             </a:r>
           </a:p>
           <a:p>
             <a:r>
-              <a:rPr lang="en-GB" dirty="0"/>
+              <a:rPr lang="en-GB"/>
               <a:t>With ACE-IT you state the leadership behaviours that will hold it in place."</a:t>
             </a:r>
           </a:p>
           <a:p>
-            <a:endParaRPr lang="en-GB" dirty="0"/>
-          </a:p>
-          <a:p>
-            <a:r>
-              <a:rPr lang="en-GB" b="1" dirty="0"/>
+            <a:endParaRPr lang="en-GB"/>
+          </a:p>
+          <a:p>
+            <a:r>
+              <a:rPr lang="en-GB"/>
               <a:t>2. Say how the group works.</a:t>
             </a:r>
           </a:p>
           <a:p>
             <a:r>
-              <a:rPr lang="en-GB" dirty="0"/>
+              <a:rPr lang="en-GB"/>
               <a:t>Say: "Both steps are group work.</a:t>
             </a:r>
           </a:p>
           <a:p>
             <a:r>
-              <a:rPr lang="en-GB" dirty="0"/>
+              <a:rPr lang="en-GB"/>
               <a:t>Your group agrees each entry.</a:t>
             </a:r>
           </a:p>
           <a:p>
             <a:r>
-              <a:rPr lang="en-GB" dirty="0"/>
+              <a:rPr lang="en-GB"/>
               <a:t>Your group chooses its scribe for this work.</a:t>
             </a:r>
           </a:p>
           <a:p>
             <a:r>
-              <a:rPr lang="en-GB" dirty="0"/>
+              <a:rPr lang="en-GB"/>
               <a:t>The entries appear on every member’s page, and each member then selects Agree."</a:t>
             </a:r>
           </a:p>
           <a:p>
-            <a:endParaRPr lang="en-GB" dirty="0"/>
-          </a:p>
-          <a:p>
-            <a:r>
-              <a:rPr lang="en-GB" b="1" dirty="0"/>
+            <a:endParaRPr lang="en-GB"/>
+          </a:p>
+          <a:p>
+            <a:r>
+              <a:rPr lang="en-GB"/>
               <a:t>3. Say where the work goes.</a:t>
             </a:r>
           </a:p>
           <a:p>
             <a:r>
-              <a:rPr lang="en-GB" dirty="0"/>
+              <a:rPr lang="en-GB"/>
               <a:t>Say: "This is Capstone work. Your group’s confirmed record feeds your team’s Capstone Blueprint."</a:t>
             </a:r>
           </a:p>
           <a:p>
             <a:r>
-              <a:rPr lang="en-GB" dirty="0"/>
+              <a:rPr lang="en-GB"/>
               <a:t>Step 2 needs the team’s OCEAVL profile. Every member completes and submits the assessment in 3.1 first.</a:t>
             </a:r>
           </a:p>
@@ -9151,342 +9020,356 @@
           <a:lstStyle/>
           <a:p>
             <a:r>
-              <a:rPr lang="en-GB" b="1" dirty="0"/>
+              <a:rPr lang="en-GB"/>
               <a:t>SECTION 5 · STEP 2 — ACE-IT (CAPSTONE WORK)</a:t>
             </a:r>
           </a:p>
           <a:p>
-            <a:endParaRPr lang="en-GB" dirty="0"/>
-          </a:p>
-          <a:p>
-            <a:r>
-              <a:rPr lang="en-GB" b="1" dirty="0"/>
+            <a:endParaRPr lang="en-GB"/>
+          </a:p>
+          <a:p>
+            <a:r>
+              <a:rPr lang="en-GB"/>
               <a:t>HOW TO TEACH IT:</a:t>
             </a:r>
           </a:p>
           <a:p>
-            <a:endParaRPr lang="en-GB" dirty="0"/>
-          </a:p>
-          <a:p>
-            <a:r>
-              <a:rPr lang="en-GB" b="1" dirty="0"/>
+            <a:endParaRPr lang="en-GB"/>
+          </a:p>
+          <a:p>
+            <a:r>
+              <a:rPr lang="en-GB"/>
               <a:t>1. Open with the team’s OCEAVL profile.</a:t>
             </a:r>
           </a:p>
           <a:p>
             <a:r>
-              <a:rPr lang="en-GB" dirty="0"/>
+              <a:rPr lang="en-GB"/>
               <a:t>Say: "Your page shows your team’s OCEAVL profile: the team’s level on each dimension, with its risk and its response.</a:t>
             </a:r>
           </a:p>
           <a:p>
             <a:r>
-              <a:rPr lang="en-GB" dirty="0"/>
+              <a:rPr lang="en-GB"/>
               <a:t>It appears once every member of your team has submitted their scores in part 3.1."</a:t>
             </a:r>
           </a:p>
           <a:p>
             <a:r>
-              <a:rPr lang="en-GB" dirty="0"/>
+              <a:rPr lang="en-GB"/>
               <a:t>Where a member has not yet submitted, the profile shows how many have. The group completes 3.1 first.</a:t>
             </a:r>
           </a:p>
           <a:p>
-            <a:endParaRPr lang="en-GB" dirty="0"/>
-          </a:p>
-          <a:p>
-            <a:r>
-              <a:rPr lang="en-GB" dirty="0"/>
+            <a:endParaRPr lang="en-GB"/>
+          </a:p>
+          <a:p>
+            <a:r>
+              <a:rPr lang="en-GB"/>
               <a:t>Deepen, say: "The same input lands differently depending on the ground it falls on.</a:t>
             </a:r>
           </a:p>
           <a:p>
             <a:r>
-              <a:rPr lang="en-GB" dirty="0"/>
+              <a:rPr lang="en-GB"/>
               <a:t>When a change initiative fails to take, the reflex is to blame the message.</a:t>
             </a:r>
           </a:p>
           <a:p>
             <a:r>
-              <a:rPr lang="en-GB" dirty="0"/>
+              <a:rPr lang="en-GB"/>
               <a:t>First diagnose the conditions stopping good input from rooting."</a:t>
             </a:r>
           </a:p>
           <a:p>
             <a:r>
-              <a:rPr lang="en-GB" dirty="0"/>
+              <a:rPr lang="en-GB"/>
               <a:t>(Insight: Diagnose the soil. Source: Journal, 21 May 2026 — Professional Insights: Culture)</a:t>
             </a:r>
           </a:p>
           <a:p>
-            <a:endParaRPr lang="en-GB" dirty="0"/>
-          </a:p>
-          <a:p>
-            <a:r>
-              <a:rPr lang="en-GB" b="1" dirty="0"/>
-              <a:t>2. Ask the linking question.</a:t>
-            </a:r>
-          </a:p>
-          <a:p>
-            <a:r>
-              <a:rPr lang="en-GB" dirty="0"/>
+            <a:endParaRPr lang="en-GB"/>
+          </a:p>
+          <a:p>
+            <a:r>
+              <a:rPr lang="en-GB"/>
+              <a:t>2. Name the two highest-risk dimensions.</a:t>
+            </a:r>
+          </a:p>
+          <a:p>
+            <a:r>
+              <a:rPr lang="en-GB"/>
+              <a:t>Say: "From your team’s profile, your group names the two dimensions on which your executive team carries the highest risk for the strategy, and the response your team adopts for each.</a:t>
+            </a:r>
+          </a:p>
+          <a:p>
+            <a:r>
+              <a:rPr lang="en-GB"/>
+              <a:t>The profile gives the risk and the response at your team’s level."</a:t>
+            </a:r>
+          </a:p>
+          <a:p>
+            <a:r>
+              <a:rPr lang="en-GB"/>
               <a:t>Ask: "Which level in your team’s profile carries the highest risk for this change? Which ACE-IT behaviour answers it?"</a:t>
             </a:r>
           </a:p>
           <a:p>
-            <a:endParaRPr lang="en-GB" dirty="0"/>
-          </a:p>
-          <a:p>
-            <a:r>
-              <a:rPr lang="en-GB" b="1" dirty="0"/>
+            <a:endParaRPr lang="en-GB"/>
+          </a:p>
+          <a:p>
+            <a:r>
+              <a:rPr lang="en-GB"/>
               <a:t>3. Teach each of the five behaviours with its guide.</a:t>
             </a:r>
           </a:p>
           <a:p>
             <a:r>
-              <a:rPr lang="en-GB" dirty="0"/>
+              <a:rPr lang="en-GB"/>
               <a:t>The guide beside each box is the lesson of 1.3.4.</a:t>
             </a:r>
           </a:p>
           <a:p>
             <a:r>
-              <a:rPr lang="en-GB" dirty="0"/>
+              <a:rPr lang="en-GB"/>
               <a:t>Accountability</a:t>
             </a:r>
           </a:p>
           <a:p>
             <a:r>
-              <a:rPr lang="en-GB" dirty="0"/>
+              <a:rPr lang="en-GB"/>
               <a:t>Definition: Taking full ownership for results. Acknowledging missteps and driving corrective action.</a:t>
             </a:r>
           </a:p>
           <a:p>
             <a:r>
-              <a:rPr lang="en-GB" dirty="0"/>
+              <a:rPr lang="en-GB"/>
               <a:t>What it does for a new practice: One named person owns the practice and its result.</a:t>
             </a:r>
           </a:p>
           <a:p>
             <a:r>
-              <a:rPr lang="en-GB" dirty="0"/>
+              <a:rPr lang="en-GB"/>
               <a:t>Observable: Commitments tracked • Reviews end with named owners • “We missed it, here’s the fix” language common</a:t>
             </a:r>
           </a:p>
           <a:p>
-            <a:endParaRPr lang="en-GB" dirty="0"/>
-          </a:p>
-          <a:p>
-            <a:r>
-              <a:rPr lang="en-GB" dirty="0"/>
+            <a:endParaRPr lang="en-GB"/>
+          </a:p>
+          <a:p>
+            <a:r>
+              <a:rPr lang="en-GB"/>
               <a:t>Commitment</a:t>
             </a:r>
           </a:p>
           <a:p>
             <a:r>
-              <a:rPr lang="en-GB" dirty="0"/>
+              <a:rPr lang="en-GB"/>
               <a:t>Definition: Staying anchored to agreed strategic intent even when pressure rises. Following through despite discomfort.</a:t>
             </a:r>
           </a:p>
           <a:p>
             <a:r>
-              <a:rPr lang="en-GB" dirty="0"/>
+              <a:rPr lang="en-GB"/>
               <a:t>What it does for a new practice: The practice is kept when pressure rises and the old way is quicker.</a:t>
             </a:r>
           </a:p>
           <a:p>
             <a:r>
-              <a:rPr lang="en-GB" dirty="0"/>
+              <a:rPr lang="en-GB"/>
               <a:t>Observable: Strategic priorities stay consistent • Leaders decline non-strategic work • Promises kept visibly</a:t>
             </a:r>
           </a:p>
           <a:p>
-            <a:endParaRPr lang="en-GB" dirty="0"/>
-          </a:p>
-          <a:p>
-            <a:r>
-              <a:rPr lang="en-GB" dirty="0"/>
+            <a:endParaRPr lang="en-GB"/>
+          </a:p>
+          <a:p>
+            <a:r>
+              <a:rPr lang="en-GB"/>
               <a:t>Engagement</a:t>
             </a:r>
           </a:p>
           <a:p>
             <a:r>
-              <a:rPr lang="en-GB" dirty="0"/>
+              <a:rPr lang="en-GB"/>
               <a:t>Definition: Actively involving self and others in sense-making, dialogue, and execution. Listening to understand.</a:t>
             </a:r>
           </a:p>
           <a:p>
             <a:r>
-              <a:rPr lang="en-GB" dirty="0"/>
+              <a:rPr lang="en-GB"/>
               <a:t>What it does for a new practice: People talk about how it is going and improve it together.</a:t>
             </a:r>
           </a:p>
           <a:p>
             <a:r>
-              <a:rPr lang="en-GB" dirty="0"/>
+              <a:rPr lang="en-GB"/>
               <a:t>Observable: Team meetings are two-way • Feedback loops visible • People quote the shared “why”</a:t>
             </a:r>
           </a:p>
           <a:p>
-            <a:endParaRPr lang="en-GB" dirty="0"/>
-          </a:p>
-          <a:p>
-            <a:r>
-              <a:rPr lang="en-GB" dirty="0"/>
+            <a:endParaRPr lang="en-GB"/>
+          </a:p>
+          <a:p>
+            <a:r>
+              <a:rPr lang="en-GB"/>
               <a:t>Integrity</a:t>
             </a:r>
           </a:p>
           <a:p>
             <a:r>
-              <a:rPr lang="en-GB" dirty="0"/>
+              <a:rPr lang="en-GB"/>
               <a:t>Definition: Acting consistently with values, facts, and truth — even when inconvenient. Declaring conflicts of interest early.</a:t>
             </a:r>
           </a:p>
           <a:p>
             <a:r>
-              <a:rPr lang="en-GB" dirty="0"/>
+              <a:rPr lang="en-GB"/>
               <a:t>What it does for a new practice: Slips are reported as they are, and early.</a:t>
             </a:r>
           </a:p>
           <a:p>
             <a:r>
-              <a:rPr lang="en-GB" dirty="0"/>
+              <a:rPr lang="en-GB"/>
               <a:t>Observable: Evidence cited before decisions • Values referenced in hard choices • Teams trust word matches deed</a:t>
             </a:r>
           </a:p>
           <a:p>
-            <a:endParaRPr lang="en-GB" dirty="0"/>
-          </a:p>
-          <a:p>
-            <a:r>
-              <a:rPr lang="en-GB" dirty="0"/>
+            <a:endParaRPr lang="en-GB"/>
+          </a:p>
+          <a:p>
+            <a:r>
+              <a:rPr lang="en-GB"/>
               <a:t>Transparency</a:t>
             </a:r>
           </a:p>
           <a:p>
             <a:r>
-              <a:rPr lang="en-GB" dirty="0"/>
+              <a:rPr lang="en-GB"/>
               <a:t>Definition: Making reasoning, progress, and constraints visible to all stakeholders. Sharing challenges openly.</a:t>
             </a:r>
           </a:p>
           <a:p>
             <a:r>
-              <a:rPr lang="en-GB" dirty="0"/>
+              <a:rPr lang="en-GB"/>
               <a:t>What it does for a new practice: Its results are visible to everyone the change affects.</a:t>
             </a:r>
           </a:p>
           <a:p>
             <a:r>
-              <a:rPr lang="en-GB" dirty="0"/>
+              <a:rPr lang="en-GB"/>
               <a:t>Observable: Dashboards updated regularly • Decisions logged and accessible • “No surprises” culture evident</a:t>
             </a:r>
           </a:p>
           <a:p>
-            <a:endParaRPr lang="en-GB" dirty="0"/>
-          </a:p>
-          <a:p>
-            <a:r>
-              <a:rPr lang="en-GB" dirty="0"/>
+            <a:endParaRPr lang="en-GB"/>
+          </a:p>
+          <a:p>
+            <a:r>
+              <a:rPr lang="en-GB"/>
               <a:t>For each behaviour the group writes: the behaviour we expect from our leadership team.</a:t>
             </a:r>
           </a:p>
           <a:p>
-            <a:endParaRPr lang="en-GB" dirty="0"/>
-          </a:p>
-          <a:p>
-            <a:r>
-              <a:rPr lang="en-GB" b="1" dirty="0"/>
+            <a:endParaRPr lang="en-GB"/>
+          </a:p>
+          <a:p>
+            <a:r>
+              <a:rPr lang="en-GB"/>
               <a:t>4. Give the example.</a:t>
             </a:r>
           </a:p>
           <a:p>
-            <a:endParaRPr lang="en-GB" dirty="0"/>
-          </a:p>
-          <a:p>
-            <a:r>
-              <a:rPr lang="en-GB" b="1" dirty="0"/>
+            <a:endParaRPr lang="en-GB"/>
+          </a:p>
+          <a:p>
+            <a:r>
+              <a:rPr lang="en-GB"/>
               <a:t>EXAMPLE</a:t>
             </a:r>
           </a:p>
           <a:p>
             <a:r>
-              <a:rPr lang="en-GB" dirty="0"/>
+              <a:rPr lang="en-GB"/>
               <a:t>The team’s level on Agreeableness is High.</a:t>
             </a:r>
           </a:p>
           <a:p>
             <a:r>
-              <a:rPr lang="en-GB" dirty="0"/>
+              <a:rPr lang="en-GB"/>
               <a:t>Risk: Agreement given without genuine commitment; team over-commits; resentment builds beneath surface harmony.</a:t>
             </a:r>
           </a:p>
           <a:p>
             <a:r>
-              <a:rPr lang="en-GB" dirty="0"/>
+              <a:rPr lang="en-GB"/>
               <a:t>Expected behaviour under Commitment: “Each of us states our capacity before we accept new work for this change.”</a:t>
             </a:r>
           </a:p>
           <a:p>
-            <a:endParaRPr lang="en-GB" dirty="0"/>
-          </a:p>
-          <a:p>
-            <a:r>
-              <a:rPr lang="en-GB" b="1"/>
-              <a:t>ON </a:t>
-            </a:r>
-            <a:r>
-              <a:rPr lang="en-GB" b="1" dirty="0"/>
-              <a:t>THE PORTAL, AFTER THE TEACHING:</a:t>
-            </a:r>
-          </a:p>
-          <a:p>
-            <a:r>
-              <a:rPr lang="en-GB" dirty="0"/>
+            <a:endParaRPr lang="en-GB"/>
+          </a:p>
+          <a:p>
+            <a:r>
+              <a:rPr lang="en-GB"/>
+              <a:t>ON THE PORTAL, AFTER THE TEACHING:</a:t>
+            </a:r>
+          </a:p>
+          <a:p>
+            <a:r>
+              <a:rPr lang="en-GB"/>
               <a:t>Participants work as a group in Step 2 of Section 5 of the participant file. This is Capstone work.</a:t>
             </a:r>
           </a:p>
           <a:p>
             <a:r>
-              <a:rPr lang="en-GB" dirty="0"/>
+              <a:rPr lang="en-GB"/>
               <a:t>1. The group reads its team OCEAVL profile, shown on each page once every member of the team has submitted their scores in part 3.1.</a:t>
             </a:r>
           </a:p>
           <a:p>
             <a:r>
-              <a:rPr lang="en-GB" dirty="0"/>
-              <a:t>2. The group reads the guide in each card. It is the lesson from part 1.3.4.</a:t>
-            </a:r>
-          </a:p>
-          <a:p>
-            <a:r>
-              <a:rPr lang="en-GB" dirty="0"/>
-              <a:t>3. For each behaviour, the group agrees what it expects to see the leadership team do so that the change in Step 1 holds. Where the team’s level carries a risk for this change, the group states the behaviour that answers it.</a:t>
-            </a:r>
-          </a:p>
-          <a:p>
-            <a:r>
-              <a:rPr lang="en-GB" dirty="0"/>
-              <a:t>4. Each participant reads the record and selects Agree. Print gives a copy of the record.</a:t>
-            </a:r>
-          </a:p>
-          <a:p>
-            <a:endParaRPr lang="en-GB" dirty="0"/>
-          </a:p>
-          <a:p>
-            <a:r>
-              <a:rPr lang="en-GB" b="1" dirty="0"/>
+              <a:rPr lang="en-GB"/>
+              <a:t>2. The group names the two dimensions on which its executive team carries the highest risk for the strategy, and the response it adopts for each.</a:t>
+            </a:r>
+          </a:p>
+          <a:p>
+            <a:r>
+              <a:rPr lang="en-GB"/>
+              <a:t>3. The group reads the guide in each card. It is the lesson from part 1.3.4.</a:t>
+            </a:r>
+          </a:p>
+          <a:p>
+            <a:r>
+              <a:rPr lang="en-GB"/>
+              <a:t>4. For each behaviour, the group agrees what it expects to see the leadership team do so that the change in Step 1 holds. Where the team’s level carries a risk for this change, the group states the behaviour that answers it.</a:t>
+            </a:r>
+          </a:p>
+          <a:p>
+            <a:r>
+              <a:rPr lang="en-GB"/>
+              <a:t>5. Each participant reads the record and selects Agree. Print gives a copy of the record.</a:t>
+            </a:r>
+          </a:p>
+          <a:p>
+            <a:endParaRPr lang="en-GB"/>
+          </a:p>
+          <a:p>
+            <a:r>
+              <a:rPr lang="en-GB"/>
               <a:t>AFTER THE SESSION:</a:t>
             </a:r>
           </a:p>
           <a:p>
             <a:r>
-              <a:rPr lang="en-GB" dirty="0"/>
+              <a:rPr lang="en-GB"/>
               <a:t>The record reaches you with each participant’s submission, under the heading Leading with Clarity.</a:t>
             </a:r>
           </a:p>
           <a:p>
             <a:r>
-              <a:rPr lang="en-GB" dirty="0"/>
-              <a:t>The confirmed record feeds boxes 5B and 5C of the team’s Capstone Blueprint: the Shift, Stake and Step in 5B, the expected leadership behaviours in 5C.</a:t>
+              <a:rPr lang="en-GB"/>
+              <a:t>The agreed record feeds boxes 5A to 5C of the team’s Capstone Blueprint: the two highest-risk dimensions in 5A, the Shift, Stake and Step in 5B, the expected leadership behaviours in 5C.</a:t>
             </a:r>
           </a:p>
         </p:txBody>
@@ -9632,172 +9515,172 @@
           <a:lstStyle/>
           <a:p>
             <a:r>
-              <a:rPr lang="en-GB" b="1" dirty="0"/>
+              <a:rPr lang="en-GB"/>
               <a:t>UNIT SUMMARY (UNIT 5 SYNTHESIS)</a:t>
             </a:r>
           </a:p>
           <a:p>
-            <a:endParaRPr lang="en-GB" dirty="0"/>
-          </a:p>
-          <a:p>
-            <a:r>
-              <a:rPr lang="en-GB" b="1" dirty="0"/>
+            <a:endParaRPr lang="en-GB"/>
+          </a:p>
+          <a:p>
+            <a:r>
+              <a:rPr lang="en-GB"/>
               <a:t>HOW TO TEACH IT:</a:t>
             </a:r>
           </a:p>
           <a:p>
-            <a:endParaRPr lang="en-GB" dirty="0"/>
-          </a:p>
-          <a:p>
-            <a:r>
-              <a:rPr lang="en-GB" b="1" dirty="0"/>
+            <a:endParaRPr lang="en-GB"/>
+          </a:p>
+          <a:p>
+            <a:r>
+              <a:rPr lang="en-GB"/>
               <a:t>1. Recap the unit, section by section.</a:t>
             </a:r>
           </a:p>
           <a:p>
             <a:r>
-              <a:rPr lang="en-GB" dirty="0"/>
+              <a:rPr lang="en-GB"/>
               <a:t>Say: "This session was about the human conditions that decide whether a strategy ever moves.</a:t>
             </a:r>
           </a:p>
           <a:p>
             <a:r>
-              <a:rPr lang="en-GB" dirty="0"/>
+              <a:rPr lang="en-GB"/>
               <a:t>Aligning Heart &amp; Mind treated execution as first a human problem: strategy moves through people before it moves through systems."</a:t>
             </a:r>
           </a:p>
           <a:p>
             <a:r>
-              <a:rPr lang="en-GB" dirty="0"/>
+              <a:rPr lang="en-GB"/>
               <a:t>- 1 · Awareness: strategy enters through Cognition (Mind) and Emotion (Heart). Five principles describe how alignment is created and sustained.</a:t>
             </a:r>
           </a:p>
           <a:p>
             <a:r>
-              <a:rPr lang="en-GB" dirty="0"/>
+              <a:rPr lang="en-GB"/>
               <a:t>- 2 · Intelligence: Heart &amp; Mind alignment is the ignition point that converts strategic potential energy into kinetic energy. Compliance yields short-term output. Commitment sustains execution when leaders are not present.</a:t>
             </a:r>
           </a:p>
           <a:p>
             <a:r>
-              <a:rPr lang="en-GB" dirty="0"/>
+              <a:rPr lang="en-GB"/>
               <a:t>- 3 · Extrapolating: each participant completes the OCEAVL Assessment across seven dimensions. The level held by most members is the team’s level, and every level carries a risk, a response and three routines.</a:t>
             </a:r>
           </a:p>
           <a:p>
             <a:r>
-              <a:rPr lang="en-GB" dirty="0"/>
+              <a:rPr lang="en-GB"/>
               <a:t>- 4 · Integration: the leadership team leads change with one voice through four commitments. Each CXO role brings a Converging Zone Contribution and carries an Alignment Hot Zone.</a:t>
             </a:r>
           </a:p>
           <a:p>
             <a:r>
-              <a:rPr lang="en-GB" dirty="0"/>
-              <a:t>- 5 · Application: each group states its Shift, Stake and Step for the strategy, reads its team OCEAVL profile and states the ACE-IT behaviours it expects from the leadership team.</a:t>
-            </a:r>
-          </a:p>
-          <a:p>
-            <a:r>
-              <a:rPr lang="en-GB" dirty="0"/>
+              <a:rPr lang="en-GB"/>
+              <a:t>- 5 · Application: each group states its Shift, Stake and Step for the strategy, reads its team OCEAVL profile, names its two highest-risk dimensions with the response to each, and states the ACE-IT behaviours it expects from the leadership team.</a:t>
+            </a:r>
+          </a:p>
+          <a:p>
+            <a:r>
+              <a:rPr lang="en-GB"/>
               <a:t>- Across the unit: a change is adopted when it passes the 4 Checks of Mind, Heart, Hands and Habit. The leader’s job is to explain, involve, equip and reinforce until it passes all four.</a:t>
             </a:r>
           </a:p>
           <a:p>
-            <a:endParaRPr lang="en-GB" dirty="0"/>
-          </a:p>
-          <a:p>
-            <a:r>
-              <a:rPr lang="en-GB" b="1" dirty="0"/>
+            <a:endParaRPr lang="en-GB"/>
+          </a:p>
+          <a:p>
+            <a:r>
+              <a:rPr lang="en-GB"/>
               <a:t>2. Ask the closing question on the slide.</a:t>
             </a:r>
           </a:p>
           <a:p>
             <a:r>
-              <a:rPr lang="en-GB" dirty="0"/>
+              <a:rPr lang="en-GB"/>
               <a:t>Ask: "Which ACE-IT behaviour in your record will be hardest for this leadership team to show, and what in the team’s OCEAVL profile makes it so?"</a:t>
             </a:r>
           </a:p>
           <a:p>
             <a:r>
-              <a:rPr lang="en-GB" dirty="0"/>
+              <a:rPr lang="en-GB"/>
               <a:t>Take an answer from each group.</a:t>
             </a:r>
           </a:p>
           <a:p>
-            <a:endParaRPr lang="en-GB" dirty="0"/>
-          </a:p>
-          <a:p>
-            <a:r>
-              <a:rPr lang="en-GB" b="1" dirty="0"/>
+            <a:endParaRPr lang="en-GB"/>
+          </a:p>
+          <a:p>
+            <a:r>
+              <a:rPr lang="en-GB"/>
               <a:t>3. Close the unit.</a:t>
             </a:r>
           </a:p>
           <a:p>
             <a:r>
-              <a:rPr lang="en-GB" dirty="0"/>
+              <a:rPr lang="en-GB"/>
               <a:t>Say: "Aligned hearts and minds turn a strategy from a document the organisation has read into a direction the organisation is willing to move on."</a:t>
             </a:r>
           </a:p>
           <a:p>
             <a:r>
-              <a:rPr lang="en-GB" dirty="0"/>
+              <a:rPr lang="en-GB"/>
               <a:t>Connect the unit to what follows: Performance Management Setup and the translation of strategy into individual accountability across the enterprise.</a:t>
             </a:r>
           </a:p>
           <a:p>
-            <a:endParaRPr lang="en-GB" dirty="0"/>
-          </a:p>
-          <a:p>
-            <a:r>
-              <a:rPr lang="en-GB" b="1" dirty="0"/>
+            <a:endParaRPr lang="en-GB"/>
+          </a:p>
+          <a:p>
+            <a:r>
+              <a:rPr lang="en-GB"/>
               <a:t>4. Say what happens on the portal.</a:t>
             </a:r>
           </a:p>
           <a:p>
             <a:r>
-              <a:rPr lang="en-GB" dirty="0"/>
+              <a:rPr lang="en-GB"/>
               <a:t>Say: "You now complete the unit on the portal: your reflections, your OCEAVL Assessment and your group’s record in Section 5.</a:t>
             </a:r>
           </a:p>
           <a:p>
             <a:r>
-              <a:rPr lang="en-GB" dirty="0"/>
+              <a:rPr lang="en-GB"/>
               <a:t>When your page is complete, you submit the unit."</a:t>
             </a:r>
           </a:p>
           <a:p>
-            <a:endParaRPr lang="en-GB" dirty="0"/>
-          </a:p>
-          <a:p>
-            <a:r>
-              <a:rPr lang="en-GB" b="1" dirty="0"/>
+            <a:endParaRPr lang="en-GB"/>
+          </a:p>
+          <a:p>
+            <a:r>
+              <a:rPr lang="en-GB"/>
               <a:t>ON THE PORTAL, AFTER THE TEACHING:</a:t>
             </a:r>
           </a:p>
           <a:p>
             <a:r>
-              <a:rPr lang="en-GB" dirty="0"/>
+              <a:rPr lang="en-GB"/>
               <a:t>Participants complete every part of the participant file and submit the unit to the facilitator from the end of Section 5.</a:t>
             </a:r>
           </a:p>
           <a:p>
-            <a:endParaRPr lang="en-GB" dirty="0"/>
-          </a:p>
-          <a:p>
-            <a:r>
-              <a:rPr lang="en-GB" b="1" dirty="0"/>
+            <a:endParaRPr lang="en-GB"/>
+          </a:p>
+          <a:p>
+            <a:r>
+              <a:rPr lang="en-GB"/>
               <a:t>AFTER THE SESSION:</a:t>
             </a:r>
           </a:p>
           <a:p>
             <a:r>
-              <a:rPr lang="en-GB" dirty="0"/>
+              <a:rPr lang="en-GB"/>
               <a:t>Each submission reaches you in the facilitator dashboard.</a:t>
             </a:r>
           </a:p>
           <a:p>
             <a:r>
-              <a:rPr lang="en-GB" dirty="0"/>
+              <a:rPr lang="en-GB"/>
               <a:t>Each member’s OCEAVL scores feed the team’s profile in the Capstone Blueprint. The group’s confirmed record feeds boxes 5B and 5C.</a:t>
             </a:r>
           </a:p>
@@ -26480,7 +26363,7 @@
                 <a:ea typeface="Calibri" pitchFamily="34" charset="-122"/>
                 <a:cs typeface="Calibri" pitchFamily="34" charset="-120"/>
               </a:rPr>
-              <a:t>Where your team’s level carries a risk for this change, state the behaviour that answers it.</a:t>
+              <a:t>First name your two highest-risk dimensions. Then state the behaviour that answers each risk.</a:t>
             </a:r>
             <a:endParaRPr kumimoji="0" lang="en-US" sz="2400" b="0" i="0" u="none" strike="noStrike" kern="1200" cap="none" spc="0" normalizeH="0" baseline="0" noProof="0" dirty="0">
               <a:ln>

--- a/Unit decks/Unit 05 - Aligning Heart & Mind.pptx
+++ b/Unit decks/Unit 05 - Aligning Heart & Mind.pptx
@@ -485,7 +485,7 @@
           <a:p>
             <a:r>
               <a:rPr lang="en-GB" dirty="0"/>
-              <a:t>- Each member’s submitted OCEAVL scores feed the team’s profile in the Capstone Blueprint once every member has submitted. The team sees levels and counts, with no names.</a:t>
+              <a:t>- Each member’s submitted OCEAVL scores feed the team’s profile in the Capstone S2R Blueprint once every member has submitted. The team sees levels and counts, with no names.</a:t>
             </a:r>
           </a:p>
           <a:p>
@@ -5486,7 +5486,7 @@
           <a:p>
             <a:r>
               <a:rPr lang="en-GB" dirty="0"/>
-              <a:t>The team’s profile appears in the team’s Capstone Blueprint once every member has submitted.</a:t>
+              <a:t>The team’s profile appears in the team’s Capstone S2R Blueprint once every member has submitted.</a:t>
             </a:r>
           </a:p>
         </p:txBody>
@@ -8261,7 +8261,7 @@
           <a:p>
             <a:r>
               <a:rPr lang="en-GB" dirty="0"/>
-              <a:t>Say: "We have the checks, the commitments and the hot zones. Section 5 applies two of the tools to the strategy in your Capstone Blueprint."</a:t>
+              <a:t>Say: "We have the checks, the commitments and the hot zones. Section 5 applies two of the tools to the strategy in your Capstone S2R Blueprint."</a:t>
             </a:r>
           </a:p>
           <a:p>
@@ -8362,7 +8362,7 @@
           <a:p>
             <a:r>
               <a:rPr lang="en-GB"/>
-              <a:t>Step 1 · The 3S Check. Your group states three things for the strategy in your Capstone Blueprint: the Shift (what is changing), the Stake (what the organisation gains if it changes, and what it loses if it stays as it is) and the Step (what must be done differently). The guide from part 1.3.1 sits beside each box.</a:t>
+              <a:t>Step 1 · The 3S Check. Your group states three things for the strategy in your Capstone S2R Blueprint: the Shift (what is changing), the Stake (what the organisation gains if it changes, and what it loses if it stays as it is) and the Step (what must be done differently). The guide from part 1.3.1 sits beside each box.</a:t>
             </a:r>
           </a:p>
           <a:p>
@@ -8377,7 +8377,7 @@
           <a:p>
             <a:r>
               <a:rPr lang="en-GB"/>
-              <a:t>You then select Agree. This is Capstone work, and when every member has agreed, your record feeds your team’s Capstone Blueprint.</a:t>
+              <a:t>You then select Agree. This is Capstone work, and when every member has agreed, your record feeds your team’s Capstone S2R Blueprint.</a:t>
             </a:r>
           </a:p>
           <a:p>
@@ -8482,7 +8482,7 @@
           <a:p>
             <a:r>
               <a:rPr lang="en-GB"/>
-              <a:t>Say: "This is Capstone work. Your group’s confirmed record feeds your team’s Capstone Blueprint."</a:t>
+              <a:t>Say: "This is Capstone work. Your group’s confirmed record feeds your team’s Capstone S2R Blueprint."</a:t>
             </a:r>
           </a:p>
           <a:p>
@@ -9369,7 +9369,7 @@
           <a:p>
             <a:r>
               <a:rPr lang="en-GB"/>
-              <a:t>The agreed record feeds boxes 5A to 5C of the team’s Capstone Blueprint: the two highest-risk dimensions in 5A, the Shift, Stake and Step in 5B, the expected leadership behaviours in 5C.</a:t>
+              <a:t>The agreed record feeds boxes 5A to 5C of the team’s Capstone S2R Blueprint: the two highest-risk dimensions in 5A, the Shift, Stake and Step in 5B, the expected leadership behaviours in 5C.</a:t>
             </a:r>
           </a:p>
         </p:txBody>
@@ -9681,7 +9681,7 @@
           <a:p>
             <a:r>
               <a:rPr lang="en-GB"/>
-              <a:t>Each member’s OCEAVL scores feed the team’s profile in the Capstone Blueprint. The group’s confirmed record feeds boxes 5B and 5C.</a:t>
+              <a:t>Each member’s OCEAVL scores feed the team’s profile in the Capstone S2R Blueprint. The group’s confirmed record feeds boxes 5B and 5C.</a:t>
             </a:r>
           </a:p>
         </p:txBody>
@@ -25247,7 +25247,7 @@
                 <a:ea typeface="Calibri" pitchFamily="34" charset="-122"/>
                 <a:cs typeface="Calibri" pitchFamily="34" charset="-120"/>
               </a:rPr>
-              <a:t>Your group states three things for the strategy in your Capstone Blueprint.</a:t>
+              <a:t>Your group states three things for the strategy in your Capstone S2R Blueprint.</a:t>
             </a:r>
             <a:endParaRPr kumimoji="0" lang="en-US" sz="2400" b="0" i="0" u="none" strike="noStrike" kern="1200" cap="none" spc="0" normalizeH="0" baseline="0" noProof="0" dirty="0">
               <a:ln>

--- a/Unit decks/Unit 05 - Aligning Heart & Mind.pptx
+++ b/Unit decks/Unit 05 - Aligning Heart & Mind.pptx
@@ -316,7 +316,7 @@
           <a:lstStyle/>
           <a:p>
             <a:r>
-              <a:rPr lang="en-GB" b="1" dirty="0"/>
+              <a:rPr lang="en-GB" dirty="0" b="1"/>
               <a:t>UNIT 5 · ALIGNING HEART &amp; MIND</a:t>
             </a:r>
           </a:p>
@@ -326,12 +326,10 @@
               <a:t>Module 3 · Influence · Unit 5</a:t>
             </a:r>
           </a:p>
-          <a:p>
-            <a:endParaRPr lang="en-GB" dirty="0"/>
-          </a:p>
-          <a:p>
-            <a:r>
-              <a:rPr lang="en-GB" b="1" dirty="0"/>
+          <a:p/>
+          <a:p>
+            <a:r>
+              <a:rPr lang="en-GB" dirty="0" b="1"/>
               <a:t>UNIT INTENT</a:t>
             </a:r>
           </a:p>
@@ -347,30 +345,37 @@
               <a:t>The unit builds a shared enterprise interpretation and the behaviours that sustain commitment.</a:t>
             </a:r>
           </a:p>
-          <a:p>
-            <a:endParaRPr lang="en-GB" dirty="0"/>
-          </a:p>
+          <a:p/>
           <a:p>
             <a:r>
               <a:rPr lang="en-GB" dirty="0"/>
               <a:t>SCARF explains resistance, ACE-IT sets the behaviour standard and the OCEAVL Assessment shows the behavioural profile the leadership team brings to the strategy.</a:t>
             </a:r>
           </a:p>
-          <a:p>
-            <a:endParaRPr lang="en-GB" dirty="0"/>
-          </a:p>
+          <a:p/>
           <a:p>
             <a:r>
               <a:rPr lang="en-GB" dirty="0"/>
               <a:t>The 4 Checks of Mind, Heart, Hands and Habit give leaders one discipline for leading people through the changes the strategy requires: 3S tests Mind, SCARF reads Heart, STAT tests Hands and ACE-IT holds Habit.</a:t>
             </a:r>
           </a:p>
-          <a:p>
-            <a:endParaRPr lang="en-GB" dirty="0"/>
-          </a:p>
-          <a:p>
-            <a:r>
-              <a:rPr lang="en-GB" b="1" dirty="0"/>
+          <a:p/>
+          <a:p>
+            <a:r>
+              <a:rPr lang="en-GB" dirty="0" b="1"/>
+              <a:t>WHERE THE UNIT SITS:</a:t>
+            </a:r>
+          </a:p>
+          <a:p>
+            <a:r>
+              <a:rPr lang="en-GB" dirty="0"/>
+              <a:t>Unit 5 opens Module 3, Influence. Influence mobilises the people and performance systems through which strategy is carried into execution. The module moves from Unit 5, Aligning Heart &amp; Mind (people alignment), to Unit 6, Performance Management Setup (performance architecture), Unit 7, Establishing Performance Expectations (owned commitments), Unit 8, Performance Measurement (review discipline), and Unit 9, Strategic Unclogging (flow of execution).</a:t>
+            </a:r>
+          </a:p>
+          <a:p/>
+          <a:p>
+            <a:r>
+              <a:rPr lang="en-GB" dirty="0" b="1"/>
               <a:t>WHAT THE UNIT PRODUCES:</a:t>
             </a:r>
           </a:p>
@@ -392,12 +397,10 @@
               <a:t>3. Each participant writes thirteen reflections.</a:t>
             </a:r>
           </a:p>
-          <a:p>
-            <a:endParaRPr lang="en-GB" dirty="0"/>
-          </a:p>
-          <a:p>
-            <a:r>
-              <a:rPr lang="en-GB" b="1" dirty="0"/>
+          <a:p/>
+          <a:p>
+            <a:r>
+              <a:rPr lang="en-GB" dirty="0" b="1"/>
               <a:t>HOW THE UNIT RUNS:</a:t>
             </a:r>
           </a:p>
@@ -425,18 +428,14 @@
               <a:t>The scribe types what the group agrees, the entries appear on every member’s page, and each member then selects Agree.</a:t>
             </a:r>
           </a:p>
-          <a:p>
-            <a:endParaRPr lang="en-GB" dirty="0"/>
-          </a:p>
+          <a:p/>
           <a:p>
             <a:r>
               <a:rPr lang="en-GB" dirty="0"/>
               <a:t>Each slide’s notes end with a block headed "On the portal, after the teaching" wherever participants have something to complete for that part.</a:t>
             </a:r>
           </a:p>
-          <a:p>
-            <a:endParaRPr lang="en-GB" dirty="0"/>
-          </a:p>
+          <a:p/>
           <a:p>
             <a:r>
               <a:rPr lang="en-GB" dirty="0"/>
@@ -473,9 +472,7 @@
               <a:t>- Step 2 of Section 5 shows the team’s OCEAVL profile. Every member of a team completes and submits the assessment in 3.1 first.</a:t>
             </a:r>
           </a:p>
-          <a:p>
-            <a:endParaRPr lang="en-GB" dirty="0"/>
-          </a:p>
+          <a:p/>
           <a:p>
             <a:r>
               <a:rPr lang="en-GB" dirty="0"/>
@@ -485,13 +482,13 @@
           <a:p>
             <a:r>
               <a:rPr lang="en-GB" dirty="0"/>
-              <a:t>- Each member’s submitted OCEAVL scores feed the team’s profile in the Capstone S2R Blueprint once every member has submitted. The team sees levels and counts, with no names.</a:t>
-            </a:r>
-          </a:p>
-          <a:p>
-            <a:r>
-              <a:rPr lang="en-GB" dirty="0"/>
-              <a:t>- The group’s confirmed record from Section 5 feeds boxes 5B and 5C. The team writes box 5A under its team profile.</a:t>
+              <a:t>- Each member’s submitted OCEAVL scores feed the team’s profile in the Capstone S2R® Blueprint once every member has submitted. The team sees levels and counts, with no names.</a:t>
+            </a:r>
+          </a:p>
+          <a:p>
+            <a:r>
+              <a:rPr lang="en-GB" dirty="0"/>
+              <a:t>- The group’s agreed record from Section 5 feeds boxes 5A to 5C of the Capstone S2R® Blueprint: the two highest-risk dimensions in 5A, the Shift, Stake and Step in 5B and the expected leadership behaviours in 5C.</a:t>
             </a:r>
           </a:p>
         </p:txBody>
@@ -3603,25 +3600,21 @@
           <a:lstStyle/>
           <a:p>
             <a:r>
-              <a:rPr lang="en-GB" b="1" dirty="0"/>
+              <a:rPr lang="en-GB" dirty="0" b="1"/>
               <a:t>SECTION 1 REFLECTIONS · 1.3.1 TO 1.3.4</a:t>
             </a:r>
           </a:p>
-          <a:p>
-            <a:endParaRPr lang="en-GB" dirty="0"/>
-          </a:p>
-          <a:p>
-            <a:r>
-              <a:rPr lang="en-GB" b="1" dirty="0"/>
+          <a:p/>
+          <a:p>
+            <a:r>
+              <a:rPr lang="en-GB" dirty="0" b="1"/>
               <a:t>HOW TO USE THIS SLIDE:</a:t>
             </a:r>
           </a:p>
-          <a:p>
-            <a:endParaRPr lang="en-GB" dirty="0"/>
-          </a:p>
-          <a:p>
-            <a:r>
-              <a:rPr lang="en-GB" b="1" dirty="0"/>
+          <a:p/>
+          <a:p>
+            <a:r>
+              <a:rPr lang="en-GB" dirty="0" b="1"/>
               <a:t>1. Show the slide and read the prompts aloud.</a:t>
             </a:r>
           </a:p>
@@ -3631,39 +3624,31 @@
               <a:t>1.3.1 Reflection — The 3S Check: "Write the Shift, the Stake and the Step for the change you are carrying through this unit. Which of the three would your people find hardest to say back, and why?"</a:t>
             </a:r>
           </a:p>
-          <a:p>
-            <a:endParaRPr lang="en-GB" dirty="0"/>
-          </a:p>
+          <a:p/>
           <a:p>
             <a:r>
               <a:rPr lang="en-GB" dirty="0"/>
               <a:t>1.3.2 Reflection: "Which SCARF trigger is most frequently activated in your organisation during strategy implementation? What is the observable evidence? What counter-strategy would address the root cause?"</a:t>
             </a:r>
           </a:p>
-          <a:p>
-            <a:endParaRPr lang="en-GB" dirty="0"/>
-          </a:p>
+          <a:p/>
           <a:p>
             <a:r>
               <a:rPr lang="en-GB" dirty="0"/>
               <a:t>1.3.3 Reflection — The STAT Check: "Run STAT for the change you are carrying through this unit. Which element is missing for the people it affects most? What is your evidence, and what is yours to supply?"</a:t>
             </a:r>
           </a:p>
-          <a:p>
-            <a:endParaRPr lang="en-GB" dirty="0"/>
-          </a:p>
+          <a:p/>
           <a:p>
             <a:r>
               <a:rPr lang="en-GB" dirty="0"/>
               <a:t>1.3.4 Reflection: "If you audited your last leadership review against the ACE-IT behaviours — where would you find the biggest gap between the ideal and the observable? What one behavioural change would create the most impact?"</a:t>
             </a:r>
           </a:p>
-          <a:p>
-            <a:endParaRPr lang="en-GB" dirty="0"/>
-          </a:p>
-          <a:p>
-            <a:r>
-              <a:rPr lang="en-GB" b="1" dirty="0"/>
+          <a:p/>
+          <a:p>
+            <a:r>
+              <a:rPr lang="en-GB" dirty="0" b="1"/>
               <a:t>2. Say what the reflections are for.</a:t>
             </a:r>
           </a:p>
@@ -3679,21 +3664,17 @@
               <a:t>The reflections build the learning portfolio they receive at the end of the programme.</a:t>
             </a:r>
           </a:p>
-          <a:p>
-            <a:endParaRPr lang="en-GB" dirty="0"/>
-          </a:p>
+          <a:p/>
           <a:p>
             <a:r>
               <a:rPr lang="en-GB" dirty="0"/>
               <a:t>Say: "You write these reflections on the portal after the teaching, with as much depth as you can."</a:t>
             </a:r>
           </a:p>
-          <a:p>
-            <a:endParaRPr lang="en-GB" dirty="0"/>
-          </a:p>
-          <a:p>
-            <a:r>
-              <a:rPr lang="en-GB" b="1" dirty="0"/>
+          <a:p/>
+          <a:p>
+            <a:r>
+              <a:rPr lang="en-GB" dirty="0" b="1"/>
               <a:t>3. Set the standard.</a:t>
             </a:r>
           </a:p>
@@ -3721,27 +3702,23 @@
               <a:t>Watch for: resistance named with no trigger. Ask: "Which of the five triggers is live?"</a:t>
             </a:r>
           </a:p>
-          <a:p>
-            <a:endParaRPr lang="en-GB" dirty="0"/>
-          </a:p>
-          <a:p>
-            <a:r>
-              <a:rPr lang="en-GB" b="1" dirty="0"/>
-              <a:t>4. Bridge to Section 2.</a:t>
-            </a:r>
-          </a:p>
-          <a:p>
-            <a:r>
-              <a:rPr lang="en-GB" dirty="0"/>
-              <a:t>Say: "We know what alignment is and what a change must pass. Section 2 shows why this decides execution outcomes."</a:t>
-            </a:r>
-          </a:p>
-          <a:p>
-            <a:endParaRPr lang="en-GB" dirty="0"/>
-          </a:p>
-          <a:p>
-            <a:r>
-              <a:rPr lang="en-GB" b="1" dirty="0"/>
+          <a:p/>
+          <a:p>
+            <a:r>
+              <a:rPr lang="en-GB" dirty="0" b="1"/>
+              <a:t>4. Close Section 1 and bridge to Section 2.</a:t>
+            </a:r>
+          </a:p>
+          <a:p>
+            <a:r>
+              <a:rPr lang="en-GB" dirty="0"/>
+              <a:t>Say: "Leaders who address both the mind and the heart prepare people to understand, accept and act on the change a strategy requires. Section 2 examines why aligning heart and mind determines execution outcomes, and why change must be led to adoption."</a:t>
+            </a:r>
+          </a:p>
+          <a:p/>
+          <a:p>
+            <a:r>
+              <a:rPr lang="en-GB" dirty="0" b="1"/>
               <a:t>ON THE PORTAL, AFTER THE TEACHING:</a:t>
             </a:r>
           </a:p>
@@ -5180,25 +5157,21 @@
           <a:lstStyle/>
           <a:p>
             <a:r>
-              <a:rPr lang="en-GB" b="1" dirty="0"/>
+              <a:rPr lang="en-GB" dirty="0" b="1"/>
               <a:t>SECTION 2 REFLECTIONS</a:t>
             </a:r>
           </a:p>
-          <a:p>
-            <a:endParaRPr lang="en-GB" dirty="0"/>
-          </a:p>
-          <a:p>
-            <a:r>
-              <a:rPr lang="en-GB" b="1" dirty="0"/>
+          <a:p/>
+          <a:p>
+            <a:r>
+              <a:rPr lang="en-GB" dirty="0" b="1"/>
               <a:t>HOW TO USE THIS SLIDE:</a:t>
             </a:r>
           </a:p>
-          <a:p>
-            <a:endParaRPr lang="en-GB" dirty="0"/>
-          </a:p>
-          <a:p>
-            <a:r>
-              <a:rPr lang="en-GB" b="1" dirty="0"/>
+          <a:p/>
+          <a:p>
+            <a:r>
+              <a:rPr lang="en-GB" dirty="0" b="1"/>
               <a:t>1. Show the slide and read the prompts aloud.</a:t>
             </a:r>
           </a:p>
@@ -5208,30 +5181,24 @@
               <a:t>2.1 Reflection: "Think of a time when you personally chose to go beyond compliance and genuinely committed to a strategic direction. What caused that shift? What would it take to create that same shift in your team?"</a:t>
             </a:r>
           </a:p>
-          <a:p>
-            <a:endParaRPr lang="en-GB" dirty="0"/>
-          </a:p>
+          <a:p/>
           <a:p>
             <a:r>
               <a:rPr lang="en-GB" dirty="0"/>
               <a:t>2.2 Reflection: "How much of your current leadership time is spent enforcing compliance? What is the opportunity cost of this?"</a:t>
             </a:r>
           </a:p>
-          <a:p>
-            <a:endParaRPr lang="en-GB" dirty="0"/>
-          </a:p>
+          <a:p/>
           <a:p>
             <a:r>
               <a:rPr lang="en-GB" dirty="0"/>
               <a:t>2.3 Reflection — Installed and adopted: "Name one change in your organisation that is installed and still awaiting adoption. Which check did it fail: Mind, Heart, Hands or Habit? What has the adoption gap cost so far?"</a:t>
             </a:r>
           </a:p>
-          <a:p>
-            <a:endParaRPr lang="en-GB" dirty="0"/>
-          </a:p>
-          <a:p>
-            <a:r>
-              <a:rPr lang="en-GB" b="1" dirty="0"/>
+          <a:p/>
+          <a:p>
+            <a:r>
+              <a:rPr lang="en-GB" dirty="0" b="1"/>
               <a:t>2. Say what the reflections are for.</a:t>
             </a:r>
           </a:p>
@@ -5247,21 +5214,17 @@
               <a:t>The reflections build the learning portfolio they receive at the end of the programme.</a:t>
             </a:r>
           </a:p>
-          <a:p>
-            <a:endParaRPr lang="en-GB" dirty="0"/>
-          </a:p>
+          <a:p/>
           <a:p>
             <a:r>
               <a:rPr lang="en-GB" dirty="0"/>
               <a:t>Say: "You write these reflections on the portal after the teaching, with as much depth as you can."</a:t>
             </a:r>
           </a:p>
-          <a:p>
-            <a:endParaRPr lang="en-GB" dirty="0"/>
-          </a:p>
-          <a:p>
-            <a:r>
-              <a:rPr lang="en-GB" b="1" dirty="0"/>
+          <a:p/>
+          <a:p>
+            <a:r>
+              <a:rPr lang="en-GB" dirty="0" b="1"/>
               <a:t>3. Set the standard.</a:t>
             </a:r>
           </a:p>
@@ -5289,27 +5252,23 @@
               <a:t>Watch for: a cost stated as a feeling. Ask: "What did it cost in rework, supervision or lost benefit?"</a:t>
             </a:r>
           </a:p>
-          <a:p>
-            <a:endParaRPr lang="en-GB" dirty="0"/>
-          </a:p>
-          <a:p>
-            <a:r>
-              <a:rPr lang="en-GB" b="1" dirty="0"/>
-              <a:t>4. Bridge to Section 3.</a:t>
-            </a:r>
-          </a:p>
-          <a:p>
-            <a:r>
-              <a:rPr lang="en-GB" dirty="0"/>
-              <a:t>Say: "We know why alignment decides execution. Section 3 asks where in your organisation it is most at risk."</a:t>
-            </a:r>
-          </a:p>
-          <a:p>
-            <a:endParaRPr lang="en-GB" dirty="0"/>
-          </a:p>
-          <a:p>
-            <a:r>
-              <a:rPr lang="en-GB" b="1" dirty="0"/>
+          <a:p/>
+          <a:p>
+            <a:r>
+              <a:rPr lang="en-GB" dirty="0" b="1"/>
+              <a:t>4. Close Section 2 and bridge to Section 3.</a:t>
+            </a:r>
+          </a:p>
+          <a:p>
+            <a:r>
+              <a:rPr lang="en-GB" dirty="0"/>
+              <a:t>Say: "Execution ignites when people move from compliance to genuine adoption of the change. Section 3 examines where the leadership team stands, through the behavioural profile each member and the team bring to the strategy."</a:t>
+            </a:r>
+          </a:p>
+          <a:p/>
+          <a:p>
+            <a:r>
+              <a:rPr lang="en-GB" dirty="0" b="1"/>
               <a:t>ON THE PORTAL, AFTER THE TEACHING:</a:t>
             </a:r>
           </a:p>
@@ -5386,16 +5345,14 @@
           <a:lstStyle/>
           <a:p>
             <a:r>
-              <a:rPr lang="en-GB" b="1" dirty="0"/>
+              <a:rPr lang="en-GB" dirty="0" b="1"/>
               <a:t>SECTION 3 · EXTRAPOLATING — WHERE</a:t>
             </a:r>
           </a:p>
-          <a:p>
-            <a:endParaRPr lang="en-GB" dirty="0"/>
-          </a:p>
-          <a:p>
-            <a:r>
-              <a:rPr lang="en-GB" b="1" dirty="0"/>
+          <a:p/>
+          <a:p>
+            <a:r>
+              <a:rPr lang="en-GB" dirty="0" b="1"/>
               <a:t>HOW THIS SECTION RUNS:</a:t>
             </a:r>
           </a:p>
@@ -5411,12 +5368,10 @@
               <a:t>2. The Section 3 Reflections slide: the reflection participants write on the portal after the teaching.</a:t>
             </a:r>
           </a:p>
-          <a:p>
-            <a:endParaRPr lang="en-GB" dirty="0"/>
-          </a:p>
-          <a:p>
-            <a:r>
-              <a:rPr lang="en-GB" b="1" dirty="0"/>
+          <a:p/>
+          <a:p>
+            <a:r>
+              <a:rPr lang="en-GB" dirty="0" b="1"/>
               <a:t>SECTION LEARNING OUTCOMES:</a:t>
             </a:r>
           </a:p>
@@ -5432,21 +5387,17 @@
               <a:t>2. Assess change readiness and tailor leadership responses to adoption barriers.</a:t>
             </a:r>
           </a:p>
-          <a:p>
-            <a:endParaRPr lang="en-GB" dirty="0"/>
-          </a:p>
-          <a:p>
-            <a:r>
-              <a:rPr lang="en-GB" b="1" dirty="0"/>
+          <a:p/>
+          <a:p>
+            <a:r>
+              <a:rPr lang="en-GB" dirty="0" b="1"/>
               <a:t>HOW TO OPEN THE SECTION:</a:t>
             </a:r>
           </a:p>
-          <a:p>
-            <a:endParaRPr lang="en-GB" dirty="0"/>
-          </a:p>
-          <a:p>
-            <a:r>
-              <a:rPr lang="en-GB" b="1" dirty="0"/>
+          <a:p/>
+          <a:p>
+            <a:r>
+              <a:rPr lang="en-GB" dirty="0" b="1"/>
               <a:t>1. Say what the section does.</a:t>
             </a:r>
           </a:p>
@@ -5468,12 +5419,10 @@
               <a:t>Your team then sees the profile it brings together."</a:t>
             </a:r>
           </a:p>
-          <a:p>
-            <a:endParaRPr lang="en-GB" dirty="0"/>
-          </a:p>
-          <a:p>
-            <a:r>
-              <a:rPr lang="en-GB" b="1" dirty="0"/>
+          <a:p/>
+          <a:p>
+            <a:r>
+              <a:rPr lang="en-GB" dirty="0" b="1"/>
               <a:t>2. Say how the assessment runs.</a:t>
             </a:r>
           </a:p>
@@ -5486,7 +5435,7 @@
           <a:p>
             <a:r>
               <a:rPr lang="en-GB" dirty="0"/>
-              <a:t>The team’s profile appears in the team’s Capstone S2R Blueprint once every member has submitted.</a:t>
+              <a:t>The team’s profile appears in the team’s Capstone S2R® Blueprint once every member has submitted.</a:t>
             </a:r>
           </a:p>
         </p:txBody>
@@ -5572,869 +5521,264 @@
           <a:lstStyle/>
           <a:p>
             <a:r>
-              <a:rPr lang="en-GB" b="1" dirty="0"/>
+              <a:rPr lang="en-GB" dirty="0" b="1"/>
               <a:t>3.1 — THE OCEAVL ASSESSMENT: PERSONAL AND TEAM BEHAVIOURAL PROFILE (SEVEN DIMENSIONS) · THE SEVEN DIMENSIONS</a:t>
             </a:r>
           </a:p>
-          <a:p>
-            <a:endParaRPr lang="en-GB" dirty="0"/>
-          </a:p>
-          <a:p>
-            <a:r>
-              <a:rPr lang="en-GB" b="1" dirty="0"/>
+          <a:p/>
+          <a:p>
+            <a:r>
+              <a:rPr lang="en-GB" dirty="0" b="1"/>
               <a:t>HOW TO TEACH IT:</a:t>
             </a:r>
           </a:p>
-          <a:p>
-            <a:endParaRPr lang="en-GB" dirty="0"/>
-          </a:p>
-          <a:p>
-            <a:r>
-              <a:rPr lang="en-ZA" b="1" dirty="0"/>
-              <a:t>Link The Assessment To Principle 3</a:t>
-            </a:r>
-            <a:endParaRPr lang="en-ZA" dirty="0"/>
-          </a:p>
-          <a:p>
-            <a:r>
-              <a:rPr lang="en-ZA" b="1" dirty="0"/>
-              <a:t>Say:</a:t>
-            </a:r>
-          </a:p>
-          <a:p>
-            <a:r>
-              <a:rPr lang="en-ZA" dirty="0"/>
-              <a:t>“Principle 3 established that alignment must be designed.</a:t>
-            </a:r>
-          </a:p>
-          <a:p>
-            <a:r>
-              <a:rPr lang="en-ZA" dirty="0"/>
-              <a:t>One way to design alignment is to understand the human tendencies that shape how leaders read strategy, handle disagreement, make decisions and respond under pressure.</a:t>
-            </a:r>
-          </a:p>
-          <a:p>
-            <a:endParaRPr lang="en-ZA" dirty="0"/>
-          </a:p>
-          <a:p>
-            <a:r>
-              <a:rPr lang="en-ZA" dirty="0"/>
-              <a:t>For this programme, we use the OCEAVL Assessment.</a:t>
-            </a:r>
-          </a:p>
-          <a:p>
-            <a:r>
-              <a:rPr lang="en-ZA" dirty="0"/>
-              <a:t>OCEAVL is adapted from the Big Five personality model. We use it here as a strategy execution tool.</a:t>
-            </a:r>
-          </a:p>
-          <a:p>
-            <a:endParaRPr lang="en-ZA" dirty="0"/>
-          </a:p>
-          <a:p>
-            <a:r>
-              <a:rPr lang="en-ZA" dirty="0"/>
-              <a:t>The assessment surfaces seven psychological tendencies that may influence executive decision-making and team coherence.</a:t>
-            </a:r>
-          </a:p>
-          <a:p>
-            <a:r>
-              <a:rPr lang="en-ZA" dirty="0"/>
-              <a:t>It gives each leader a profile across seven dimensions. </a:t>
-            </a:r>
-          </a:p>
-          <a:p>
-            <a:r>
-              <a:rPr lang="en-ZA" dirty="0"/>
-              <a:t>For each dimension, the tool shows whether the tendency is expressed at a low, balanced or high level.</a:t>
-            </a:r>
-          </a:p>
-          <a:p>
-            <a:endParaRPr lang="en-ZA" dirty="0"/>
-          </a:p>
-          <a:p>
-            <a:r>
-              <a:rPr lang="en-ZA" dirty="0"/>
-              <a:t>Each level then gives three things:</a:t>
-            </a:r>
-          </a:p>
-          <a:p>
-            <a:pPr marL="228600" lvl="0" indent="-228600">
-              <a:buFont typeface="+mj-lt"/>
-              <a:buAutoNum type="arabicPeriod"/>
-            </a:pPr>
-            <a:r>
-              <a:rPr lang="en-ZA" dirty="0"/>
-              <a:t>The risk this disposition may create for strategy execution.</a:t>
-            </a:r>
-          </a:p>
-          <a:p>
-            <a:pPr marL="228600" lvl="0" indent="-228600">
-              <a:buFont typeface="+mj-lt"/>
-              <a:buAutoNum type="arabicPeriod"/>
-            </a:pPr>
-            <a:r>
-              <a:rPr lang="en-ZA" dirty="0"/>
-              <a:t>The response required to manage the risk.</a:t>
-            </a:r>
-          </a:p>
-          <a:p>
-            <a:pPr marL="228600" lvl="0" indent="-228600">
-              <a:buFont typeface="+mj-lt"/>
-              <a:buAutoNum type="arabicPeriod"/>
-            </a:pPr>
-            <a:r>
-              <a:rPr lang="en-ZA" dirty="0"/>
-              <a:t>The routine that turns the response into repeated leadership practice.”</a:t>
-            </a:r>
-          </a:p>
-          <a:p>
-            <a:endParaRPr lang="en-ZA" dirty="0"/>
-          </a:p>
-          <a:p>
-            <a:r>
-              <a:rPr lang="en-ZA" dirty="0"/>
-              <a:t>Then add:</a:t>
-            </a:r>
-          </a:p>
-          <a:p>
-            <a:r>
-              <a:rPr lang="en-ZA" dirty="0"/>
-              <a:t>“The value of the tool is not the score. The value is the insight. </a:t>
-            </a:r>
-          </a:p>
-          <a:p>
-            <a:r>
-              <a:rPr lang="en-ZA" dirty="0"/>
-              <a:t>It helps us see how our personal disposition may be helping or hurting alignment before the strategy reaches execution.”</a:t>
-            </a:r>
-          </a:p>
-          <a:p>
-            <a:endParaRPr lang="en-ZA" b="1" dirty="0"/>
-          </a:p>
-          <a:p>
-            <a:r>
-              <a:rPr lang="en-ZA" b="1" dirty="0"/>
-              <a:t>Explain How To Read The Tool</a:t>
-            </a:r>
-            <a:endParaRPr lang="en-ZA" dirty="0"/>
-          </a:p>
-          <a:p>
-            <a:r>
-              <a:rPr lang="en-ZA" b="1" dirty="0"/>
-              <a:t>Say:</a:t>
-            </a:r>
-          </a:p>
-          <a:p>
-            <a:r>
-              <a:rPr lang="en-ZA" dirty="0"/>
-              <a:t>“When you read your profile, read it as a map of how the team tends to respond.</a:t>
-            </a:r>
-          </a:p>
-          <a:p>
-            <a:r>
-              <a:rPr lang="en-ZA" dirty="0"/>
-              <a:t>The tool is asking four simple questions:</a:t>
-            </a:r>
-          </a:p>
-          <a:p>
-            <a:pPr marL="228600" lvl="0" indent="-228600">
-              <a:buFont typeface="+mj-lt"/>
-              <a:buAutoNum type="arabicPeriod"/>
-            </a:pPr>
-            <a:r>
-              <a:rPr lang="en-ZA" dirty="0"/>
-              <a:t>What tendency is showing up?</a:t>
-            </a:r>
-          </a:p>
-          <a:p>
-            <a:pPr marL="228600" lvl="0" indent="-228600">
-              <a:buFont typeface="+mj-lt"/>
-              <a:buAutoNum type="arabicPeriod"/>
-            </a:pPr>
-            <a:r>
-              <a:rPr lang="en-ZA" dirty="0"/>
-              <a:t>At what level is it showing up? Low, balanced or high</a:t>
-            </a:r>
-          </a:p>
-          <a:p>
-            <a:pPr marL="228600" lvl="0" indent="-228600">
-              <a:buFont typeface="+mj-lt"/>
-              <a:buAutoNum type="arabicPeriod"/>
-            </a:pPr>
-            <a:r>
-              <a:rPr lang="en-ZA" dirty="0"/>
-              <a:t>What risk could this create for strategy execution?</a:t>
-            </a:r>
-          </a:p>
-          <a:p>
-            <a:pPr marL="228600" lvl="0" indent="-228600">
-              <a:buFont typeface="+mj-lt"/>
-              <a:buAutoNum type="arabicPeriod"/>
-            </a:pPr>
-            <a:r>
-              <a:rPr lang="en-ZA" dirty="0"/>
-              <a:t>What routine can help us manage that risk?”</a:t>
-            </a:r>
-          </a:p>
-          <a:p>
-            <a:endParaRPr lang="en-ZA" dirty="0"/>
-          </a:p>
-          <a:p>
-            <a:r>
-              <a:rPr lang="en-ZA" b="1" dirty="0"/>
-              <a:t>Then explain:</a:t>
-            </a:r>
-          </a:p>
-          <a:p>
-            <a:r>
-              <a:rPr lang="en-ZA" dirty="0"/>
-              <a:t>“A low level is not automatically bad. </a:t>
-            </a:r>
-          </a:p>
-          <a:p>
-            <a:r>
-              <a:rPr lang="en-ZA" dirty="0"/>
-              <a:t>A high level is not automatically good. </a:t>
-            </a:r>
-          </a:p>
-          <a:p>
-            <a:r>
-              <a:rPr lang="en-ZA" dirty="0"/>
-              <a:t>A balanced level is not automatically safe.</a:t>
-            </a:r>
-          </a:p>
-          <a:p>
-            <a:endParaRPr lang="en-ZA" dirty="0"/>
-          </a:p>
-          <a:p>
-            <a:r>
-              <a:rPr lang="en-ZA" dirty="0"/>
-              <a:t>Every level has a contribution. Every level also has a possible risk.</a:t>
-            </a:r>
-          </a:p>
-          <a:p>
-            <a:r>
-              <a:rPr lang="en-ZA" dirty="0"/>
-              <a:t>The question is: what does this strategy require from us now?”</a:t>
-            </a:r>
-          </a:p>
-          <a:p>
-            <a:endParaRPr lang="en-ZA" b="1" dirty="0"/>
-          </a:p>
-          <a:p>
-            <a:r>
-              <a:rPr lang="en-ZA" b="1" dirty="0"/>
-              <a:t>Say How Each Participant Completes It</a:t>
-            </a:r>
-            <a:endParaRPr lang="en-ZA" dirty="0"/>
-          </a:p>
-          <a:p>
-            <a:r>
-              <a:rPr lang="en-ZA" b="1" dirty="0"/>
-              <a:t>Say:</a:t>
-            </a:r>
-          </a:p>
-          <a:p>
-            <a:r>
-              <a:rPr lang="en-ZA" dirty="0"/>
-              <a:t>“You will complete the assessment alone, on your own page.</a:t>
-            </a:r>
-          </a:p>
-          <a:p>
-            <a:r>
-              <a:rPr lang="en-ZA" dirty="0"/>
-              <a:t>You will score yourself from 1 to 5 on each of the seven dimensions.</a:t>
-            </a:r>
-          </a:p>
-          <a:p>
-            <a:r>
-              <a:rPr lang="en-ZA" dirty="0"/>
-              <a:t>After that, you will read your own profile. Your profile will show your level for each dimension, the possible risk, the response and the suggested routine.</a:t>
-            </a:r>
-          </a:p>
-          <a:p>
-            <a:r>
-              <a:rPr lang="en-ZA" dirty="0"/>
-              <a:t>You will then select </a:t>
-            </a:r>
-            <a:r>
-              <a:rPr lang="en-ZA" b="1" dirty="0"/>
-              <a:t>Submit to My Team’s Capstone</a:t>
-            </a:r>
-            <a:r>
-              <a:rPr lang="en-ZA" dirty="0"/>
-              <a:t>.”</a:t>
-            </a:r>
-          </a:p>
-          <a:p>
-            <a:endParaRPr lang="en-ZA" dirty="0"/>
-          </a:p>
-          <a:p>
-            <a:r>
-              <a:rPr lang="en-ZA" b="1" dirty="0"/>
-              <a:t>Add:</a:t>
-            </a:r>
-          </a:p>
-          <a:p>
-            <a:r>
-              <a:rPr lang="en-ZA" dirty="0"/>
-              <a:t>“This is personal reflection first. </a:t>
-            </a:r>
-          </a:p>
-          <a:p>
-            <a:r>
-              <a:rPr lang="en-ZA" dirty="0"/>
-              <a:t>Do not rush to compare yourself with others. </a:t>
-            </a:r>
-          </a:p>
-          <a:p>
-            <a:r>
-              <a:rPr lang="en-ZA" dirty="0"/>
-              <a:t>First ask: what does this reveal about how I read and lead strategy?”</a:t>
-            </a:r>
-          </a:p>
-          <a:p>
-            <a:endParaRPr lang="en-ZA" b="1" dirty="0"/>
-          </a:p>
-          <a:p>
-            <a:r>
-              <a:rPr lang="en-ZA" b="1" dirty="0"/>
-              <a:t>Say What The Team Sees</a:t>
-            </a:r>
-            <a:endParaRPr lang="en-ZA" dirty="0"/>
-          </a:p>
-          <a:p>
-            <a:r>
-              <a:rPr lang="en-ZA" b="1" dirty="0"/>
-              <a:t>Say:</a:t>
-            </a:r>
-          </a:p>
-          <a:p>
-            <a:r>
-              <a:rPr lang="en-ZA" dirty="0"/>
-              <a:t>“Your team does not see individual names or single personal scores.</a:t>
-            </a:r>
-          </a:p>
-          <a:p>
-            <a:r>
-              <a:rPr lang="en-ZA" dirty="0"/>
-              <a:t>The team sees the team’s overall level on each dimension and the count at each level.</a:t>
-            </a:r>
-          </a:p>
-          <a:p>
-            <a:r>
-              <a:rPr lang="en-ZA" dirty="0"/>
-              <a:t>This allows the team to discuss its collective behavioural pattern without exposing individual profiles.”</a:t>
-            </a:r>
-          </a:p>
-          <a:p>
-            <a:endParaRPr lang="en-ZA" dirty="0"/>
-          </a:p>
-          <a:p>
-            <a:r>
-              <a:rPr lang="en-ZA" b="1" dirty="0"/>
-              <a:t>Then add:</a:t>
-            </a:r>
-          </a:p>
-          <a:p>
-            <a:r>
-              <a:rPr lang="en-ZA" dirty="0"/>
-              <a:t>“The team discussion is not about who scored what. It is about what the collective pattern could mean for the strategy.”</a:t>
-            </a:r>
-          </a:p>
-          <a:p>
-            <a:endParaRPr lang="en-ZA" b="1" dirty="0"/>
-          </a:p>
-          <a:p>
-            <a:r>
-              <a:rPr lang="en-ZA" b="1" dirty="0"/>
-              <a:t>Walk The Seven Dimensions On The Slide</a:t>
-            </a:r>
-            <a:endParaRPr lang="en-ZA" dirty="0"/>
-          </a:p>
-          <a:p>
-            <a:r>
-              <a:rPr lang="en-ZA" b="1" dirty="0"/>
-              <a:t>Say:</a:t>
-            </a:r>
-          </a:p>
-          <a:p>
-            <a:r>
-              <a:rPr lang="en-ZA" dirty="0"/>
-              <a:t>“These are the seven dimensions we are assessing. Each one tells us something about how leaders carry strategy.”</a:t>
-            </a:r>
-          </a:p>
-          <a:p>
-            <a:endParaRPr lang="en-ZA" b="1" dirty="0"/>
-          </a:p>
-          <a:p>
-            <a:r>
-              <a:rPr lang="en-ZA" b="1" dirty="0"/>
-              <a:t>1. Openness</a:t>
-            </a:r>
-            <a:endParaRPr lang="en-ZA" dirty="0"/>
-          </a:p>
-          <a:p>
-            <a:r>
-              <a:rPr lang="en-ZA" dirty="0"/>
-              <a:t>“Openness is about curiosity, creativity and adaptability to new approaches.</a:t>
-            </a:r>
-          </a:p>
-          <a:p>
-            <a:r>
-              <a:rPr lang="en-ZA" dirty="0"/>
-              <a:t>It shows how willing a leader is to consider new ideas, question old assumptions and respond to change.</a:t>
-            </a:r>
-          </a:p>
-          <a:p>
-            <a:r>
-              <a:rPr lang="en-ZA" dirty="0"/>
-              <a:t>In strategy, openness matters because the environment keeps changing. </a:t>
-            </a:r>
-          </a:p>
-          <a:p>
-            <a:r>
-              <a:rPr lang="en-ZA" dirty="0"/>
-              <a:t>A team with too little openness may stay too attached to familiar ways. </a:t>
-            </a:r>
-          </a:p>
-          <a:p>
-            <a:r>
-              <a:rPr lang="en-ZA" dirty="0"/>
-              <a:t>A team with too much openness may chase too many ideas at once.”</a:t>
-            </a:r>
-          </a:p>
-          <a:p>
-            <a:endParaRPr lang="en-ZA" b="1" dirty="0"/>
-          </a:p>
-          <a:p>
-            <a:r>
-              <a:rPr lang="en-ZA" b="1" dirty="0"/>
-              <a:t>2. Conscientiousness</a:t>
-            </a:r>
-            <a:endParaRPr lang="en-ZA" dirty="0"/>
-          </a:p>
-          <a:p>
-            <a:r>
-              <a:rPr lang="en-ZA" dirty="0"/>
-              <a:t>“Conscientiousness is about discipline, planning and follow-through on commitments.</a:t>
-            </a:r>
-          </a:p>
-          <a:p>
-            <a:r>
-              <a:rPr lang="en-ZA" dirty="0"/>
-              <a:t>It shows how reliably a leader organises work, tracks commitments and completes what has been agreed.</a:t>
-            </a:r>
-          </a:p>
-          <a:p>
-            <a:r>
-              <a:rPr lang="en-ZA" dirty="0"/>
-              <a:t>In strategy, conscientiousness matters because execution needs structure. </a:t>
-            </a:r>
-          </a:p>
-          <a:p>
-            <a:r>
-              <a:rPr lang="en-ZA" dirty="0"/>
-              <a:t>Without discipline, strategy remains a statement. </a:t>
-            </a:r>
-          </a:p>
-          <a:p>
-            <a:r>
-              <a:rPr lang="en-ZA" dirty="0"/>
-              <a:t>With discipline, strategy becomes action, ownership and review.”</a:t>
-            </a:r>
-          </a:p>
-          <a:p>
-            <a:endParaRPr lang="en-ZA" b="1" dirty="0"/>
-          </a:p>
-          <a:p>
-            <a:r>
-              <a:rPr lang="en-ZA" b="1" dirty="0"/>
-              <a:t>3. Extraversion</a:t>
-            </a:r>
-            <a:endParaRPr lang="en-ZA" dirty="0"/>
-          </a:p>
-          <a:p>
-            <a:r>
-              <a:rPr lang="en-ZA" dirty="0"/>
-              <a:t>“Extraversion is about outward energy, communication and comfort with collaboration.</a:t>
-            </a:r>
-          </a:p>
-          <a:p>
-            <a:r>
-              <a:rPr lang="en-ZA" dirty="0"/>
-              <a:t>It shows how easily a leader engages others, speaks into the room and helps move energy through the team.</a:t>
-            </a:r>
-          </a:p>
-          <a:p>
-            <a:r>
-              <a:rPr lang="en-ZA" dirty="0"/>
-              <a:t>In strategy, extraversion matters because strategy must be communicated. </a:t>
-            </a:r>
-          </a:p>
-          <a:p>
-            <a:r>
-              <a:rPr lang="en-ZA" dirty="0"/>
-              <a:t>People do not align to a document alone. They align through conversation, explanation and leadership signals.”</a:t>
-            </a:r>
-          </a:p>
-          <a:p>
-            <a:endParaRPr lang="en-ZA" b="1" dirty="0"/>
-          </a:p>
-          <a:p>
-            <a:r>
-              <a:rPr lang="en-ZA" b="1" dirty="0"/>
-              <a:t>4. Agreeableness</a:t>
-            </a:r>
-            <a:endParaRPr lang="en-ZA" dirty="0"/>
-          </a:p>
-          <a:p>
-            <a:r>
-              <a:rPr lang="en-ZA" dirty="0"/>
-              <a:t>“Agreeableness is about harmony, conflict management and cooperation.</a:t>
-            </a:r>
-          </a:p>
-          <a:p>
-            <a:r>
-              <a:rPr lang="en-ZA" dirty="0"/>
-              <a:t>It shows how a leader works with others, handles tension and protects relationships.</a:t>
-            </a:r>
-          </a:p>
-          <a:p>
-            <a:r>
-              <a:rPr lang="en-ZA" dirty="0"/>
-              <a:t>In strategy, agreeableness matters because execution depends on trust and cooperation. </a:t>
-            </a:r>
-          </a:p>
-          <a:p>
-            <a:r>
-              <a:rPr lang="en-ZA" dirty="0"/>
-              <a:t>But harmony must not replace honesty. A team can agree politely and still avoid the difficult issue.”</a:t>
-            </a:r>
-          </a:p>
-          <a:p>
-            <a:endParaRPr lang="en-ZA" b="1" dirty="0"/>
-          </a:p>
-          <a:p>
-            <a:r>
-              <a:rPr lang="en-ZA" b="1" dirty="0"/>
-              <a:t>5. Emotional Stability</a:t>
-            </a:r>
-            <a:endParaRPr lang="en-ZA" dirty="0"/>
-          </a:p>
-          <a:p>
-            <a:r>
-              <a:rPr lang="en-ZA" dirty="0"/>
-              <a:t>“Emotional Stability is about composure under pressure and emotional resilience.</a:t>
-            </a:r>
-          </a:p>
-          <a:p>
-            <a:r>
-              <a:rPr lang="en-ZA" dirty="0"/>
-              <a:t>It shows how a leader behaves when there is stress, criticism, uncertainty or failure.</a:t>
-            </a:r>
-          </a:p>
-          <a:p>
-            <a:r>
-              <a:rPr lang="en-ZA" dirty="0"/>
-              <a:t>In strategy, emotional stability matters because execution always brings pressure.</a:t>
-            </a:r>
-          </a:p>
-          <a:p>
-            <a:r>
-              <a:rPr lang="en-ZA" dirty="0"/>
-              <a:t>If leaders become reactive, the team spends its energy managing emotions, and the strategy waits.”</a:t>
-            </a:r>
-          </a:p>
-          <a:p>
-            <a:endParaRPr lang="en-ZA" b="1" dirty="0"/>
-          </a:p>
-          <a:p>
-            <a:r>
-              <a:rPr lang="en-ZA" b="1" dirty="0"/>
-              <a:t>6. Values Alignment</a:t>
-            </a:r>
-            <a:endParaRPr lang="en-ZA" dirty="0"/>
-          </a:p>
-          <a:p>
-            <a:r>
-              <a:rPr lang="en-ZA" dirty="0"/>
-              <a:t>“Values Alignment is about consistency between stated values and lived behaviour.</a:t>
-            </a:r>
-          </a:p>
-          <a:p>
-            <a:r>
-              <a:rPr lang="en-ZA" dirty="0"/>
-              <a:t>It shows whether a leader’s choices, actions and trade-offs match what the organisation says it stands for.</a:t>
-            </a:r>
-          </a:p>
-          <a:p>
-            <a:r>
-              <a:rPr lang="en-ZA" dirty="0"/>
-              <a:t>In strategy, values alignment matters because people watch behaviour more than slogans. </a:t>
-            </a:r>
-          </a:p>
-          <a:p>
-            <a:r>
-              <a:rPr lang="en-ZA" dirty="0"/>
-              <a:t>When values and decisions match, trust grows. When they do not match, people comply and commitment weakens.”</a:t>
-            </a:r>
-          </a:p>
-          <a:p>
-            <a:endParaRPr lang="en-ZA" b="1" dirty="0"/>
-          </a:p>
-          <a:p>
-            <a:r>
-              <a:rPr lang="en-ZA" b="1" dirty="0"/>
-              <a:t>7. Learning Orientation</a:t>
-            </a:r>
-            <a:endParaRPr lang="en-ZA" dirty="0"/>
-          </a:p>
-          <a:p>
-            <a:r>
-              <a:rPr lang="en-ZA" dirty="0"/>
-              <a:t>“Learning Orientation is about growth mindset, openness to feedback and skill development.</a:t>
-            </a:r>
-          </a:p>
-          <a:p>
-            <a:r>
-              <a:rPr lang="en-ZA" dirty="0"/>
-              <a:t>It shows whether a leader can learn, adapt and improve through experience.</a:t>
-            </a:r>
-          </a:p>
-          <a:p>
-            <a:r>
-              <a:rPr lang="en-ZA" dirty="0"/>
-              <a:t>In strategy, learning orientation matters because strategy is iterative. </a:t>
-            </a:r>
-          </a:p>
-          <a:p>
-            <a:r>
-              <a:rPr lang="en-ZA" dirty="0"/>
-              <a:t>We decide, test, learn and refine. A team that cannot learn will keep defending old choices even when reality has changed.”</a:t>
-            </a:r>
-          </a:p>
-          <a:p>
-            <a:endParaRPr lang="en-ZA" b="1" dirty="0"/>
-          </a:p>
-          <a:p>
-            <a:r>
-              <a:rPr lang="en-ZA" b="1" dirty="0"/>
-              <a:t>Explain The Three Levels Of Disposition</a:t>
-            </a:r>
-            <a:endParaRPr lang="en-ZA" dirty="0"/>
-          </a:p>
-          <a:p>
-            <a:r>
-              <a:rPr lang="en-ZA" b="1" dirty="0"/>
-              <a:t>Say:</a:t>
-            </a:r>
-          </a:p>
-          <a:p>
-            <a:r>
-              <a:rPr lang="en-ZA" dirty="0"/>
-              <a:t>“For each dimension, the tool reads the tendency at three levels: Low, Balanced and High.</a:t>
-            </a:r>
-          </a:p>
-          <a:p>
-            <a:r>
-              <a:rPr lang="en-ZA" dirty="0"/>
-              <a:t>Low means the tendency is less visible or less naturally used.</a:t>
-            </a:r>
-          </a:p>
-          <a:p>
-            <a:r>
-              <a:rPr lang="en-ZA" dirty="0"/>
-              <a:t>Balanced means the tendency is present in a moderate way.</a:t>
-            </a:r>
-          </a:p>
-          <a:p>
-            <a:r>
-              <a:rPr lang="en-ZA" dirty="0"/>
-              <a:t>High means the tendency is strongly visible.</a:t>
-            </a:r>
-          </a:p>
-          <a:p>
-            <a:endParaRPr lang="en-ZA" dirty="0"/>
-          </a:p>
-          <a:p>
-            <a:r>
-              <a:rPr lang="en-ZA" dirty="0"/>
-              <a:t>None of these levels is automatically good or bad. </a:t>
-            </a:r>
-          </a:p>
-          <a:p>
-            <a:r>
-              <a:rPr lang="en-ZA" dirty="0"/>
-              <a:t>The level becomes useful or risky depending on the strategy being carried.”</a:t>
-            </a:r>
-          </a:p>
-          <a:p>
-            <a:endParaRPr lang="en-ZA" dirty="0"/>
-          </a:p>
-          <a:p>
-            <a:r>
-              <a:rPr lang="en-ZA" dirty="0"/>
-              <a:t>Then add:</a:t>
-            </a:r>
-          </a:p>
-          <a:p>
-            <a:r>
-              <a:rPr lang="en-ZA" dirty="0"/>
-              <a:t>“For example, high openness may help innovation, but it may also create too many ideas. Low openness may protect stability, but it may also delay adaptation. Balanced openness may support careful experimentation, but it may still avoid uncomfortable change.”</a:t>
-            </a:r>
-          </a:p>
-          <a:p>
-            <a:endParaRPr lang="en-ZA" b="1" dirty="0"/>
-          </a:p>
-          <a:p>
-            <a:r>
-              <a:rPr lang="en-ZA" b="1" dirty="0"/>
-              <a:t>Use One Worked Example</a:t>
-            </a:r>
-            <a:endParaRPr lang="en-ZA" dirty="0"/>
-          </a:p>
-          <a:p>
-            <a:r>
-              <a:rPr lang="en-ZA" b="1" dirty="0"/>
-              <a:t>Say:</a:t>
-            </a:r>
-          </a:p>
-          <a:p>
-            <a:r>
-              <a:rPr lang="en-ZA" dirty="0"/>
-              <a:t>“Let us take one example so that you can see how the tool works.”</a:t>
-            </a:r>
-          </a:p>
-          <a:p>
-            <a:r>
-              <a:rPr lang="en-ZA" b="1" dirty="0"/>
-              <a:t>Example: High Agreeableness</a:t>
-            </a:r>
-            <a:endParaRPr lang="en-ZA" dirty="0"/>
-          </a:p>
-          <a:p>
-            <a:r>
-              <a:rPr lang="en-ZA" dirty="0"/>
-              <a:t>“High agreeableness means the leader is kind, warm, cooperative and ready to help.</a:t>
-            </a:r>
-          </a:p>
-          <a:p>
-            <a:r>
-              <a:rPr lang="en-ZA" dirty="0"/>
-              <a:t>This is a strength because it builds trust. People feel supported and respected.</a:t>
-            </a:r>
-          </a:p>
-          <a:p>
-            <a:r>
-              <a:rPr lang="en-ZA" dirty="0"/>
-              <a:t>But the risk is that agreement may be given without real commitment. People may avoid saying no. The team may over-commit because nobody wants to disappoint others. Resentment may build under the surface.”</a:t>
-            </a:r>
-          </a:p>
-          <a:p>
-            <a:endParaRPr lang="en-ZA" dirty="0"/>
-          </a:p>
-          <a:p>
-            <a:r>
-              <a:rPr lang="en-ZA" b="1" dirty="0"/>
-              <a:t>Say:</a:t>
-            </a:r>
-          </a:p>
-          <a:p>
-            <a:r>
-              <a:rPr lang="en-ZA" dirty="0"/>
-              <a:t>“The response is to create a formal challenge role. Someone must be allowed to ask the difficult question without being seen as negative.”</a:t>
-            </a:r>
-          </a:p>
-          <a:p>
-            <a:endParaRPr lang="en-ZA" dirty="0"/>
-          </a:p>
-          <a:p>
-            <a:r>
-              <a:rPr lang="en-ZA" b="1" dirty="0"/>
-              <a:t>Say:</a:t>
-            </a:r>
-          </a:p>
-          <a:p>
-            <a:r>
-              <a:rPr lang="en-ZA" dirty="0"/>
-              <a:t>“The routine is the Rotating Challenger. In each major discussion, one person is assigned to challenge assumptions, name risks and ask what the team may be avoiding.”</a:t>
-            </a:r>
-          </a:p>
-          <a:p>
-            <a:endParaRPr lang="en-ZA" dirty="0"/>
-          </a:p>
-          <a:p>
-            <a:r>
-              <a:rPr lang="en-ZA" dirty="0"/>
-              <a:t>Then connect to S2R®:</a:t>
-            </a:r>
-          </a:p>
-          <a:p>
-            <a:r>
-              <a:rPr lang="en-ZA" dirty="0"/>
-              <a:t>“In Strategy2Results®, this protects alignment. It helps the team move from polite agreement to real commitment.”</a:t>
-            </a:r>
-          </a:p>
-          <a:p>
-            <a:endParaRPr lang="en-ZA" b="1" dirty="0"/>
-          </a:p>
-          <a:p>
-            <a:r>
-              <a:rPr lang="en-ZA" b="1" dirty="0"/>
-              <a:t>Refer Participants To The Portal</a:t>
-            </a:r>
-            <a:endParaRPr lang="en-ZA" dirty="0"/>
-          </a:p>
-          <a:p>
-            <a:r>
-              <a:rPr lang="en-ZA" dirty="0"/>
-              <a:t>Say:</a:t>
-            </a:r>
-          </a:p>
-          <a:p>
-            <a:r>
-              <a:rPr lang="en-ZA" dirty="0"/>
-              <a:t>“We will not teach every risk, response and routine in class. The full detail is in the portal.</a:t>
-            </a:r>
-          </a:p>
-          <a:p>
-            <a:r>
-              <a:rPr lang="en-ZA" dirty="0"/>
-              <a:t>In the portal, you will find all seven dimensions. For each one, you will see the low, balanced and high levels, with the matching risk, response and routine.</a:t>
-            </a:r>
-          </a:p>
-          <a:p>
-            <a:r>
-              <a:rPr lang="en-ZA" dirty="0"/>
-              <a:t>Your task is to complete the assessment, read your personal profile and then reflect on the disposition that may carry the highest risk for how you read and lead strategy.”</a:t>
-            </a:r>
-          </a:p>
-          <a:p>
-            <a:endParaRPr lang="en-ZA" b="1" dirty="0"/>
-          </a:p>
-          <a:p>
-            <a:r>
-              <a:rPr lang="en-ZA" b="1" dirty="0"/>
-              <a:t>Close</a:t>
-            </a:r>
-            <a:endParaRPr lang="en-ZA" dirty="0"/>
-          </a:p>
-          <a:p>
-            <a:r>
-              <a:rPr lang="en-ZA" dirty="0"/>
-              <a:t>Say:</a:t>
-            </a:r>
-          </a:p>
-          <a:p>
-            <a:r>
-              <a:rPr lang="en-ZA" dirty="0"/>
-              <a:t>“OCEAVL helps us see the human pattern behind strategy execution. Once we can see the pattern, we can design the right guardrails. That is how alignment is designed.”</a:t>
-            </a:r>
-          </a:p>
-          <a:p>
-            <a:endParaRPr lang="en-GB" dirty="0"/>
+          <a:p/>
+          <a:p>
+            <a:r>
+              <a:rPr lang="en-GB" dirty="0" b="1"/>
+              <a:t>1. Link the assessment to Principle 3.</a:t>
+            </a:r>
+          </a:p>
+          <a:p>
+            <a:r>
+              <a:rPr lang="en-GB" dirty="0"/>
+              <a:t>Say: "Principle 3 established that alignment must be designed. One way to design alignment is to understand the human tendencies that shape how leaders read strategy, handle disagreement, make decisions and respond under pressure."</a:t>
+            </a:r>
+          </a:p>
+          <a:p>
+            <a:r>
+              <a:rPr lang="en-GB" dirty="0"/>
+              <a:t>Say: "For this programme we use the OCEAVL Assessment. OCEAVL is adapted from the Big Five personality model, and we use it here as a strategy execution tool. It surfaces seven psychological tendencies that may influence executive decision-making and team coherence. It gives each leader a profile across seven dimensions, and for each dimension it shows whether the tendency is expressed at a low, balanced or high level."</a:t>
+            </a:r>
+          </a:p>
+          <a:p>
+            <a:r>
+              <a:rPr lang="en-GB" dirty="0"/>
+              <a:t>Say: "Each level then gives three things: the risk this disposition may create for strategy execution, the response required to manage the risk, and the routine that turns the response into repeated leadership practice."</a:t>
+            </a:r>
+          </a:p>
+          <a:p>
+            <a:r>
+              <a:rPr lang="en-GB" dirty="0"/>
+              <a:t>Say: "The value of the tool lies in the insight it gives. It helps us see how our personal disposition may be helping or hurting alignment before the strategy reaches execution."</a:t>
+            </a:r>
+          </a:p>
+          <a:p/>
+          <a:p>
+            <a:r>
+              <a:rPr lang="en-GB" dirty="0" b="1"/>
+              <a:t>2. Explain how to read the tool.</a:t>
+            </a:r>
+          </a:p>
+          <a:p>
+            <a:r>
+              <a:rPr lang="en-GB" dirty="0"/>
+              <a:t>Say: "When you read a profile, read it as a map of how you tend to respond. The tool asks four simple questions. What tendency is showing up? At what level is it showing up: low, balanced or high? What risk could this create for strategy execution? What routine can help us manage that risk?"</a:t>
+            </a:r>
+          </a:p>
+          <a:p/>
+          <a:p>
+            <a:r>
+              <a:rPr lang="en-GB" dirty="0" b="1"/>
+              <a:t>3. Walk the seven dimensions on the slide.</a:t>
+            </a:r>
+          </a:p>
+          <a:p>
+            <a:r>
+              <a:rPr lang="en-GB" dirty="0"/>
+              <a:t>Say: "These are the seven dimensions we assess. Each one tells us something about how leaders carry strategy."</a:t>
+            </a:r>
+          </a:p>
+          <a:p>
+            <a:r>
+              <a:rPr lang="en-GB" dirty="0"/>
+              <a:t>Openness. Say: "Openness is about curiosity, creativity and adaptability to new approaches. It shows how willing a leader is to consider new ideas, question old assumptions and respond to change. In strategy, openness matters because the environment keeps changing. A team with too little openness may stay too attached to familiar ways. A team with too much openness may chase too many ideas at once."</a:t>
+            </a:r>
+          </a:p>
+          <a:p>
+            <a:r>
+              <a:rPr lang="en-GB" dirty="0"/>
+              <a:t>Conscientiousness. Say: "Conscientiousness is about discipline, planning and follow-through on commitments. It shows how reliably a leader organises work, tracks commitments and completes what has been agreed. In strategy, conscientiousness matters because execution needs structure. Without discipline, strategy remains a statement. With discipline, strategy becomes action, ownership and review."</a:t>
+            </a:r>
+          </a:p>
+          <a:p>
+            <a:r>
+              <a:rPr lang="en-GB" dirty="0"/>
+              <a:t>Extraversion. Say: "Extraversion is about outward energy, communication and comfort with collaboration. It shows how easily a leader engages others, speaks into the room and helps move energy through the team. In strategy, extraversion matters because strategy must be communicated. People align through conversation, explanation and leadership signals, and a document alone moves no one."</a:t>
+            </a:r>
+          </a:p>
+          <a:p>
+            <a:r>
+              <a:rPr lang="en-GB" dirty="0"/>
+              <a:t>Agreeableness. Say: "Agreeableness is about harmony, conflict management and cooperation. It shows how a leader works with others, handles tension and protects relationships. In strategy, agreeableness matters because execution depends on trust and cooperation. Harmony must still leave room for honesty. A team can agree politely and still avoid the difficult issue."</a:t>
+            </a:r>
+          </a:p>
+          <a:p>
+            <a:r>
+              <a:rPr lang="en-GB" dirty="0"/>
+              <a:t>Emotional Stability. Say: "Emotional Stability is about composure under pressure and emotional resilience. It shows how a leader behaves when there is stress, criticism, uncertainty or failure. In strategy, emotional stability matters because execution always brings pressure. If leaders become reactive, the team spends its energy managing emotions, and the strategy waits."</a:t>
+            </a:r>
+          </a:p>
+          <a:p>
+            <a:r>
+              <a:rPr lang="en-GB" dirty="0"/>
+              <a:t>Values Alignment. Say: "Values Alignment is about consistency between stated values and lived behaviour. It shows whether a leader’s choices, actions and trade-offs match what the organisation says it stands for. In strategy, values alignment matters because people watch behaviour more closely than slogans. When values and decisions match, trust grows. When they diverge, people comply and commitment weakens."</a:t>
+            </a:r>
+          </a:p>
+          <a:p>
+            <a:r>
+              <a:rPr lang="en-GB" dirty="0"/>
+              <a:t>Learning Orientation. Say: "Learning Orientation is about growth mindset, openness to feedback and skill development. It shows whether a leader can learn, adapt and improve through experience. In strategy, learning orientation matters because strategy is iterative. We decide, test, learn and refine. A team that cannot learn will keep defending old choices even when reality has changed."</a:t>
+            </a:r>
+          </a:p>
+          <a:p/>
+          <a:p>
+            <a:r>
+              <a:rPr lang="en-GB" dirty="0" b="1"/>
+              <a:t>4. Explain the three levels of disposition.</a:t>
+            </a:r>
+          </a:p>
+          <a:p>
+            <a:r>
+              <a:rPr lang="en-GB" dirty="0"/>
+              <a:t>Say: "For each dimension the tool reads the tendency at three levels. Low means the tendency is less visible or less naturally used. Balanced means the tendency is present in a moderate way. High means the tendency is strongly visible."</a:t>
+            </a:r>
+          </a:p>
+          <a:p>
+            <a:r>
+              <a:rPr lang="en-GB" dirty="0"/>
+              <a:t>Say: "Each level carries its own contribution and its own possible risk. A level becomes useful or risky depending on the strategy being carried. The question is: what does this strategy require from us now?"</a:t>
+            </a:r>
+          </a:p>
+          <a:p>
+            <a:r>
+              <a:rPr lang="en-GB" dirty="0"/>
+              <a:t>Say: "For example, high openness may help innovation and may also create too many ideas. Low openness may protect stability and may also delay adaptation. Balanced openness may support careful experimentation and may still avoid uncomfortable change."</a:t>
+            </a:r>
+          </a:p>
+          <a:p>
+            <a:r>
+              <a:rPr lang="en-GB" dirty="0"/>
+              <a:t>Listen for: a High level read as a strength with no risk. Ask participants to read the risk of their High levels first.</a:t>
+            </a:r>
+          </a:p>
+          <a:p/>
+          <a:p>
+            <a:r>
+              <a:rPr lang="en-GB" dirty="0" b="1"/>
+              <a:t>5. Use one worked example: High Agreeableness.</a:t>
+            </a:r>
+          </a:p>
+          <a:p>
+            <a:r>
+              <a:rPr lang="en-GB" dirty="0"/>
+              <a:t>Say: "Let us take one example so that you can see how the tool works. High agreeableness means the leader is kind, warm, cooperative and ready to help. This is a strength because it builds trust. People feel supported and respected."</a:t>
+            </a:r>
+          </a:p>
+          <a:p>
+            <a:r>
+              <a:rPr lang="en-GB" dirty="0"/>
+              <a:t>Say: "The risk is that agreement may be given without real commitment. People may avoid saying no. The team may over-commit because nobody wants to disappoint others. Resentment may build under the surface."</a:t>
+            </a:r>
+          </a:p>
+          <a:p>
+            <a:r>
+              <a:rPr lang="en-GB" dirty="0"/>
+              <a:t>Say: "The response is to create a formal challenge role. Someone must be allowed to ask the difficult question without being seen as negative."</a:t>
+            </a:r>
+          </a:p>
+          <a:p>
+            <a:r>
+              <a:rPr lang="en-GB" dirty="0"/>
+              <a:t>Say: "The routine is the Rotating Challenger. In each major discussion, one person is assigned to challenge assumptions, name risks and ask what the team may be avoiding."</a:t>
+            </a:r>
+          </a:p>
+          <a:p>
+            <a:r>
+              <a:rPr lang="en-GB" dirty="0"/>
+              <a:t>Say: "In Strategy2Results®, this protects alignment. It helps the team move from polite agreement to real commitment."</a:t>
+            </a:r>
+          </a:p>
+          <a:p/>
+          <a:p>
+            <a:r>
+              <a:rPr lang="en-GB" dirty="0" b="1"/>
+              <a:t>6. Say how the assessment works.</a:t>
+            </a:r>
+          </a:p>
+          <a:p>
+            <a:r>
+              <a:rPr lang="en-GB" dirty="0"/>
+              <a:t>Say: "OCEAVL is a personal assessment. Each of you completes it alone. You score yourself from 1 to 5 on each of the seven dimensions: 1 is strongly low, 3 is balanced and 5 is strongly high. A score of 4 or 5 is High, 3 is Balanced, and 1 or 2 is Low. Your profile then shows your level on each dimension, with its risk, its response and three routines."</a:t>
+            </a:r>
+          </a:p>
+          <a:p>
+            <a:r>
+              <a:rPr lang="en-GB" dirty="0"/>
+              <a:t>Say: "This is personal reflection first. Before you compare yourself with anyone, ask: what does this reveal about how I read and lead strategy? No one states a score to the group, and no one records a score for another member."</a:t>
+            </a:r>
+          </a:p>
+          <a:p>
+            <a:r>
+              <a:rPr lang="en-GB" dirty="0"/>
+              <a:t>Say: "Your team sees no names and no single personal scores. The level held by most members is the team’s level for each dimension, and the team sees that level with the count at each level. The team discussion is about what the collective pattern could mean for the strategy."</a:t>
+            </a:r>
+          </a:p>
+          <a:p/>
+          <a:p>
+            <a:r>
+              <a:rPr lang="en-GB" dirty="0" b="1"/>
+              <a:t>7. Close the part.</a:t>
+            </a:r>
+          </a:p>
+          <a:p>
+            <a:r>
+              <a:rPr lang="en-GB" dirty="0"/>
+              <a:t>Say: "OCEAVL helps us see the human pattern behind strategy execution. Once we can see the pattern, we can design the right guardrails. That is how alignment is designed."</a:t>
+            </a:r>
+          </a:p>
+          <a:p/>
+          <a:p>
+            <a:r>
+              <a:rPr lang="en-GB" dirty="0" b="1"/>
+              <a:t>ON THE PORTAL, AFTER THE TEACHING:</a:t>
+            </a:r>
+          </a:p>
+          <a:p>
+            <a:r>
+              <a:rPr lang="en-GB" dirty="0"/>
+              <a:t>Each participant completes the OCEAVL Assessment alone in part 3.1 of the participant file, as portfolio work. They score first and read the seven dimensions afterwards.</a:t>
+            </a:r>
+          </a:p>
+          <a:p>
+            <a:r>
+              <a:rPr lang="en-GB" dirty="0"/>
+              <a:t>1. They score themselves from 1 to 5 on each of the seven dimensions.</a:t>
+            </a:r>
+          </a:p>
+          <a:p>
+            <a:r>
+              <a:rPr lang="en-GB" dirty="0"/>
+              <a:t>2. They read their own profile: for each dimension, the level with its risk, its response and three routines. The full low, balanced and high detail for all seven dimensions is on the page.</a:t>
+            </a:r>
+          </a:p>
+          <a:p>
+            <a:r>
+              <a:rPr lang="en-GB" dirty="0"/>
+              <a:t>3. They select Submit to My Team’s Capstone. Print gives a copy of their own profile.</a:t>
+            </a:r>
+          </a:p>
+          <a:p>
+            <a:r>
+              <a:rPr lang="en-GB" dirty="0"/>
+              <a:t>The team’s profile appears in the team’s Capstone S2R® Blueprint once every member has submitted. Step 2 of Section 5 needs it, so every member submits before the group starts that step.</a:t>
+            </a:r>
+          </a:p>
+          <a:p>
+            <a:r>
+              <a:rPr lang="en-GB" dirty="0"/>
+              <a:t>Each participant then writes the reflection of 3.1: "Which of your own levels carries the highest risk for how you read and lead the strategy? Where has that risk already shown up?"</a:t>
+            </a:r>
           </a:p>
         </p:txBody>
       </p:sp>
@@ -6519,25 +5863,21 @@
           <a:lstStyle/>
           <a:p>
             <a:r>
-              <a:rPr lang="en-GB" b="1" dirty="0"/>
+              <a:rPr lang="en-GB" dirty="0" b="1"/>
               <a:t>SECTION 3 REFLECTIONS</a:t>
             </a:r>
           </a:p>
-          <a:p>
-            <a:endParaRPr lang="en-GB" dirty="0"/>
-          </a:p>
-          <a:p>
-            <a:r>
-              <a:rPr lang="en-GB" b="1" dirty="0"/>
+          <a:p/>
+          <a:p>
+            <a:r>
+              <a:rPr lang="en-GB" dirty="0" b="1"/>
               <a:t>HOW TO USE THIS SLIDE:</a:t>
             </a:r>
           </a:p>
-          <a:p>
-            <a:endParaRPr lang="en-GB" dirty="0"/>
-          </a:p>
-          <a:p>
-            <a:r>
-              <a:rPr lang="en-GB" b="1" dirty="0"/>
+          <a:p/>
+          <a:p>
+            <a:r>
+              <a:rPr lang="en-GB" dirty="0" b="1"/>
               <a:t>1. Show the slide and read the prompt aloud.</a:t>
             </a:r>
           </a:p>
@@ -6547,12 +5887,10 @@
               <a:t>3.1 Reflection — OCEAVL: "Which of your own levels carries the highest risk for how you read and lead the strategy? Where has that risk already shown up?"</a:t>
             </a:r>
           </a:p>
-          <a:p>
-            <a:endParaRPr lang="en-GB" dirty="0"/>
-          </a:p>
-          <a:p>
-            <a:r>
-              <a:rPr lang="en-GB" b="1" dirty="0"/>
+          <a:p/>
+          <a:p>
+            <a:r>
+              <a:rPr lang="en-GB" dirty="0" b="1"/>
               <a:t>2. Say what the reflections are for.</a:t>
             </a:r>
           </a:p>
@@ -6568,21 +5906,17 @@
               <a:t>The reflections build the learning portfolio they receive at the end of the programme.</a:t>
             </a:r>
           </a:p>
-          <a:p>
-            <a:endParaRPr lang="en-GB" dirty="0"/>
-          </a:p>
+          <a:p/>
           <a:p>
             <a:r>
               <a:rPr lang="en-GB" dirty="0"/>
               <a:t>Say: "You write these reflections on the portal after the teaching, with as much depth as you can."</a:t>
             </a:r>
           </a:p>
-          <a:p>
-            <a:endParaRPr lang="en-GB" dirty="0"/>
-          </a:p>
-          <a:p>
-            <a:r>
-              <a:rPr lang="en-GB" b="1" dirty="0"/>
+          <a:p/>
+          <a:p>
+            <a:r>
+              <a:rPr lang="en-GB" dirty="0" b="1"/>
               <a:t>3. Set the standard.</a:t>
             </a:r>
           </a:p>
@@ -6598,27 +5932,23 @@
               <a:t>Watch for: a reflection that lists scores. Ask for one level and its risk.</a:t>
             </a:r>
           </a:p>
-          <a:p>
-            <a:endParaRPr lang="en-GB" dirty="0"/>
-          </a:p>
-          <a:p>
-            <a:r>
-              <a:rPr lang="en-GB" b="1" dirty="0"/>
-              <a:t>4. Bridge to Section 4.</a:t>
-            </a:r>
-          </a:p>
-          <a:p>
-            <a:r>
-              <a:rPr lang="en-GB" dirty="0"/>
-              <a:t>Say: "You know the profile you bring. Section 4 shows how the leadership team holds alignment together."</a:t>
-            </a:r>
-          </a:p>
-          <a:p>
-            <a:endParaRPr lang="en-GB" dirty="0"/>
-          </a:p>
-          <a:p>
-            <a:r>
-              <a:rPr lang="en-GB" b="1" dirty="0"/>
+          <a:p/>
+          <a:p>
+            <a:r>
+              <a:rPr lang="en-GB" dirty="0" b="1"/>
+              <a:t>4. Close Section 3 and bridge to Section 4.</a:t>
+            </a:r>
+          </a:p>
+          <a:p>
+            <a:r>
+              <a:rPr lang="en-GB" dirty="0"/>
+              <a:t>Say: "The team’s behavioural profile shows where alignment is strong and where it carries risk for the strategy. Section 4 examines how the leadership team converges its perspectives into one interpretation and one message."</a:t>
+            </a:r>
+          </a:p>
+          <a:p/>
+          <a:p>
+            <a:r>
+              <a:rPr lang="en-GB" dirty="0" b="1"/>
               <a:t>ON THE PORTAL, AFTER THE TEACHING:</a:t>
             </a:r>
           </a:p>
@@ -6887,143 +6217,78 @@
           <a:lstStyle/>
           <a:p>
             <a:r>
-              <a:rPr lang="en-GB" b="1" dirty="0"/>
+              <a:rPr lang="en-GB" dirty="0" b="1"/>
               <a:t>4.1 — LEADING CHANGE WITH ONE VOICE (FOUR COMMITMENTS)</a:t>
             </a:r>
           </a:p>
-          <a:p>
-            <a:endParaRPr lang="en-GB" dirty="0"/>
-          </a:p>
-          <a:p>
-            <a:r>
-              <a:rPr lang="en-GB" b="1" dirty="0"/>
+          <a:p/>
+          <a:p>
+            <a:r>
+              <a:rPr lang="en-GB" dirty="0" b="1"/>
               <a:t>HOW TO TEACH IT:</a:t>
             </a:r>
           </a:p>
-          <a:p>
-            <a:endParaRPr lang="en-GB" dirty="0"/>
-          </a:p>
-          <a:p>
-            <a:r>
-              <a:rPr lang="en-GB" b="1" dirty="0"/>
-              <a:t>1. Frame the part.</a:t>
-            </a:r>
-          </a:p>
-          <a:p>
-            <a:r>
-              <a:rPr lang="en-GB" dirty="0"/>
-              <a:t>Say: </a:t>
-            </a:r>
-            <a:r>
-              <a:rPr lang="en-ZA" sz="1200" b="0" i="0" kern="1200" dirty="0">
-                <a:solidFill>
-                  <a:schemeClr val="tx1"/>
-                </a:solidFill>
-                <a:effectLst/>
-                <a:latin typeface="+mn-lt"/>
-                <a:ea typeface="+mn-ea"/>
-                <a:cs typeface="+mn-cs"/>
-              </a:rPr>
-              <a:t>The Converging Zone is the point where the separate views of each function come together into one shared reading of the strategy. </a:t>
-            </a:r>
-          </a:p>
-          <a:p>
-            <a:r>
-              <a:rPr lang="en-ZA" sz="1200" b="0" i="0" kern="1200" dirty="0">
-                <a:solidFill>
-                  <a:schemeClr val="tx1"/>
-                </a:solidFill>
-                <a:effectLst/>
-                <a:latin typeface="+mn-lt"/>
-                <a:ea typeface="+mn-ea"/>
-                <a:cs typeface="+mn-cs"/>
-              </a:rPr>
-              <a:t>A leadership team that reaches it has Collective Intelligence, and the organisation hears one voice.</a:t>
-            </a:r>
-            <a:endParaRPr lang="en-GB" dirty="0"/>
-          </a:p>
-          <a:p>
-            <a:endParaRPr lang="en-GB" dirty="0"/>
-          </a:p>
-          <a:p>
-            <a:r>
-              <a:rPr lang="en-GB" dirty="0"/>
-              <a:t>To lead with one voice leaders must send one message, exhibit one example, demonstrate one way of landing the message and assign one leader to keep the glue tight.</a:t>
-            </a:r>
-          </a:p>
-          <a:p>
-            <a:endParaRPr lang="en-GB" dirty="0"/>
-          </a:p>
-          <a:p>
-            <a:r>
-              <a:rPr lang="en-GB" dirty="0"/>
-              <a:t>"The 4 Checks describe what one group of people needs from one leadership team.</a:t>
-            </a:r>
-          </a:p>
-          <a:p>
-            <a:endParaRPr lang="en-GB" dirty="0"/>
-          </a:p>
-          <a:p>
-            <a:r>
-              <a:rPr lang="en-GB" dirty="0"/>
-              <a:t>Most changes reach a group through several leaders at once.</a:t>
-            </a:r>
-          </a:p>
-          <a:p>
-            <a:r>
-              <a:rPr lang="en-GB" dirty="0"/>
-              <a:t>People hear from their own leader, watch the others, and compare.</a:t>
-            </a:r>
-          </a:p>
-          <a:p>
-            <a:endParaRPr lang="en-GB" dirty="0"/>
-          </a:p>
-          <a:p>
-            <a:r>
-              <a:rPr lang="en-GB" dirty="0"/>
-              <a:t>Where the leaders differ, the group takes the difference as the real message."</a:t>
-            </a:r>
-          </a:p>
-          <a:p>
-            <a:endParaRPr lang="en-GB" dirty="0"/>
-          </a:p>
-          <a:p>
-            <a:r>
-              <a:rPr lang="en-GB" dirty="0"/>
-              <a:t>Say: "In the Converging Zone, the leadership team makes four commitments that no single function can make alone. </a:t>
-            </a:r>
-          </a:p>
-          <a:p>
-            <a:endParaRPr lang="en-GB" b="1" dirty="0"/>
-          </a:p>
-          <a:p>
-            <a:r>
-              <a:rPr lang="en-GB" b="1" dirty="0"/>
-              <a:t>2. Teach the four commitments on the slide.</a:t>
-            </a:r>
-          </a:p>
-          <a:p>
-            <a:r>
-              <a:rPr lang="en-GB" b="1" dirty="0"/>
-              <a:t>One message · Protects Mind</a:t>
-            </a:r>
-          </a:p>
-          <a:p>
-            <a:r>
-              <a:rPr lang="en-GB" dirty="0"/>
-              <a:t>Every leader gives the same Shift, Stake and Step for each change. </a:t>
-            </a:r>
-          </a:p>
-          <a:p>
-            <a:r>
-              <a:rPr lang="en-GB" dirty="0"/>
-              <a:t>The test is the 3S Check applied to the leadership team itself. </a:t>
-            </a:r>
-          </a:p>
-          <a:p>
-            <a:r>
-              <a:rPr lang="en-GB" dirty="0"/>
-              <a:t>Each leader writes the three for the same change, and the versions are compared before anyone speaks to their people.</a:t>
+          <a:p/>
+          <a:p>
+            <a:r>
+              <a:rPr lang="en-GB" dirty="0" b="1"/>
+              <a:t>1. Say why one voice matters.</a:t>
+            </a:r>
+          </a:p>
+          <a:p>
+            <a:r>
+              <a:rPr lang="en-GB" dirty="0"/>
+              <a:t>Say: "The 4 Checks describe what one group of people needs from one leader. Most changes reach a group through several leaders at once. People hear from their own leader, watch the others, and compare. Where the leaders differ, the group takes the difference as the real message."</a:t>
+            </a:r>
+          </a:p>
+          <a:p/>
+          <a:p>
+            <a:r>
+              <a:rPr lang="en-GB" dirty="0" b="1"/>
+              <a:t>2. Define the Converging Zone.</a:t>
+            </a:r>
+          </a:p>
+          <a:p>
+            <a:r>
+              <a:rPr lang="en-GB" dirty="0"/>
+              <a:t>Say: "The Converging Zone is the point where the separate views of each function come together into one shared reading of the strategy. A leadership team that reaches it has Collective Intelligence, and the organisation hears one voice."</a:t>
+            </a:r>
+          </a:p>
+          <a:p>
+            <a:r>
+              <a:rPr lang="en-GB" dirty="0"/>
+              <a:t>Say: "With Collective Intelligence, direction remains clear across all layers, resources reinforce priorities, systems enable execution and people move with coordinated effort. One coherent signal reaches the organisation, and changes pass the 4 Checks of Mind, Heart, Hands and Habit."</a:t>
+            </a:r>
+          </a:p>
+          <a:p>
+            <a:r>
+              <a:rPr lang="en-GB" dirty="0"/>
+              <a:t>Say: "Without it, different leaders transmit different interpretations, changes stall at the first check they fail, functions receive competing signals and strategic instability spreads invisibly. Each function becomes a source of execution friction."</a:t>
+            </a:r>
+          </a:p>
+          <a:p>
+            <a:r>
+              <a:rPr lang="en-GB" dirty="0"/>
+              <a:t>Ask: "Which of these two states is your organisation closer to today?"</a:t>
+            </a:r>
+          </a:p>
+          <a:p/>
+          <a:p>
+            <a:r>
+              <a:rPr lang="en-GB" dirty="0" b="1"/>
+              <a:t>3. Teach the four commitments on the slide.</a:t>
+            </a:r>
+          </a:p>
+          <a:p>
+            <a:r>
+              <a:rPr lang="en-GB" dirty="0"/>
+              <a:t>Say: "To lead with one voice, the leadership team makes four commitments that no single function can make alone. Each one protects a check."</a:t>
+            </a:r>
+          </a:p>
+          <a:p>
+            <a:r>
+              <a:rPr lang="en-GB" dirty="0"/>
+              <a:t>One message · Protects Mind. Say: "Every leader gives the same Shift, Stake and Step for each change. The Functional Bias Problem works on leaders first: each one translates the change through their own function before passing it on. The test is the 3S Check applied to the leadership team itself. Each leader writes the three for the same change, and the versions are compared before anyone speaks to their people."</a:t>
             </a:r>
           </a:p>
           <a:p>
@@ -7033,24 +6298,9 @@
             </a:r>
           </a:p>
           <a:p>
-            <a:endParaRPr lang="en-GB" dirty="0"/>
-          </a:p>
-          <a:p>
-            <a:r>
-              <a:rPr lang="en-GB" b="1" dirty="0"/>
-              <a:t>One example · Protects Heart</a:t>
-            </a:r>
-          </a:p>
-          <a:p>
-            <a:r>
-              <a:rPr lang="en-GB" dirty="0"/>
-              <a:t>Leaders show the ACE-IT behaviours the change needs before they ask for them. </a:t>
-            </a:r>
-          </a:p>
-          <a:p>
-            <a:r>
-              <a:rPr lang="en-GB" dirty="0"/>
-              <a:t>People read a leader’s diary, questions and decisions as the real message.</a:t>
+            <a:r>
+              <a:rPr lang="en-GB" dirty="0"/>
+              <a:t>One example · Protects Heart. Say: "Leaders show the ACE-IT behaviours the change needs before they ask for them. People read a leader’s diary, questions and decisions as the real message. A leader who asks for the new practice and keeps to the old one has told the organisation which of the two is safe."</a:t>
             </a:r>
           </a:p>
           <a:p>
@@ -7060,24 +6310,9 @@
             </a:r>
           </a:p>
           <a:p>
-            <a:endParaRPr lang="en-GB" dirty="0"/>
-          </a:p>
-          <a:p>
-            <a:r>
-              <a:rPr lang="en-GB" b="1" dirty="0"/>
-              <a:t>One sequence · Protects Hands</a:t>
-            </a:r>
-          </a:p>
-          <a:p>
-            <a:r>
-              <a:rPr lang="en-GB" dirty="0"/>
-              <a:t>Leaders pool their changes and count how many land on the same group in the same period. </a:t>
-            </a:r>
-          </a:p>
-          <a:p>
-            <a:r>
-              <a:rPr lang="en-GB" dirty="0"/>
-              <a:t>The team then agrees the order and the pace. Time is the first STAT element to give way under the total load.</a:t>
+            <a:r>
+              <a:rPr lang="en-GB" dirty="0"/>
+              <a:t>One sequence · Protects Hands. Say: "Leaders pool their changes and count how many land on the same group in the same period. The team then agrees the order and the pace. Each function sees its own change, and each change looks reasonable alone. The total load on a group is visible only when the team looks together, and Time is the first STAT element to give way under it."</a:t>
             </a:r>
           </a:p>
           <a:p>
@@ -7087,33 +6322,15 @@
             </a:r>
           </a:p>
           <a:p>
-            <a:endParaRPr lang="en-GB" dirty="0"/>
-          </a:p>
-          <a:p>
             <a:r>
               <a:rPr lang="en-GB" dirty="0"/>
               <a:t>Data: employees’ willingness to support enterprise change fell from 74% in 2016 to 43% in 2022, while planned changes per employee rose from two to ten (Gartner, reported in Harvard Business Review, 2023).</a:t>
             </a:r>
           </a:p>
           <a:p>
-            <a:endParaRPr lang="en-GB" dirty="0"/>
-          </a:p>
-          <a:p>
-            <a:r>
-              <a:rPr lang="en-GB" b="1" dirty="0"/>
-              <a:t>One owner · Protects Habit</a:t>
-            </a:r>
-          </a:p>
-          <a:p>
-            <a:r>
-              <a:rPr lang="en-GB" dirty="0"/>
-              <a:t>Each transition has one named leader who answers for adoption, through to Habit. </a:t>
-            </a:r>
-          </a:p>
-          <a:p>
-            <a:r>
-              <a:rPr lang="en-GB" dirty="0"/>
-              <a:t>The owner runs the 4 Checks, reports which check the change has reached, and stays with it after the launch.</a:t>
+            <a:r>
+              <a:rPr lang="en-GB" dirty="0"/>
+              <a:t>One owner · Protects Habit. Say: "Each transition has one named leader who answers for adoption, through to Habit. The owner runs the 4 Checks, reports which check the change has reached, and stays with it after the launch, when attention moves to the next priority."</a:t>
             </a:r>
           </a:p>
           <a:p>
@@ -7123,23 +6340,78 @@
             </a:r>
           </a:p>
           <a:p>
-            <a:endParaRPr lang="en-GB" dirty="0"/>
-          </a:p>
-          <a:p>
             <a:r>
               <a:rPr lang="en-GB" dirty="0"/>
               <a:t>Data: projects with extremely effective sponsors were 79% likely to meet their objectives, against 27% with extremely ineffective sponsors (Prosci, Best Practices in Change Management, 12th edition).</a:t>
             </a:r>
           </a:p>
-          <a:p>
-            <a:endParaRPr lang="en-GB" dirty="0"/>
-          </a:p>
-          <a:p>
-            <a:endParaRPr lang="en-GB" dirty="0"/>
-          </a:p>
-          <a:p>
-            <a:r>
-              <a:rPr lang="en-GB" b="1" dirty="0"/>
+          <a:p/>
+          <a:p>
+            <a:r>
+              <a:rPr lang="en-GB" dirty="0" b="1"/>
+              <a:t>4. Count the change load.</a:t>
+            </a:r>
+          </a:p>
+          <a:p>
+            <a:r>
+              <a:rPr lang="en-GB" dirty="0"/>
+              <a:t>Say: "Choose one named group in your organisation and list in the chat every change the leadership team is asking of it this quarter."</a:t>
+            </a:r>
+          </a:p>
+          <a:p>
+            <a:r>
+              <a:rPr lang="en-GB" dirty="0"/>
+              <a:t>Let the count open the discussion on sequence.</a:t>
+            </a:r>
+          </a:p>
+          <a:p>
+            <a:r>
+              <a:rPr lang="en-GB" dirty="0"/>
+              <a:t>Ask: "If this group can absorb two of these well, which two come first, and who tells the owners of the rest?"</a:t>
+            </a:r>
+          </a:p>
+          <a:p>
+            <a:r>
+              <a:rPr lang="en-GB" dirty="0"/>
+              <a:t>Listen for: each leader defending their own change. Return the discussion to the group that has to absorb them.</a:t>
+            </a:r>
+          </a:p>
+          <a:p/>
+          <a:p>
+            <a:r>
+              <a:rPr lang="en-GB" dirty="0" b="1"/>
+              <a:t>5. Test one message on the room.</a:t>
+            </a:r>
+          </a:p>
+          <a:p>
+            <a:r>
+              <a:rPr lang="en-GB" dirty="0"/>
+              <a:t>Repeat the 3S test from 1.3.1 with the whole team on one enterprise-wide change. Participants post their Shift, Stake and Step in the chat, and the room compares the versions.</a:t>
+            </a:r>
+          </a:p>
+          <a:p>
+            <a:r>
+              <a:rPr lang="en-GB" dirty="0"/>
+              <a:t>Ask: "What is the single most important convergence you need to achieve before your next major strategy initiative?"</a:t>
+            </a:r>
+          </a:p>
+          <a:p/>
+          <a:p>
+            <a:r>
+              <a:rPr lang="en-GB" dirty="0" b="1"/>
+              <a:t>6. Bridge to 4.2.</a:t>
+            </a:r>
+          </a:p>
+          <a:p>
+            <a:r>
+              <a:rPr lang="en-GB" dirty="0"/>
+              <a:t>Say: "One voice depends on every role. 4.2 shows what each role brings to the shared reading of the strategy, and where each role is most likely to lose people."</a:t>
+            </a:r>
+          </a:p>
+          <a:p/>
+          <a:p>
+            <a:r>
+              <a:rPr lang="en-GB" dirty="0" b="1"/>
               <a:t>ON THE PORTAL, AFTER THE TEACHING:</a:t>
             </a:r>
           </a:p>
@@ -7238,16 +6510,14 @@
           <a:lstStyle/>
           <a:p>
             <a:r>
-              <a:rPr lang="en-GB" b="1" dirty="0"/>
+              <a:rPr lang="en-GB" dirty="0" b="1"/>
               <a:t>FACILITATOR GUIDE · SESSION OVERVIEW</a:t>
             </a:r>
           </a:p>
-          <a:p>
-            <a:endParaRPr lang="en-GB" dirty="0"/>
-          </a:p>
-          <a:p>
-            <a:r>
-              <a:rPr lang="en-GB" b="1" dirty="0"/>
+          <a:p/>
+          <a:p>
+            <a:r>
+              <a:rPr lang="en-GB" dirty="0" b="1"/>
               <a:t>HOW TO USE THIS SLIDE:</a:t>
             </a:r>
           </a:p>
@@ -7270,11 +6540,15 @@
             </a:r>
           </a:p>
           <a:p>
-            <a:endParaRPr lang="en-GB" dirty="0"/>
-          </a:p>
-          <a:p>
-            <a:r>
-              <a:rPr lang="en-GB" b="1" dirty="0"/>
+            <a:r>
+              <a:rPr lang="en-GB" dirty="0"/>
+              <a:t>4. Bridge to Section 1. Say: "We start where every strategy starts its journey into execution: with the people who have to carry it."</a:t>
+            </a:r>
+          </a:p>
+          <a:p/>
+          <a:p>
+            <a:r>
+              <a:rPr lang="en-GB" dirty="0" b="1"/>
               <a:t>THE FIVE SECTIONS:</a:t>
             </a:r>
           </a:p>
@@ -7284,114 +6558,35 @@
               <a:t>- Section 1 · Awareness — What: the two human filters, the five principles, then change management: the 4 Checks of Mind, Heart, Hands and Habit and the tool for each check (3S, SCARF, STAT, ACE-IT).</a:t>
             </a:r>
           </a:p>
-          <a:p>
-            <a:endParaRPr lang="en-GB" dirty="0"/>
-          </a:p>
+          <a:p/>
           <a:p>
             <a:r>
               <a:rPr lang="en-GB" dirty="0"/>
               <a:t>- Section 2 · Intelligence — Why: the ignition point of execution, the three foundational logics, and why a change delivers value only when it is adopted.</a:t>
             </a:r>
           </a:p>
-          <a:p>
-            <a:endParaRPr lang="en-GB" dirty="0"/>
-          </a:p>
+          <a:p/>
           <a:p>
             <a:r>
               <a:rPr lang="en-GB" dirty="0"/>
               <a:t>- Section 3 · Extrapolating — Where: the OCEAVL Assessment, which each participant completes for themselves, and the profile the team brings together.</a:t>
             </a:r>
           </a:p>
-          <a:p>
-            <a:endParaRPr lang="en-GB" dirty="0"/>
-          </a:p>
+          <a:p/>
           <a:p>
             <a:r>
               <a:rPr lang="en-GB" dirty="0"/>
               <a:t>- Section 4 · Integration — Collective: leading change with one voice, then the Converging Zone Contribution and the Alignment Hot Zone of each leadership role.</a:t>
             </a:r>
           </a:p>
-          <a:p>
-            <a:endParaRPr lang="en-GB" dirty="0"/>
-          </a:p>
+          <a:p/>
           <a:p>
             <a:r>
               <a:rPr lang="en-GB" dirty="0"/>
               <a:t>- Section 5 · Application — In Practice: Leading with Clarity. Each group states its Shift, Stake and Step, then the ACE-IT behaviours it expects from the leadership team.</a:t>
             </a:r>
           </a:p>
-          <a:p>
-            <a:endParaRPr lang="en-GB" dirty="0"/>
-          </a:p>
-          <a:p>
-            <a:r>
-              <a:rPr lang="en-GB" b="1" dirty="0"/>
-              <a:t>KEY FACILITATION QUESTIONS:</a:t>
-            </a:r>
-          </a:p>
-          <a:p>
-            <a:r>
-              <a:rPr lang="en-GB" dirty="0"/>
-              <a:t>- "What is the dominant emotion your team carries into the current strategy, and how does it change what people invest?"</a:t>
-            </a:r>
-          </a:p>
-          <a:p>
-            <a:r>
-              <a:rPr lang="en-GB" dirty="0"/>
-              <a:t>- "Which SCARF trigger does the current strategy activate most for your people?"</a:t>
-            </a:r>
-          </a:p>
-          <a:p>
-            <a:r>
-              <a:rPr lang="en-GB" dirty="0"/>
-              <a:t>- "For the most important change in your strategy, which check would your people fail first: Mind, Heart, Hands or Habit?"</a:t>
-            </a:r>
-          </a:p>
-          <a:p>
-            <a:r>
-              <a:rPr lang="en-GB" dirty="0"/>
-              <a:t>- "On which OCEAVL dimension does your team’s level carry the highest risk for this strategy? Where has that risk already shown up?"</a:t>
-            </a:r>
-          </a:p>
-          <a:p>
-            <a:r>
-              <a:rPr lang="en-GB" dirty="0"/>
-              <a:t>- "What behavioural change will you model in the next month so others can see alignment in action?"</a:t>
-            </a:r>
-          </a:p>
-          <a:p>
-            <a:endParaRPr lang="en-GB" dirty="0"/>
-          </a:p>
-          <a:p>
-            <a:r>
-              <a:rPr lang="en-GB" b="1" dirty="0"/>
-              <a:t>TONE AND WATCH POINTS:</a:t>
-            </a:r>
-          </a:p>
-          <a:p>
-            <a:r>
-              <a:rPr lang="en-GB" dirty="0"/>
-              <a:t>- Watch for compliance mistaken for commitment. Probe: "Would they still act this way if no one were checking?"</a:t>
-            </a:r>
-          </a:p>
-          <a:p>
-            <a:r>
-              <a:rPr lang="en-GB" dirty="0"/>
-              <a:t>- Watch for installation reported as adoption. Probe: "Would the new practice hold on a busy day with no one checking?"</a:t>
-            </a:r>
-          </a:p>
-          <a:p>
-            <a:r>
-              <a:rPr lang="en-GB" dirty="0"/>
-              <a:t>- Watch for emotion treated as a side topic. Connect each emotional state to an execution consequence.</a:t>
-            </a:r>
-          </a:p>
-          <a:p>
-            <a:r>
-              <a:rPr lang="en-GB" dirty="0"/>
-              <a:t>- Watch for expected behaviours that describe intentions. Each behaviour must be observable by the team.</a:t>
-            </a:r>
-          </a:p>
+          <a:p/>
         </p:txBody>
       </p:sp>
       <p:sp>
@@ -7475,75 +6670,75 @@
           <a:lstStyle/>
           <a:p>
             <a:r>
-              <a:rPr lang="en-GB" b="1" dirty="0"/>
+              <a:rPr lang="en-GB" dirty="0" b="1"/>
               <a:t>4.2 — COLLECTIVE INTELLIGENCE ACROSS THE LEADERSHIP TEAM (CLICK A ROLE)</a:t>
             </a:r>
           </a:p>
-          <a:p>
-            <a:endParaRPr lang="en-GB" dirty="0"/>
-          </a:p>
-          <a:p>
-            <a:r>
-              <a:rPr lang="en-GB" b="1" dirty="0"/>
+          <a:p/>
+          <a:p>
+            <a:r>
+              <a:rPr lang="en-GB" dirty="0" b="1"/>
               <a:t>HOW TO TEACH IT:</a:t>
             </a:r>
           </a:p>
-          <a:p>
-            <a:endParaRPr lang="en-GB" dirty="0"/>
-          </a:p>
-          <a:p>
-            <a:r>
-              <a:rPr lang="en-GB" b="1" dirty="0"/>
+          <a:p/>
+          <a:p>
+            <a:r>
+              <a:rPr lang="en-GB" dirty="0" b="1"/>
               <a:t>1. Frame the grid on the slide.</a:t>
             </a:r>
           </a:p>
           <a:p>
             <a:r>
-              <a:rPr lang="en-ZA" dirty="0"/>
-              <a:t>They are the </a:t>
-            </a:r>
-            <a:r>
-              <a:rPr lang="en-ZA" b="1" dirty="0"/>
-              <a:t>specific alignment responsibilities each executive role must clarify when the organisation is moving through change or a new strategic trajectory</a:t>
-            </a:r>
-            <a:r>
-              <a:rPr lang="en-ZA" dirty="0"/>
-              <a:t>.</a:t>
-            </a:r>
-          </a:p>
-          <a:p>
-            <a:r>
-              <a:rPr lang="en-ZA" dirty="0"/>
-              <a:t>“Every role carries a different part of the change into the organisation. If that role does not clarify its part, people lose alignment at that point.”</a:t>
-            </a:r>
-          </a:p>
-          <a:p>
-            <a:endParaRPr lang="en-ZA" dirty="0"/>
-          </a:p>
-          <a:p>
-            <a:r>
-              <a:rPr lang="en-ZA" dirty="0"/>
-              <a:t>That means for example - The CEO can clarify direction, but the CFO must clarify resource logic, the COO must clarify operating capacity, and the CHRO must clarify human capability.</a:t>
-            </a:r>
-          </a:p>
-          <a:p>
-            <a:endParaRPr lang="en-ZA" dirty="0"/>
-          </a:p>
-          <a:p>
-            <a:r>
-              <a:rPr lang="en-ZA" dirty="0"/>
-              <a:t>What is important is for leaders to know which lever to pull when aligning people heart and mind to create collective intelligence for execution whether as a leadership team or as a leader for a team.</a:t>
-            </a:r>
-          </a:p>
-          <a:p>
-            <a:endParaRPr lang="en-GB" dirty="0"/>
-          </a:p>
-          <a:p>
-            <a:r>
-              <a:rPr lang="en-GB" b="1" dirty="0"/>
-              <a:t>3. Walk some selected roles</a:t>
-            </a:r>
-          </a:p>
+              <a:rPr lang="en-GB" dirty="0"/>
+              <a:t>Say: "Every role on a leadership team affects alignment in two ways at once. Each role carries a different part of the change into the organisation. If that role does not clarify its part, people lose alignment at that point."</a:t>
+            </a:r>
+          </a:p>
+          <a:p>
+            <a:r>
+              <a:rPr lang="en-GB" dirty="0"/>
+              <a:t>Say: "The CEO clarifies direction. The CFO must clarify resource logic, the COO operating capacity and the CHRO human capability. Leaders need to know which lever to pull when aligning people’s hearts and minds, whether as a leadership team or as the leader of a team."</a:t>
+            </a:r>
+          </a:p>
+          <a:p/>
+          <a:p>
+            <a:r>
+              <a:rPr lang="en-GB" dirty="0" b="1"/>
+              <a:t>2. Teach the two terms.</a:t>
+            </a:r>
+          </a:p>
+          <a:p>
+            <a:r>
+              <a:rPr lang="en-GB" dirty="0"/>
+              <a:t>Say: "The Converging Zone Contribution is what a role brings so that the leadership team reads the strategy as one. It is the part of that shared reading only that role can supply."</a:t>
+            </a:r>
+          </a:p>
+          <a:p>
+            <a:r>
+              <a:rPr lang="en-GB" dirty="0"/>
+              <a:t>Say: "The Alignment Hot Zone is the one place where a role is most likely to lose people as it does its normal work. It is one of the 17 elements of 3S, SCARF, STAT and ACE-IT taught in 1.3.1 to 1.3.4. It tells the leader which check the role puts at risk: people’s understanding (Mind), their willingness (Heart), their ability to act (Hands) or their follow-through (Habit)."</a:t>
+            </a:r>
+          </a:p>
+          <a:p>
+            <a:r>
+              <a:rPr lang="en-GB" dirty="0"/>
+              <a:t>Say: "The two come from the same work. The work that makes a role valuable to the team is the work that creates its hot zone. The CEO sets direction: that is the contribution. A direction announced in broad terms leaves people unsure what changes for them: that is the hot zone. A leader who knows both keeps giving the contribution and guards the hot zone."</a:t>
+            </a:r>
+          </a:p>
+          <a:p/>
+          <a:p>
+            <a:r>
+              <a:rPr lang="en-GB" dirty="0" b="1"/>
+              <a:t>3. Walk the roles, starting with the CEO.</a:t>
+            </a:r>
+          </a:p>
+          <a:p>
+            <a:r>
+              <a:rPr lang="en-GB" dirty="0"/>
+              <a:t>Use the CEO card as the example: the contribution first, then the hot zone, and the one piece of work that produces both. Then take the roles in the room.</a:t>
+            </a:r>
+          </a:p>
+          <a:p/>
           <a:p>
             <a:r>
               <a:rPr lang="en-GB" dirty="0"/>
@@ -7598,9 +6793,7 @@
               <a:t>When the CEO’s alignment is absent or inconsistent, all other roles struggle to converge.</a:t>
             </a:r>
           </a:p>
-          <a:p>
-            <a:endParaRPr lang="en-GB" dirty="0"/>
-          </a:p>
+          <a:p/>
           <a:p>
             <a:r>
               <a:rPr lang="en-GB" dirty="0"/>
@@ -7649,9 +6842,7 @@
               <a:t>When the CFO’s alignment is absent, resources follow inertia, and the credibility of strategic priorities collapses.</a:t>
             </a:r>
           </a:p>
-          <a:p>
-            <a:endParaRPr lang="en-GB" dirty="0"/>
-          </a:p>
+          <a:p/>
           <a:p>
             <a:r>
               <a:rPr lang="en-GB" dirty="0"/>
@@ -7700,9 +6891,7 @@
               <a:t>When COO alignment is absent, execution machinery runs efficiently but in the wrong direction.</a:t>
             </a:r>
           </a:p>
-          <a:p>
-            <a:endParaRPr lang="en-GB" dirty="0"/>
-          </a:p>
+          <a:p/>
           <a:p>
             <a:r>
               <a:rPr lang="en-GB" dirty="0"/>
@@ -7751,9 +6940,7 @@
               <a:t>When CHRO alignment is absent, strategy consistently exceeds the human system’s capacity to carry it.</a:t>
             </a:r>
           </a:p>
-          <a:p>
-            <a:endParaRPr lang="en-GB" dirty="0"/>
-          </a:p>
+          <a:p/>
           <a:p>
             <a:r>
               <a:rPr lang="en-GB" dirty="0"/>
@@ -7802,9 +6989,7 @@
               <a:t>When CTO/CIO alignment is absent, technology investments produce demonstrations with no capability shift.</a:t>
             </a:r>
           </a:p>
-          <a:p>
-            <a:endParaRPr lang="en-GB" dirty="0"/>
-          </a:p>
+          <a:p/>
           <a:p>
             <a:r>
               <a:rPr lang="en-GB" dirty="0"/>
@@ -7853,9 +7038,7 @@
               <a:t>When CMO alignment is absent, market signals are disconnected from strategic direction, and brand promises outpace operational reality.</a:t>
             </a:r>
           </a:p>
-          <a:p>
-            <a:endParaRPr lang="en-GB" dirty="0"/>
-          </a:p>
+          <a:p/>
           <a:p>
             <a:r>
               <a:rPr lang="en-GB" dirty="0"/>
@@ -7904,9 +7087,7 @@
               <a:t>When CCO alignment is absent, growth strategies create internal incoherence that compounds over time.</a:t>
             </a:r>
           </a:p>
-          <a:p>
-            <a:endParaRPr lang="en-GB" dirty="0"/>
-          </a:p>
+          <a:p/>
           <a:p>
             <a:r>
               <a:rPr lang="en-GB" dirty="0"/>
@@ -7955,9 +7136,7 @@
               <a:t>When CPO alignment is absent, procurement optimises for cost at the expense of strategic capability.</a:t>
             </a:r>
           </a:p>
-          <a:p>
-            <a:endParaRPr lang="en-GB" dirty="0"/>
-          </a:p>
+          <a:p/>
           <a:p>
             <a:r>
               <a:rPr lang="en-GB" dirty="0"/>
@@ -8054,15 +7233,67 @@
               <a:t>When CSO alignment is absent, the strategic narrative fragments and different layers execute different versions of the strategy.</a:t>
             </a:r>
           </a:p>
-          <a:p>
-            <a:endParaRPr lang="en-GB" dirty="0"/>
-          </a:p>
-          <a:p>
-            <a:endParaRPr lang="en-GB" b="1" dirty="0"/>
-          </a:p>
-          <a:p>
-            <a:r>
-              <a:rPr lang="en-GB" b="1" dirty="0"/>
+          <a:p/>
+          <a:p>
+            <a:r>
+              <a:rPr lang="en-GB" dirty="0" b="1"/>
+              <a:t>4. Ask each leader to read their own role.</a:t>
+            </a:r>
+          </a:p>
+          <a:p>
+            <a:r>
+              <a:rPr lang="en-GB" dirty="0"/>
+              <a:t>Ask each participant to find their own role first.</a:t>
+            </a:r>
+          </a:p>
+          <a:p>
+            <a:r>
+              <a:rPr lang="en-GB" dirty="0"/>
+              <a:t>Ask: "Do you recognise this description? Is this how your team experiences your alignment contribution?"</a:t>
+            </a:r>
+          </a:p>
+          <a:p>
+            <a:r>
+              <a:rPr lang="en-GB" dirty="0"/>
+              <a:t>Then ask them to read the roles closest to their own. This is particularly powerful when the full CXO team attends.</a:t>
+            </a:r>
+          </a:p>
+          <a:p/>
+          <a:p>
+            <a:r>
+              <a:rPr lang="en-GB" dirty="0" b="1"/>
+              <a:t>5. Name the next alignment conversation.</a:t>
+            </a:r>
+          </a:p>
+          <a:p>
+            <a:r>
+              <a:rPr lang="en-GB" dirty="0"/>
+              <a:t>Ask: "Look at the role most adjacent to yours. What is the most important alignment conversation you need to have next with that role?"</a:t>
+            </a:r>
+          </a:p>
+          <a:p>
+            <a:r>
+              <a:rPr lang="en-GB" dirty="0"/>
+              <a:t>The answer frequently becomes a direct commitment after the session.</a:t>
+            </a:r>
+          </a:p>
+          <a:p/>
+          <a:p>
+            <a:r>
+              <a:rPr lang="en-GB" dirty="0" b="1"/>
+              <a:t>6. Bridge to the reflections.</a:t>
+            </a:r>
+          </a:p>
+          <a:p>
+            <a:r>
+              <a:rPr lang="en-GB" dirty="0"/>
+              <a:t>Say: "When any role drops its contribution, the rest cannot fully converge. Collective Intelligence is the combined signal. Two reflections close this section."</a:t>
+            </a:r>
+          </a:p>
+          <a:p/>
+          <a:p>
+            <a:r>
+              <a:rPr lang="en-GB" dirty="0" b="1"/>
               <a:t>ON THE PORTAL, AFTER THE TEACHING:</a:t>
             </a:r>
           </a:p>
@@ -8161,25 +7392,21 @@
           <a:lstStyle/>
           <a:p>
             <a:r>
-              <a:rPr lang="en-GB" b="1" dirty="0"/>
+              <a:rPr lang="en-GB" dirty="0" b="1"/>
               <a:t>SECTION 4 REFLECTIONS</a:t>
             </a:r>
           </a:p>
-          <a:p>
-            <a:endParaRPr lang="en-GB" dirty="0"/>
-          </a:p>
-          <a:p>
-            <a:r>
-              <a:rPr lang="en-GB" b="1" dirty="0"/>
+          <a:p/>
+          <a:p>
+            <a:r>
+              <a:rPr lang="en-GB" dirty="0" b="1"/>
               <a:t>HOW TO USE THIS SLIDE:</a:t>
             </a:r>
           </a:p>
-          <a:p>
-            <a:endParaRPr lang="en-GB" dirty="0"/>
-          </a:p>
-          <a:p>
-            <a:r>
-              <a:rPr lang="en-GB" b="1" dirty="0"/>
+          <a:p/>
+          <a:p>
+            <a:r>
+              <a:rPr lang="en-GB" dirty="0" b="1"/>
               <a:t>1. Show the slide and read the prompts aloud.</a:t>
             </a:r>
           </a:p>
@@ -8189,21 +7416,17 @@
               <a:t>4.1 Reflection — One voice: "Choose one group in your organisation. List every change the leadership team is asking of it this quarter. How many are there? Which of the four commitments is weakest in your team today?"</a:t>
             </a:r>
           </a:p>
-          <a:p>
-            <a:endParaRPr lang="en-GB" dirty="0"/>
-          </a:p>
+          <a:p/>
           <a:p>
             <a:r>
               <a:rPr lang="en-GB" dirty="0"/>
               <a:t>4.2 Reflection: "What is the most important alignment conversation you need to have next with a closely adjacent role? What would that conversation need to address?"</a:t>
             </a:r>
           </a:p>
-          <a:p>
-            <a:endParaRPr lang="en-GB" dirty="0"/>
-          </a:p>
-          <a:p>
-            <a:r>
-              <a:rPr lang="en-GB" b="1" dirty="0"/>
+          <a:p/>
+          <a:p>
+            <a:r>
+              <a:rPr lang="en-GB" dirty="0" b="1"/>
               <a:t>2. Say what the reflections are for.</a:t>
             </a:r>
           </a:p>
@@ -8219,21 +7442,17 @@
               <a:t>The reflections build the learning portfolio they receive at the end of the programme.</a:t>
             </a:r>
           </a:p>
-          <a:p>
-            <a:endParaRPr lang="en-GB" dirty="0"/>
-          </a:p>
+          <a:p/>
           <a:p>
             <a:r>
               <a:rPr lang="en-GB" dirty="0"/>
               <a:t>Say: "You write these reflections on the portal after the teaching, with as much depth as you can."</a:t>
             </a:r>
           </a:p>
-          <a:p>
-            <a:endParaRPr lang="en-GB" dirty="0"/>
-          </a:p>
-          <a:p>
-            <a:r>
-              <a:rPr lang="en-GB" b="1" dirty="0"/>
+          <a:p/>
+          <a:p>
+            <a:r>
+              <a:rPr lang="en-GB" dirty="0" b="1"/>
               <a:t>3. Set the standard.</a:t>
             </a:r>
           </a:p>
@@ -8249,27 +7468,23 @@
               <a:t>Watch for: a conversation with no named role. Ask: "Which role, and by when?"</a:t>
             </a:r>
           </a:p>
-          <a:p>
-            <a:endParaRPr lang="en-GB" dirty="0"/>
-          </a:p>
-          <a:p>
-            <a:r>
-              <a:rPr lang="en-GB" b="1" dirty="0"/>
-              <a:t>4. Bridge to Section 5.</a:t>
-            </a:r>
-          </a:p>
-          <a:p>
-            <a:r>
-              <a:rPr lang="en-GB" dirty="0"/>
-              <a:t>Say: "We have the checks, the commitments and the hot zones. Section 5 applies two of the tools to the strategy in your Capstone S2R Blueprint."</a:t>
-            </a:r>
-          </a:p>
-          <a:p>
-            <a:endParaRPr lang="en-GB" dirty="0"/>
-          </a:p>
-          <a:p>
-            <a:r>
-              <a:rPr lang="en-GB" b="1" dirty="0"/>
+          <a:p/>
+          <a:p>
+            <a:r>
+              <a:rPr lang="en-GB" dirty="0" b="1"/>
+              <a:t>4. Close Section 4 and bridge to Section 5.</a:t>
+            </a:r>
+          </a:p>
+          <a:p>
+            <a:r>
+              <a:rPr lang="en-GB" dirty="0"/>
+              <a:t>Say: "A leadership team aligns people when its members interpret the strategy together and speak about the change with one voice. In Section 5 each group states the change its strategy requires and the leadership behaviours that will hold it in place."</a:t>
+            </a:r>
+          </a:p>
+          <a:p/>
+          <a:p>
+            <a:r>
+              <a:rPr lang="en-GB" dirty="0" b="1"/>
               <a:t>ON THE PORTAL, AFTER THE TEACHING:</a:t>
             </a:r>
           </a:p>
@@ -8346,148 +7561,134 @@
           <a:lstStyle/>
           <a:p>
             <a:r>
-              <a:rPr lang="en-GB"/>
+              <a:rPr lang="en-GB" dirty="0"/>
               <a:t>SECTION 5 · APPLICATION — IN PRACTICE</a:t>
             </a:r>
           </a:p>
-          <a:p>
-            <a:endParaRPr lang="en-GB"/>
-          </a:p>
-          <a:p>
-            <a:r>
-              <a:rPr lang="en-GB"/>
+          <a:p/>
+          <a:p>
+            <a:r>
+              <a:rPr lang="en-GB" dirty="0"/>
               <a:t>HOW THIS SECTION RUNS:</a:t>
             </a:r>
           </a:p>
           <a:p>
             <a:r>
-              <a:rPr lang="en-GB"/>
-              <a:t>Step 1 · The 3S Check. Your group states three things for the strategy in your Capstone S2R Blueprint: the Shift (what is changing), the Stake (what the organisation gains if it changes, and what it loses if it stays as it is) and the Step (what must be done differently). The guide from part 1.3.1 sits beside each box.</a:t>
-            </a:r>
-          </a:p>
-          <a:p>
-            <a:endParaRPr lang="en-GB"/>
-          </a:p>
-          <a:p>
-            <a:r>
-              <a:rPr lang="en-GB"/>
+              <a:rPr lang="en-GB" dirty="0"/>
+              <a:t>Step 1 · The 3S Check. Your group states three things for the strategy in your Capstone S2R® Blueprint: the Shift (what is changing), the Stake (what the organisation gains if it changes, and what it loses if it stays as it is) and the Step (what must be done differently). The guide from part 1.3.1 sits beside each box.</a:t>
+            </a:r>
+          </a:p>
+          <a:p/>
+          <a:p>
+            <a:r>
+              <a:rPr lang="en-GB" dirty="0"/>
               <a:t>Step 2 · ACE-IT. Your group reads its team OCEAVL profile and names the two dimensions on which the team carries the highest risk for the strategy, with the response to each. It then states the behaviour it expects from the leadership team under each of the five ACE-IT behaviours: Accountability, Commitment, Engagement, Integrity and Transparency. The guide from part 1.3.4 sits beside each box.</a:t>
             </a:r>
           </a:p>
           <a:p>
             <a:r>
-              <a:rPr lang="en-GB"/>
-              <a:t>You then select Agree. This is Capstone work, and when every member has agreed, your record feeds your team’s Capstone S2R Blueprint.</a:t>
-            </a:r>
-          </a:p>
-          <a:p>
-            <a:endParaRPr lang="en-GB"/>
-          </a:p>
-          <a:p>
-            <a:r>
-              <a:rPr lang="en-GB"/>
+              <a:rPr lang="en-GB" dirty="0"/>
+              <a:t>You then select Agree. This is Capstone work, and when every member has agreed, your record feeds your team’s Capstone S2R® Blueprint.</a:t>
+            </a:r>
+          </a:p>
+          <a:p/>
+          <a:p>
+            <a:r>
+              <a:rPr lang="en-GB" dirty="0"/>
               <a:t>SECTION LEARNING OUTCOMES:</a:t>
             </a:r>
           </a:p>
           <a:p>
             <a:r>
-              <a:rPr lang="en-GB"/>
+              <a:rPr lang="en-GB" dirty="0"/>
               <a:t>1. Develop an approach to landing the strategy that builds understanding, readiness and adoption.</a:t>
             </a:r>
           </a:p>
           <a:p>
             <a:r>
-              <a:rPr lang="en-GB"/>
+              <a:rPr lang="en-GB" dirty="0"/>
               <a:t>2. Model and reinforce leadership behaviours that strengthen collective strategic alignment.</a:t>
             </a:r>
           </a:p>
-          <a:p>
-            <a:endParaRPr lang="en-GB"/>
-          </a:p>
-          <a:p>
-            <a:r>
-              <a:rPr lang="en-GB"/>
+          <a:p/>
+          <a:p>
+            <a:r>
+              <a:rPr lang="en-GB" dirty="0"/>
               <a:t>HOW TO OPEN THE SECTION:</a:t>
             </a:r>
           </a:p>
-          <a:p>
-            <a:endParaRPr lang="en-GB"/>
-          </a:p>
-          <a:p>
-            <a:r>
-              <a:rPr lang="en-GB"/>
+          <a:p/>
+          <a:p>
+            <a:r>
+              <a:rPr lang="en-GB" dirty="0"/>
               <a:t>1. Say what the section does.</a:t>
             </a:r>
           </a:p>
           <a:p>
             <a:r>
-              <a:rPr lang="en-GB"/>
+              <a:rPr lang="en-GB" dirty="0"/>
               <a:t>Say: "In this section your group builds the case for the change your strategy asks of people.</a:t>
             </a:r>
           </a:p>
           <a:p>
             <a:r>
-              <a:rPr lang="en-GB"/>
+              <a:rPr lang="en-GB" dirty="0"/>
               <a:t>With the 3S Check you state the change.</a:t>
             </a:r>
           </a:p>
           <a:p>
             <a:r>
-              <a:rPr lang="en-GB"/>
+              <a:rPr lang="en-GB" dirty="0"/>
               <a:t>With ACE-IT you state the leadership behaviours that will hold it in place."</a:t>
             </a:r>
           </a:p>
-          <a:p>
-            <a:endParaRPr lang="en-GB"/>
-          </a:p>
-          <a:p>
-            <a:r>
-              <a:rPr lang="en-GB"/>
+          <a:p/>
+          <a:p>
+            <a:r>
+              <a:rPr lang="en-GB" dirty="0"/>
               <a:t>2. Say how the group works.</a:t>
             </a:r>
           </a:p>
           <a:p>
             <a:r>
-              <a:rPr lang="en-GB"/>
+              <a:rPr lang="en-GB" dirty="0"/>
               <a:t>Say: "Both steps are group work.</a:t>
             </a:r>
           </a:p>
           <a:p>
             <a:r>
-              <a:rPr lang="en-GB"/>
+              <a:rPr lang="en-GB" dirty="0"/>
               <a:t>Your group agrees each entry.</a:t>
             </a:r>
           </a:p>
           <a:p>
             <a:r>
-              <a:rPr lang="en-GB"/>
+              <a:rPr lang="en-GB" dirty="0"/>
               <a:t>Your group chooses its scribe for this work.</a:t>
             </a:r>
           </a:p>
           <a:p>
             <a:r>
-              <a:rPr lang="en-GB"/>
+              <a:rPr lang="en-GB" dirty="0"/>
               <a:t>The entries appear on every member’s page, and each member then selects Agree."</a:t>
             </a:r>
           </a:p>
-          <a:p>
-            <a:endParaRPr lang="en-GB"/>
-          </a:p>
-          <a:p>
-            <a:r>
-              <a:rPr lang="en-GB"/>
+          <a:p/>
+          <a:p>
+            <a:r>
+              <a:rPr lang="en-GB" dirty="0"/>
               <a:t>3. Say where the work goes.</a:t>
             </a:r>
           </a:p>
           <a:p>
             <a:r>
-              <a:rPr lang="en-GB"/>
-              <a:t>Say: "This is Capstone work. Your group’s confirmed record feeds your team’s Capstone S2R Blueprint."</a:t>
-            </a:r>
-          </a:p>
-          <a:p>
-            <a:r>
-              <a:rPr lang="en-GB"/>
+              <a:rPr lang="en-GB" dirty="0"/>
+              <a:t>Say: "This is Capstone work. Your group’s confirmed record feeds your team’s Capstone S2R® Blueprint."</a:t>
+            </a:r>
+          </a:p>
+          <a:p>
+            <a:r>
+              <a:rPr lang="en-GB" dirty="0"/>
               <a:t>Step 2 needs the team’s OCEAVL profile. Every member completes and submits the assessment in 3.1 first.</a:t>
             </a:r>
           </a:p>
@@ -8634,51 +7835,20 @@
           <a:lstStyle/>
           <a:p>
             <a:r>
-              <a:rPr lang="en-GB" b="1" dirty="0"/>
+              <a:rPr lang="en-GB" dirty="0" b="1"/>
               <a:t>SECTION 5 · STEP 1 — THE 3S CHECK (CAPSTONE WORK)</a:t>
             </a:r>
           </a:p>
-          <a:p>
-            <a:endParaRPr lang="en-GB" dirty="0"/>
-          </a:p>
-          <a:p>
-            <a:r>
-              <a:rPr lang="en-GB" b="1" dirty="0"/>
+          <a:p/>
+          <a:p>
+            <a:r>
+              <a:rPr lang="en-GB" dirty="0" b="1"/>
               <a:t>HOW TO TEACH IT:</a:t>
             </a:r>
           </a:p>
           <a:p>
             <a:r>
-              <a:rPr lang="en-ZA" sz="1200" b="0" i="0" kern="1200" dirty="0">
-                <a:solidFill>
-                  <a:schemeClr val="tx1"/>
-                </a:solidFill>
-                <a:effectLst/>
-                <a:latin typeface="+mn-lt"/>
-                <a:ea typeface="+mn-ea"/>
-                <a:cs typeface="+mn-cs"/>
-              </a:rPr>
-              <a:t>This is group work. Your group builds the case for the change your strategy asks of people, in two steps:</a:t>
-            </a:r>
-          </a:p>
-          <a:p>
-            <a:pPr lvl="0"/>
-            <a:endParaRPr lang="en-ZA" sz="1200" b="1" i="0" kern="1200" dirty="0">
-              <a:solidFill>
-                <a:schemeClr val="tx1"/>
-              </a:solidFill>
-              <a:effectLst/>
-              <a:latin typeface="+mn-lt"/>
-              <a:ea typeface="+mn-ea"/>
-              <a:cs typeface="+mn-cs"/>
-            </a:endParaRPr>
-          </a:p>
-          <a:p>
-            <a:endParaRPr lang="en-GB" dirty="0"/>
-          </a:p>
-          <a:p>
-            <a:r>
-              <a:rPr lang="en-GB" b="1" dirty="0"/>
+              <a:rPr lang="en-GB" dirty="0" b="1"/>
               <a:t>1. Brief the step.</a:t>
             </a:r>
           </a:p>
@@ -8700,12 +7870,10 @@
               <a:t>Your group states one Shift, one Stake and one Step for the strategy."</a:t>
             </a:r>
           </a:p>
-          <a:p>
-            <a:endParaRPr lang="en-GB" dirty="0"/>
-          </a:p>
-          <a:p>
-            <a:r>
-              <a:rPr lang="en-GB" b="1" dirty="0"/>
+          <a:p/>
+          <a:p>
+            <a:r>
+              <a:rPr lang="en-GB" dirty="0" b="1"/>
               <a:t>2. Teach each of the three with its guide.</a:t>
             </a:r>
           </a:p>
@@ -8763,9 +7931,7 @@
               <a:t>The group answers: What is changing?</a:t>
             </a:r>
           </a:p>
-          <a:p>
-            <a:endParaRPr lang="en-GB" dirty="0"/>
-          </a:p>
+          <a:p/>
           <a:p>
             <a:r>
               <a:rPr lang="en-GB" dirty="0"/>
@@ -8802,9 +7968,7 @@
               <a:t>The group answers: What will the organisation gain if it changes, and what will it lose if it stays as it is?</a:t>
             </a:r>
           </a:p>
-          <a:p>
-            <a:endParaRPr lang="en-GB" dirty="0"/>
-          </a:p>
+          <a:p/>
           <a:p>
             <a:r>
               <a:rPr lang="en-GB" dirty="0"/>
@@ -8841,15 +8005,24 @@
               <a:t>The group answers: What must be done differently?</a:t>
             </a:r>
           </a:p>
-          <a:p>
-            <a:endParaRPr lang="en-GB" dirty="0"/>
-          </a:p>
-          <a:p>
-            <a:endParaRPr lang="en-GB" dirty="0"/>
-          </a:p>
-          <a:p>
-            <a:r>
-              <a:rPr lang="en-GB" b="1" dirty="0"/>
+          <a:p/>
+          <a:p>
+            <a:r>
+              <a:rPr lang="en-GB" dirty="0" b="1"/>
+              <a:t>3. Bridge to Step 2.</a:t>
+            </a:r>
+          </a:p>
+          <a:p>
+            <a:r>
+              <a:rPr lang="en-GB" dirty="0"/>
+              <a:t>Say: "With the change stated, Step 2 names the leadership behaviours that will hold it in place."</a:t>
+            </a:r>
+          </a:p>
+          <a:p/>
+          <a:p/>
+          <a:p>
+            <a:r>
+              <a:rPr lang="en-GB" dirty="0" b="1"/>
               <a:t>ON THE PORTAL, AFTER THE TEACHING:</a:t>
             </a:r>
           </a:p>
@@ -8875,6 +8048,31 @@
             <a:r>
               <a:rPr lang="en-GB" dirty="0"/>
               <a:t>3. The group agrees its Shift, Stake and Step for the strategy, and each participant writes them in the three boxes.</a:t>
+            </a:r>
+          </a:p>
+          <a:p/>
+          <a:p>
+            <a:r>
+              <a:rPr lang="en-GB" dirty="0" b="1"/>
+              <a:t>LATER, WHEN THE GROUPS DO THE WORK ON THE PORTAL:</a:t>
+            </a:r>
+          </a:p>
+          <a:p>
+            <a:r>
+              <a:rPr lang="en-GB" dirty="0"/>
+              <a:t>The group chooses its scribe for this work. The scribe types what the group agrees, and the entries appear on every member’s page.</a:t>
+            </a:r>
+          </a:p>
+          <a:p>
+            <a:r>
+              <a:rPr lang="en-GB" dirty="0"/>
+              <a:t>Guide each group to test each statement against its guide. A statement that could be said of any organisation has not yet been written for this strategy.</a:t>
+            </a:r>
+          </a:p>
+          <a:p>
+            <a:r>
+              <a:rPr lang="en-GB" dirty="0"/>
+              <a:t>The Shift: the group states what stops, what starts, for whom and from when. The Stake: the group states the gain and what the organisation loses if it stays as it is. The Step: each member states their own part in the first person.</a:t>
             </a:r>
           </a:p>
         </p:txBody>
@@ -9020,356 +8218,360 @@
           <a:lstStyle/>
           <a:p>
             <a:r>
-              <a:rPr lang="en-GB"/>
+              <a:rPr lang="en-GB" dirty="0"/>
               <a:t>SECTION 5 · STEP 2 — ACE-IT (CAPSTONE WORK)</a:t>
             </a:r>
           </a:p>
-          <a:p>
-            <a:endParaRPr lang="en-GB"/>
-          </a:p>
-          <a:p>
-            <a:r>
-              <a:rPr lang="en-GB"/>
+          <a:p/>
+          <a:p>
+            <a:r>
+              <a:rPr lang="en-GB" dirty="0"/>
               <a:t>HOW TO TEACH IT:</a:t>
             </a:r>
           </a:p>
-          <a:p>
-            <a:endParaRPr lang="en-GB"/>
-          </a:p>
-          <a:p>
-            <a:r>
-              <a:rPr lang="en-GB"/>
+          <a:p/>
+          <a:p>
+            <a:r>
+              <a:rPr lang="en-GB" dirty="0"/>
               <a:t>1. Open with the team’s OCEAVL profile.</a:t>
             </a:r>
           </a:p>
           <a:p>
             <a:r>
-              <a:rPr lang="en-GB"/>
+              <a:rPr lang="en-GB" dirty="0"/>
               <a:t>Say: "Your page shows your team’s OCEAVL profile: the team’s level on each dimension, with its risk and its response.</a:t>
             </a:r>
           </a:p>
           <a:p>
             <a:r>
-              <a:rPr lang="en-GB"/>
+              <a:rPr lang="en-GB" dirty="0"/>
               <a:t>It appears once every member of your team has submitted their scores in part 3.1."</a:t>
             </a:r>
           </a:p>
           <a:p>
             <a:r>
-              <a:rPr lang="en-GB"/>
+              <a:rPr lang="en-GB" dirty="0"/>
               <a:t>Where a member has not yet submitted, the profile shows how many have. The group completes 3.1 first.</a:t>
             </a:r>
           </a:p>
-          <a:p>
-            <a:endParaRPr lang="en-GB"/>
-          </a:p>
-          <a:p>
-            <a:r>
-              <a:rPr lang="en-GB"/>
+          <a:p/>
+          <a:p>
+            <a:r>
+              <a:rPr lang="en-GB" dirty="0"/>
               <a:t>Deepen, say: "The same input lands differently depending on the ground it falls on.</a:t>
             </a:r>
           </a:p>
           <a:p>
             <a:r>
-              <a:rPr lang="en-GB"/>
+              <a:rPr lang="en-GB" dirty="0"/>
               <a:t>When a change initiative fails to take, the reflex is to blame the message.</a:t>
             </a:r>
           </a:p>
           <a:p>
             <a:r>
-              <a:rPr lang="en-GB"/>
+              <a:rPr lang="en-GB" dirty="0"/>
               <a:t>First diagnose the conditions stopping good input from rooting."</a:t>
             </a:r>
           </a:p>
           <a:p>
             <a:r>
-              <a:rPr lang="en-GB"/>
+              <a:rPr lang="en-GB" dirty="0"/>
               <a:t>(Insight: Diagnose the soil. Source: Journal, 21 May 2026 — Professional Insights: Culture)</a:t>
             </a:r>
           </a:p>
-          <a:p>
-            <a:endParaRPr lang="en-GB"/>
-          </a:p>
-          <a:p>
-            <a:r>
-              <a:rPr lang="en-GB"/>
+          <a:p/>
+          <a:p>
+            <a:r>
+              <a:rPr lang="en-GB" dirty="0"/>
               <a:t>2. Name the two highest-risk dimensions.</a:t>
             </a:r>
           </a:p>
           <a:p>
             <a:r>
-              <a:rPr lang="en-GB"/>
+              <a:rPr lang="en-GB" dirty="0"/>
               <a:t>Say: "From your team’s profile, your group names the two dimensions on which your executive team carries the highest risk for the strategy, and the response your team adopts for each.</a:t>
             </a:r>
           </a:p>
           <a:p>
             <a:r>
-              <a:rPr lang="en-GB"/>
+              <a:rPr lang="en-GB" dirty="0"/>
               <a:t>The profile gives the risk and the response at your team’s level."</a:t>
             </a:r>
           </a:p>
           <a:p>
             <a:r>
-              <a:rPr lang="en-GB"/>
+              <a:rPr lang="en-GB" dirty="0"/>
               <a:t>Ask: "Which level in your team’s profile carries the highest risk for this change? Which ACE-IT behaviour answers it?"</a:t>
             </a:r>
           </a:p>
-          <a:p>
-            <a:endParaRPr lang="en-GB"/>
-          </a:p>
-          <a:p>
-            <a:r>
-              <a:rPr lang="en-GB"/>
+          <a:p/>
+          <a:p>
+            <a:r>
+              <a:rPr lang="en-GB" dirty="0"/>
               <a:t>3. Teach each of the five behaviours with its guide.</a:t>
             </a:r>
           </a:p>
           <a:p>
             <a:r>
-              <a:rPr lang="en-GB"/>
+              <a:rPr lang="en-GB" dirty="0"/>
               <a:t>The guide beside each box is the lesson of 1.3.4.</a:t>
             </a:r>
           </a:p>
           <a:p>
             <a:r>
-              <a:rPr lang="en-GB"/>
+              <a:rPr lang="en-GB" dirty="0"/>
               <a:t>Accountability</a:t>
             </a:r>
           </a:p>
           <a:p>
             <a:r>
-              <a:rPr lang="en-GB"/>
+              <a:rPr lang="en-GB" dirty="0"/>
               <a:t>Definition: Taking full ownership for results. Acknowledging missteps and driving corrective action.</a:t>
             </a:r>
           </a:p>
           <a:p>
             <a:r>
-              <a:rPr lang="en-GB"/>
+              <a:rPr lang="en-GB" dirty="0"/>
               <a:t>What it does for a new practice: One named person owns the practice and its result.</a:t>
             </a:r>
           </a:p>
           <a:p>
             <a:r>
-              <a:rPr lang="en-GB"/>
+              <a:rPr lang="en-GB" dirty="0"/>
               <a:t>Observable: Commitments tracked • Reviews end with named owners • “We missed it, here’s the fix” language common</a:t>
             </a:r>
           </a:p>
-          <a:p>
-            <a:endParaRPr lang="en-GB"/>
-          </a:p>
-          <a:p>
-            <a:r>
-              <a:rPr lang="en-GB"/>
+          <a:p/>
+          <a:p>
+            <a:r>
+              <a:rPr lang="en-GB" dirty="0"/>
               <a:t>Commitment</a:t>
             </a:r>
           </a:p>
           <a:p>
             <a:r>
-              <a:rPr lang="en-GB"/>
+              <a:rPr lang="en-GB" dirty="0"/>
               <a:t>Definition: Staying anchored to agreed strategic intent even when pressure rises. Following through despite discomfort.</a:t>
             </a:r>
           </a:p>
           <a:p>
             <a:r>
-              <a:rPr lang="en-GB"/>
+              <a:rPr lang="en-GB" dirty="0"/>
               <a:t>What it does for a new practice: The practice is kept when pressure rises and the old way is quicker.</a:t>
             </a:r>
           </a:p>
           <a:p>
             <a:r>
-              <a:rPr lang="en-GB"/>
+              <a:rPr lang="en-GB" dirty="0"/>
               <a:t>Observable: Strategic priorities stay consistent • Leaders decline non-strategic work • Promises kept visibly</a:t>
             </a:r>
           </a:p>
-          <a:p>
-            <a:endParaRPr lang="en-GB"/>
-          </a:p>
-          <a:p>
-            <a:r>
-              <a:rPr lang="en-GB"/>
+          <a:p/>
+          <a:p>
+            <a:r>
+              <a:rPr lang="en-GB" dirty="0"/>
               <a:t>Engagement</a:t>
             </a:r>
           </a:p>
           <a:p>
             <a:r>
-              <a:rPr lang="en-GB"/>
+              <a:rPr lang="en-GB" dirty="0"/>
               <a:t>Definition: Actively involving self and others in sense-making, dialogue, and execution. Listening to understand.</a:t>
             </a:r>
           </a:p>
           <a:p>
             <a:r>
-              <a:rPr lang="en-GB"/>
+              <a:rPr lang="en-GB" dirty="0"/>
               <a:t>What it does for a new practice: People talk about how it is going and improve it together.</a:t>
             </a:r>
           </a:p>
           <a:p>
             <a:r>
-              <a:rPr lang="en-GB"/>
+              <a:rPr lang="en-GB" dirty="0"/>
               <a:t>Observable: Team meetings are two-way • Feedback loops visible • People quote the shared “why”</a:t>
             </a:r>
           </a:p>
-          <a:p>
-            <a:endParaRPr lang="en-GB"/>
-          </a:p>
-          <a:p>
-            <a:r>
-              <a:rPr lang="en-GB"/>
+          <a:p/>
+          <a:p>
+            <a:r>
+              <a:rPr lang="en-GB" dirty="0"/>
               <a:t>Integrity</a:t>
             </a:r>
           </a:p>
           <a:p>
             <a:r>
-              <a:rPr lang="en-GB"/>
+              <a:rPr lang="en-GB" dirty="0"/>
               <a:t>Definition: Acting consistently with values, facts, and truth — even when inconvenient. Declaring conflicts of interest early.</a:t>
             </a:r>
           </a:p>
           <a:p>
             <a:r>
-              <a:rPr lang="en-GB"/>
+              <a:rPr lang="en-GB" dirty="0"/>
               <a:t>What it does for a new practice: Slips are reported as they are, and early.</a:t>
             </a:r>
           </a:p>
           <a:p>
             <a:r>
-              <a:rPr lang="en-GB"/>
+              <a:rPr lang="en-GB" dirty="0"/>
               <a:t>Observable: Evidence cited before decisions • Values referenced in hard choices • Teams trust word matches deed</a:t>
             </a:r>
           </a:p>
-          <a:p>
-            <a:endParaRPr lang="en-GB"/>
-          </a:p>
-          <a:p>
-            <a:r>
-              <a:rPr lang="en-GB"/>
+          <a:p/>
+          <a:p>
+            <a:r>
+              <a:rPr lang="en-GB" dirty="0"/>
               <a:t>Transparency</a:t>
             </a:r>
           </a:p>
           <a:p>
             <a:r>
-              <a:rPr lang="en-GB"/>
+              <a:rPr lang="en-GB" dirty="0"/>
               <a:t>Definition: Making reasoning, progress, and constraints visible to all stakeholders. Sharing challenges openly.</a:t>
             </a:r>
           </a:p>
           <a:p>
             <a:r>
-              <a:rPr lang="en-GB"/>
+              <a:rPr lang="en-GB" dirty="0"/>
               <a:t>What it does for a new practice: Its results are visible to everyone the change affects.</a:t>
             </a:r>
           </a:p>
           <a:p>
             <a:r>
-              <a:rPr lang="en-GB"/>
+              <a:rPr lang="en-GB" dirty="0"/>
               <a:t>Observable: Dashboards updated regularly • Decisions logged and accessible • “No surprises” culture evident</a:t>
             </a:r>
           </a:p>
-          <a:p>
-            <a:endParaRPr lang="en-GB"/>
-          </a:p>
-          <a:p>
-            <a:r>
-              <a:rPr lang="en-GB"/>
+          <a:p/>
+          <a:p>
+            <a:r>
+              <a:rPr lang="en-GB" dirty="0"/>
               <a:t>For each behaviour the group writes: the behaviour we expect from our leadership team.</a:t>
             </a:r>
           </a:p>
-          <a:p>
-            <a:endParaRPr lang="en-GB"/>
-          </a:p>
-          <a:p>
-            <a:r>
-              <a:rPr lang="en-GB"/>
+          <a:p/>
+          <a:p>
+            <a:r>
+              <a:rPr lang="en-GB" dirty="0"/>
               <a:t>4. Give the example.</a:t>
             </a:r>
           </a:p>
-          <a:p>
-            <a:endParaRPr lang="en-GB"/>
-          </a:p>
-          <a:p>
-            <a:r>
-              <a:rPr lang="en-GB"/>
+          <a:p/>
+          <a:p>
+            <a:r>
+              <a:rPr lang="en-GB" dirty="0"/>
               <a:t>EXAMPLE</a:t>
             </a:r>
           </a:p>
           <a:p>
             <a:r>
-              <a:rPr lang="en-GB"/>
+              <a:rPr lang="en-GB" dirty="0"/>
               <a:t>The team’s level on Agreeableness is High.</a:t>
             </a:r>
           </a:p>
           <a:p>
             <a:r>
-              <a:rPr lang="en-GB"/>
+              <a:rPr lang="en-GB" dirty="0"/>
               <a:t>Risk: Agreement given without genuine commitment; team over-commits; resentment builds beneath surface harmony.</a:t>
             </a:r>
           </a:p>
           <a:p>
             <a:r>
-              <a:rPr lang="en-GB"/>
+              <a:rPr lang="en-GB" dirty="0"/>
               <a:t>Expected behaviour under Commitment: “Each of us states our capacity before we accept new work for this change.”</a:t>
             </a:r>
           </a:p>
-          <a:p>
-            <a:endParaRPr lang="en-GB"/>
-          </a:p>
-          <a:p>
-            <a:r>
-              <a:rPr lang="en-GB"/>
+          <a:p/>
+          <a:p>
+            <a:r>
+              <a:rPr lang="en-GB" dirty="0" b="1"/>
+              <a:t>5. Bridge to the Unit Summary.</a:t>
+            </a:r>
+          </a:p>
+          <a:p>
+            <a:r>
+              <a:rPr lang="en-GB" dirty="0"/>
+              <a:t>Say: "With the change and the behaviours stated, we close the unit."</a:t>
+            </a:r>
+          </a:p>
+          <a:p/>
+          <a:p>
+            <a:r>
+              <a:rPr lang="en-GB" dirty="0" b="1"/>
+              <a:t>LATER, WHEN THE GROUPS DO THE WORK ON THE PORTAL:</a:t>
+            </a:r>
+          </a:p>
+          <a:p>
+            <a:r>
+              <a:rPr lang="en-GB" dirty="0"/>
+              <a:t>The group opens with its team OCEAVL profile. Where a member has not yet submitted, the profile shows how many have; that member completes 3.1 first.</a:t>
+            </a:r>
+          </a:p>
+          <a:p>
+            <a:r>
+              <a:rPr lang="en-GB" dirty="0"/>
+              <a:t>Each behaviour: the group writes what a colleague would see the leadership team do. A value such as “we will be accountable” becomes a behaviour once it is stated that way.</a:t>
+            </a:r>
+          </a:p>
+          <a:p>
+            <a:r>
+              <a:rPr lang="en-GB" dirty="0"/>
+              <a:t>Whose behaviour: the five boxes hold the leadership team’s own behaviour.</a:t>
+            </a:r>
+          </a:p>
+          <a:p/>
+          <a:p>
+            <a:r>
+              <a:rPr lang="en-GB" dirty="0"/>
               <a:t>ON THE PORTAL, AFTER THE TEACHING:</a:t>
             </a:r>
           </a:p>
           <a:p>
             <a:r>
-              <a:rPr lang="en-GB"/>
+              <a:rPr lang="en-GB" dirty="0"/>
               <a:t>Participants work as a group in Step 2 of Section 5 of the participant file. This is Capstone work.</a:t>
             </a:r>
           </a:p>
           <a:p>
             <a:r>
-              <a:rPr lang="en-GB"/>
+              <a:rPr lang="en-GB" dirty="0"/>
               <a:t>1. The group reads its team OCEAVL profile, shown on each page once every member of the team has submitted their scores in part 3.1.</a:t>
             </a:r>
           </a:p>
           <a:p>
             <a:r>
-              <a:rPr lang="en-GB"/>
+              <a:rPr lang="en-GB" dirty="0"/>
               <a:t>2. The group names the two dimensions on which its executive team carries the highest risk for the strategy, and the response it adopts for each.</a:t>
             </a:r>
           </a:p>
           <a:p>
             <a:r>
-              <a:rPr lang="en-GB"/>
+              <a:rPr lang="en-GB" dirty="0"/>
               <a:t>3. The group reads the guide in each card. It is the lesson from part 1.3.4.</a:t>
             </a:r>
           </a:p>
           <a:p>
             <a:r>
-              <a:rPr lang="en-GB"/>
+              <a:rPr lang="en-GB" dirty="0"/>
               <a:t>4. For each behaviour, the group agrees what it expects to see the leadership team do so that the change in Step 1 holds. Where the team’s level carries a risk for this change, the group states the behaviour that answers it.</a:t>
             </a:r>
           </a:p>
           <a:p>
             <a:r>
-              <a:rPr lang="en-GB"/>
+              <a:rPr lang="en-GB" dirty="0"/>
               <a:t>5. Each participant reads the record and selects Agree. Print gives a copy of the record.</a:t>
             </a:r>
           </a:p>
-          <a:p>
-            <a:endParaRPr lang="en-GB"/>
-          </a:p>
-          <a:p>
-            <a:r>
-              <a:rPr lang="en-GB"/>
-              <a:t>AFTER THE SESSION:</a:t>
-            </a:r>
-          </a:p>
-          <a:p>
-            <a:r>
-              <a:rPr lang="en-GB"/>
-              <a:t>The record reaches you with each participant’s submission, under the heading Leading with Clarity.</a:t>
-            </a:r>
-          </a:p>
-          <a:p>
-            <a:r>
-              <a:rPr lang="en-GB"/>
-              <a:t>The agreed record feeds boxes 5A to 5C of the team’s Capstone S2R Blueprint: the two highest-risk dimensions in 5A, the Shift, Stake and Step in 5B, the expected leadership behaviours in 5C.</a:t>
+          <a:p/>
+          <a:p>
+            <a:r>
+              <a:rPr lang="en-GB" dirty="0" b="1"/>
+              <a:t>WHERE THE RECORD GOES:</a:t>
+            </a:r>
+          </a:p>
+          <a:p>
+            <a:r>
+              <a:rPr lang="en-GB" dirty="0"/>
+              <a:t>The agreed record feeds boxes 5A to 5C of the team’s Capstone S2R® Blueprint: the two highest-risk dimensions in 5A, the Shift, Stake and Step in 5B, the expected leadership behaviours in 5C.</a:t>
             </a:r>
           </a:p>
         </p:txBody>
@@ -9515,173 +8717,154 @@
           <a:lstStyle/>
           <a:p>
             <a:r>
-              <a:rPr lang="en-GB"/>
+              <a:rPr lang="en-GB" dirty="0"/>
               <a:t>UNIT SUMMARY (UNIT 5 SYNTHESIS)</a:t>
             </a:r>
           </a:p>
-          <a:p>
-            <a:endParaRPr lang="en-GB"/>
-          </a:p>
-          <a:p>
-            <a:r>
-              <a:rPr lang="en-GB"/>
+          <a:p/>
+          <a:p>
+            <a:r>
+              <a:rPr lang="en-GB" dirty="0"/>
               <a:t>HOW TO TEACH IT:</a:t>
             </a:r>
           </a:p>
-          <a:p>
-            <a:endParaRPr lang="en-GB"/>
-          </a:p>
-          <a:p>
-            <a:r>
-              <a:rPr lang="en-GB"/>
+          <a:p/>
+          <a:p>
+            <a:r>
+              <a:rPr lang="en-GB" dirty="0"/>
               <a:t>1. Recap the unit, section by section.</a:t>
             </a:r>
           </a:p>
           <a:p>
             <a:r>
-              <a:rPr lang="en-GB"/>
+              <a:rPr lang="en-GB" dirty="0"/>
               <a:t>Say: "This session was about the human conditions that decide whether a strategy ever moves.</a:t>
             </a:r>
           </a:p>
           <a:p>
             <a:r>
-              <a:rPr lang="en-GB"/>
+              <a:rPr lang="en-GB" dirty="0"/>
               <a:t>Aligning Heart &amp; Mind treated execution as first a human problem: strategy moves through people before it moves through systems."</a:t>
             </a:r>
           </a:p>
           <a:p>
             <a:r>
-              <a:rPr lang="en-GB"/>
+              <a:rPr lang="en-GB" dirty="0"/>
               <a:t>- 1 · Awareness: strategy enters through Cognition (Mind) and Emotion (Heart). Five principles describe how alignment is created and sustained.</a:t>
             </a:r>
           </a:p>
           <a:p>
             <a:r>
-              <a:rPr lang="en-GB"/>
+              <a:rPr lang="en-GB" dirty="0"/>
               <a:t>- 2 · Intelligence: Heart &amp; Mind alignment is the ignition point that converts strategic potential energy into kinetic energy. Compliance yields short-term output. Commitment sustains execution when leaders are not present.</a:t>
             </a:r>
           </a:p>
           <a:p>
             <a:r>
-              <a:rPr lang="en-GB"/>
+              <a:rPr lang="en-GB" dirty="0"/>
               <a:t>- 3 · Extrapolating: each participant completes the OCEAVL Assessment across seven dimensions. The level held by most members is the team’s level, and every level carries a risk, a response and three routines.</a:t>
             </a:r>
           </a:p>
           <a:p>
             <a:r>
-              <a:rPr lang="en-GB"/>
+              <a:rPr lang="en-GB" dirty="0"/>
               <a:t>- 4 · Integration: the leadership team leads change with one voice through four commitments. Each CXO role brings a Converging Zone Contribution and carries an Alignment Hot Zone.</a:t>
             </a:r>
           </a:p>
           <a:p>
             <a:r>
-              <a:rPr lang="en-GB"/>
+              <a:rPr lang="en-GB" dirty="0"/>
               <a:t>- 5 · Application: each group states its Shift, Stake and Step for the strategy, reads its team OCEAVL profile, names its two highest-risk dimensions with the response to each, and states the ACE-IT behaviours it expects from the leadership team.</a:t>
             </a:r>
           </a:p>
           <a:p>
             <a:r>
-              <a:rPr lang="en-GB"/>
+              <a:rPr lang="en-GB" dirty="0"/>
               <a:t>- Across the unit: a change is adopted when it passes the 4 Checks of Mind, Heart, Hands and Habit. The leader’s job is to explain, involve, equip and reinforce until it passes all four.</a:t>
             </a:r>
           </a:p>
-          <a:p>
-            <a:endParaRPr lang="en-GB"/>
-          </a:p>
-          <a:p>
-            <a:r>
-              <a:rPr lang="en-GB"/>
+          <a:p/>
+          <a:p>
+            <a:r>
+              <a:rPr lang="en-GB" dirty="0"/>
               <a:t>2. Ask the closing question on the slide.</a:t>
             </a:r>
           </a:p>
           <a:p>
             <a:r>
-              <a:rPr lang="en-GB"/>
+              <a:rPr lang="en-GB" dirty="0"/>
               <a:t>Ask: "Which ACE-IT behaviour in your record will be hardest for this leadership team to show, and what in the team’s OCEAVL profile makes it so?"</a:t>
             </a:r>
           </a:p>
           <a:p>
             <a:r>
-              <a:rPr lang="en-GB"/>
+              <a:rPr lang="en-GB" dirty="0"/>
               <a:t>Take an answer from each group.</a:t>
             </a:r>
           </a:p>
-          <a:p>
-            <a:endParaRPr lang="en-GB"/>
-          </a:p>
-          <a:p>
-            <a:r>
-              <a:rPr lang="en-GB"/>
+          <a:p/>
+          <a:p>
+            <a:r>
+              <a:rPr lang="en-GB" dirty="0"/>
               <a:t>3. Close the unit.</a:t>
             </a:r>
           </a:p>
           <a:p>
             <a:r>
-              <a:rPr lang="en-GB"/>
+              <a:rPr lang="en-GB" dirty="0"/>
               <a:t>Say: "Aligned hearts and minds turn a strategy from a document the organisation has read into a direction the organisation is willing to move on."</a:t>
             </a:r>
           </a:p>
           <a:p>
             <a:r>
-              <a:rPr lang="en-GB"/>
-              <a:t>Connect the unit to what follows: Performance Management Setup and the translation of strategy into individual accountability across the enterprise.</a:t>
-            </a:r>
-          </a:p>
-          <a:p>
-            <a:endParaRPr lang="en-GB"/>
-          </a:p>
-          <a:p>
-            <a:r>
-              <a:rPr lang="en-GB"/>
-              <a:t>4. Say what happens on the portal.</a:t>
-            </a:r>
-          </a:p>
-          <a:p>
-            <a:r>
-              <a:rPr lang="en-GB"/>
-              <a:t>Say: "You now complete the unit on the portal: your reflections, your OCEAVL Assessment and your group’s record in Section 5.</a:t>
-            </a:r>
-          </a:p>
-          <a:p>
-            <a:r>
-              <a:rPr lang="en-GB"/>
-              <a:t>When your page is complete, you submit the unit."</a:t>
-            </a:r>
-          </a:p>
-          <a:p>
-            <a:endParaRPr lang="en-GB"/>
-          </a:p>
-          <a:p>
-            <a:r>
-              <a:rPr lang="en-GB"/>
+              <a:rPr lang="en-GB" dirty="0"/>
+              <a:t>Say: "Each group has stated the change and the leadership behaviours that will hold it in place."</a:t>
+            </a:r>
+          </a:p>
+          <a:p/>
+          <a:p>
+            <a:r>
+              <a:rPr lang="en-GB" dirty="0" b="1"/>
+              <a:t>4. Bridge to Unit 6.</a:t>
+            </a:r>
+          </a:p>
+          <a:p>
+            <a:r>
+              <a:rPr lang="en-GB" dirty="0"/>
+              <a:t>Say: "Unit 6 builds the system that connects enterprise results to the contributions of people and the conditions the organisation provides."</a:t>
+            </a:r>
+          </a:p>
+          <a:p/>
+          <a:p/>
+          <a:p>
+            <a:r>
+              <a:rPr lang="en-GB" dirty="0"/>
               <a:t>ON THE PORTAL, AFTER THE TEACHING:</a:t>
             </a:r>
           </a:p>
           <a:p>
             <a:r>
-              <a:rPr lang="en-GB"/>
-              <a:t>Participants complete every part of the participant file and submit the unit to the facilitator from the end of Section 5.</a:t>
-            </a:r>
-          </a:p>
-          <a:p>
-            <a:endParaRPr lang="en-GB"/>
-          </a:p>
-          <a:p>
-            <a:r>
-              <a:rPr lang="en-GB"/>
+              <a:rPr lang="en-GB" dirty="0"/>
+              <a:t>Participants complete every part of the participant file: the thirteen reflections, the OCEAVL Assessment and the group’s record in Section 5. When the page is complete, each participant submits the unit to the facilitator from the end of Section 5.</a:t>
+            </a:r>
+          </a:p>
+          <a:p/>
+          <a:p>
+            <a:r>
+              <a:rPr lang="en-GB" dirty="0"/>
               <a:t>AFTER THE SESSION:</a:t>
             </a:r>
           </a:p>
           <a:p>
             <a:r>
-              <a:rPr lang="en-GB"/>
+              <a:rPr lang="en-GB" dirty="0"/>
               <a:t>Each submission reaches you in the facilitator dashboard.</a:t>
             </a:r>
           </a:p>
           <a:p>
             <a:r>
-              <a:rPr lang="en-GB"/>
-              <a:t>Each member’s OCEAVL scores feed the team’s profile in the Capstone S2R Blueprint. The group’s confirmed record feeds boxes 5B and 5C.</a:t>
+              <a:rPr lang="en-GB" dirty="0"/>
+              <a:t>Each member’s OCEAVL scores feed the team’s profile in the Capstone S2R® Blueprint. The group’s agreed record feeds boxes 5A to 5C.</a:t>
             </a:r>
           </a:p>
         </p:txBody>
@@ -13143,8 +12326,8 @@
         </p:nvSpPr>
         <p:spPr>
           <a:xfrm>
-            <a:off x="548640" y="5623560"/>
-            <a:ext cx="11091672" cy="777240"/>
+            <a:off x="548640" y="5486400"/>
+            <a:ext cx="11091672" cy="960120"/>
           </a:xfrm>
           <a:prstGeom prst="roundRect">
             <a:avLst>
@@ -13177,8 +12360,8 @@
         </p:nvSpPr>
         <p:spPr>
           <a:xfrm>
-            <a:off x="822960" y="5623560"/>
-            <a:ext cx="10607040" cy="777240"/>
+            <a:off x="822960" y="5486400"/>
+            <a:ext cx="10607040" cy="960120"/>
           </a:xfrm>
           <a:prstGeom prst="rect">
             <a:avLst/>
@@ -14361,8 +13544,8 @@
         </p:nvSpPr>
         <p:spPr>
           <a:xfrm>
-            <a:off x="548640" y="5623560"/>
-            <a:ext cx="11091672" cy="777240"/>
+            <a:off x="548640" y="5486400"/>
+            <a:ext cx="11091672" cy="960120"/>
           </a:xfrm>
           <a:prstGeom prst="roundRect">
             <a:avLst>
@@ -14395,8 +13578,8 @@
         </p:nvSpPr>
         <p:spPr>
           <a:xfrm>
-            <a:off x="822960" y="5623560"/>
-            <a:ext cx="10607040" cy="777240"/>
+            <a:off x="822960" y="5486400"/>
+            <a:ext cx="10607040" cy="960120"/>
           </a:xfrm>
           <a:prstGeom prst="rect">
             <a:avLst/>
@@ -15238,7 +14421,7 @@
         <p:spPr>
           <a:xfrm>
             <a:off x="777240" y="2560320"/>
-            <a:ext cx="4951476" cy="640080"/>
+            <a:ext cx="4951476" cy="749808"/>
           </a:xfrm>
           <a:prstGeom prst="rect">
             <a:avLst/>
@@ -15406,7 +14589,7 @@
         <p:spPr>
           <a:xfrm>
             <a:off x="6460236" y="2560320"/>
-            <a:ext cx="4951476" cy="640080"/>
+            <a:ext cx="4951476" cy="749808"/>
           </a:xfrm>
           <a:prstGeom prst="rect">
             <a:avLst/>
@@ -15574,7 +14757,7 @@
         <p:spPr>
           <a:xfrm>
             <a:off x="777240" y="4663440"/>
-            <a:ext cx="4951476" cy="640080"/>
+            <a:ext cx="4951476" cy="749808"/>
           </a:xfrm>
           <a:prstGeom prst="rect">
             <a:avLst/>
@@ -15742,7 +14925,7 @@
         <p:spPr>
           <a:xfrm>
             <a:off x="6460236" y="4663440"/>
-            <a:ext cx="4951476" cy="640080"/>
+            <a:ext cx="4951476" cy="749808"/>
           </a:xfrm>
           <a:prstGeom prst="rect">
             <a:avLst/>
@@ -16917,7 +16100,7 @@
         </p:blipFill>
         <p:spPr>
           <a:xfrm>
-            <a:off x="1691640" y="1572768"/>
+            <a:off x="1691640" y="1371600"/>
             <a:ext cx="9921240" cy="1059836"/>
           </a:xfrm>
           <a:prstGeom prst="rect">
@@ -16933,7 +16116,7 @@
         </p:nvSpPr>
         <p:spPr>
           <a:xfrm>
-            <a:off x="548640" y="1668345"/>
+            <a:off x="548640" y="1467178"/>
             <a:ext cx="868680" cy="868680"/>
           </a:xfrm>
           <a:prstGeom prst="ellipse">
@@ -16996,7 +16179,7 @@
         </p:blipFill>
         <p:spPr>
           <a:xfrm>
-            <a:off x="1691640" y="2925211"/>
+            <a:off x="1691640" y="2670048"/>
             <a:ext cx="9921240" cy="1059836"/>
           </a:xfrm>
           <a:prstGeom prst="rect">
@@ -17012,7 +16195,7 @@
         </p:nvSpPr>
         <p:spPr>
           <a:xfrm>
-            <a:off x="548640" y="3020788"/>
+            <a:off x="548640" y="2765626"/>
             <a:ext cx="868680" cy="868680"/>
           </a:xfrm>
           <a:prstGeom prst="ellipse">
@@ -17075,7 +16258,7 @@
         </p:blipFill>
         <p:spPr>
           <a:xfrm>
-            <a:off x="1691640" y="4277654"/>
+            <a:off x="1691640" y="3968496"/>
             <a:ext cx="9921240" cy="1059836"/>
           </a:xfrm>
           <a:prstGeom prst="rect">
@@ -17091,7 +16274,7 @@
         </p:nvSpPr>
         <p:spPr>
           <a:xfrm>
-            <a:off x="548640" y="4373231"/>
+            <a:off x="548640" y="4064074"/>
             <a:ext cx="868680" cy="868680"/>
           </a:xfrm>
           <a:prstGeom prst="ellipse">
@@ -17154,7 +16337,7 @@
         </p:blipFill>
         <p:spPr>
           <a:xfrm>
-            <a:off x="1691640" y="5630097"/>
+            <a:off x="1691640" y="5266944"/>
             <a:ext cx="9921240" cy="1251195"/>
           </a:xfrm>
           <a:prstGeom prst="rect">
@@ -17170,7 +16353,7 @@
         </p:nvSpPr>
         <p:spPr>
           <a:xfrm>
-            <a:off x="548640" y="5821354"/>
+            <a:off x="548640" y="5458201"/>
             <a:ext cx="868680" cy="868680"/>
           </a:xfrm>
           <a:prstGeom prst="ellipse">
@@ -18877,8 +18060,8 @@
         </p:nvSpPr>
         <p:spPr>
           <a:xfrm>
-            <a:off x="548640" y="5623560"/>
-            <a:ext cx="11091672" cy="777240"/>
+            <a:off x="548640" y="5486400"/>
+            <a:ext cx="11091672" cy="960120"/>
           </a:xfrm>
           <a:prstGeom prst="roundRect">
             <a:avLst>
@@ -18911,8 +18094,8 @@
         </p:nvSpPr>
         <p:spPr>
           <a:xfrm>
-            <a:off x="822960" y="5623560"/>
-            <a:ext cx="10607040" cy="777240"/>
+            <a:off x="822960" y="5486400"/>
+            <a:ext cx="10607040" cy="960120"/>
           </a:xfrm>
           <a:prstGeom prst="rect">
             <a:avLst/>
@@ -21807,7 +20990,7 @@
         <p:spPr>
           <a:xfrm>
             <a:off x="1508760" y="1691640"/>
-            <a:ext cx="4219956" cy="594360"/>
+            <a:ext cx="4219956" cy="713232"/>
           </a:xfrm>
           <a:prstGeom prst="rect">
             <a:avLst/>
@@ -21997,7 +21180,7 @@
         <p:spPr>
           <a:xfrm>
             <a:off x="7191756" y="1691640"/>
-            <a:ext cx="4219956" cy="594360"/>
+            <a:ext cx="4219956" cy="713232"/>
           </a:xfrm>
           <a:prstGeom prst="rect">
             <a:avLst/>
@@ -22187,7 +21370,7 @@
         <p:spPr>
           <a:xfrm>
             <a:off x="1508760" y="4251960"/>
-            <a:ext cx="4219956" cy="594360"/>
+            <a:ext cx="4219956" cy="713232"/>
           </a:xfrm>
           <a:prstGeom prst="rect">
             <a:avLst/>
@@ -22377,7 +21560,7 @@
         <p:spPr>
           <a:xfrm>
             <a:off x="7191756" y="4251960"/>
-            <a:ext cx="4219956" cy="594360"/>
+            <a:ext cx="4219956" cy="713232"/>
           </a:xfrm>
           <a:prstGeom prst="rect">
             <a:avLst/>
@@ -23165,8 +22348,8 @@
         </p:blipFill>
         <p:spPr>
           <a:xfrm>
-            <a:off x="548640" y="1009934"/>
-            <a:ext cx="5227093" cy="5920398"/>
+            <a:off x="548640" y="1417320"/>
+            <a:ext cx="4688737" cy="5303520"/>
           </a:xfrm>
           <a:prstGeom prst="rect">
             <a:avLst/>
@@ -23196,8 +22379,8 @@
         </p:blipFill>
         <p:spPr>
           <a:xfrm>
-            <a:off x="6856635" y="1120289"/>
-            <a:ext cx="4708478" cy="5737711"/>
+            <a:off x="7284151" y="1417320"/>
+            <a:ext cx="4356160" cy="5303520"/>
           </a:xfrm>
           <a:prstGeom prst="rect">
             <a:avLst/>
@@ -29469,8 +28652,8 @@
         </p:nvSpPr>
         <p:spPr>
           <a:xfrm>
-            <a:off x="548640" y="5623560"/>
-            <a:ext cx="11091672" cy="777240"/>
+            <a:off x="548640" y="5486400"/>
+            <a:ext cx="11091672" cy="960120"/>
           </a:xfrm>
           <a:prstGeom prst="roundRect">
             <a:avLst>
@@ -29503,8 +28686,8 @@
         </p:nvSpPr>
         <p:spPr>
           <a:xfrm>
-            <a:off x="822960" y="5623560"/>
-            <a:ext cx="10607040" cy="777240"/>
+            <a:off x="822960" y="5486400"/>
+            <a:ext cx="10607040" cy="960120"/>
           </a:xfrm>
           <a:prstGeom prst="rect">
             <a:avLst/>

--- a/Unit decks/Unit 05 - Aligning Heart & Mind.pptx
+++ b/Unit decks/Unit 05 - Aligning Heart & Mind.pptx
@@ -7690,6 +7690,12 @@
             <a:r>
               <a:rPr lang="en-GB" dirty="0"/>
               <a:t>Step 2 needs the team’s OCEAVL profile. Every member completes and submits the assessment in 3.1 first.</a:t>
+            </a:r>
+          </a:p>
+          <a:p>
+            <a:r>
+              <a:rPr lang="en-GB" dirty="0"/>
+              <a:t>Close the group work with Our Position. Say: "When your record is complete, write as a group a short summary statement of your team's position from this unit, in the unit's own terms. Every member agrees it with the rest of the record. It closes this unit's section of your Capstone S2R Blueprint and guides the assessors through your work."</a:t>
             </a:r>
           </a:p>
         </p:txBody>
